--- a/RAILPOOL_AI_최종결과보고서_RailFit내용반영본_편집본.pptx
+++ b/RAILPOOL_AI_최종결과보고서_RailFit내용반영본_편집본.pptx
@@ -1822,6 +1822,10 @@
             <a:prstDash val="solid"/>
           </a:ln>
         </p:spPr>
+        <p:txBody>
+          <a:bodyPr/>
+          <a:p/>
+        </p:txBody>
       </p:sp>
       <p:sp>
         <p:nvSpPr>
@@ -1851,6 +1855,10 @@
             <a:prstDash val="solid"/>
           </a:ln>
         </p:spPr>
+        <p:txBody>
+          <a:bodyPr/>
+          <a:p/>
+        </p:txBody>
       </p:sp>
       <p:sp>
         <p:nvSpPr>
@@ -1880,6 +1888,10 @@
             <a:prstDash val="solid"/>
           </a:ln>
         </p:spPr>
+        <p:txBody>
+          <a:bodyPr/>
+          <a:p/>
+        </p:txBody>
       </p:sp>
       <p:sp>
         <p:nvSpPr>
@@ -1907,6 +1919,10 @@
             <a:prstDash val="solid"/>
           </a:ln>
         </p:spPr>
+        <p:txBody>
+          <a:bodyPr/>
+          <a:p/>
+        </p:txBody>
       </p:sp>
       <p:sp>
         <p:nvSpPr>
@@ -1943,7 +1959,7 @@
                 <a:ea typeface="Nanum Gothic" pitchFamily="34" charset="-122"/>
                 <a:cs typeface="Nanum Gothic" pitchFamily="34" charset="-120"/>
               </a:rPr>
-              <a:t>MOVE AI CHALLENGE 2026</a:t>
+              <a:t>은하철도99  |  MOVE AI CHALLENGE 2026</a:t>
             </a:r>
             <a:endParaRPr lang="en-US" sz="950" dirty="0"/>
           </a:p>
@@ -1984,7 +2000,7 @@
                 <a:ea typeface="Nanum Gothic" pitchFamily="34" charset="-122"/>
                 <a:cs typeface="Nanum Gothic" pitchFamily="34" charset="-120"/>
               </a:rPr>
-              <a:t>RAILPOOL AI</a:t>
+              <a:t>코레일 플러스 물류</a:t>
             </a:r>
             <a:endParaRPr lang="en-US" sz="3400" dirty="0"/>
           </a:p>
@@ -2025,7 +2041,7 @@
                 <a:ea typeface="Nanum Gothic" pitchFamily="34" charset="-122"/>
                 <a:cs typeface="Nanum Gothic" pitchFamily="34" charset="-120"/>
               </a:rPr>
-              <a:t>레일물류</a:t>
+              <a:t>KORAIL PLUS LOGISTICS</a:t>
             </a:r>
             <a:endParaRPr lang="en-US" sz="2000" dirty="0"/>
           </a:p>
@@ -2054,38 +2070,14 @@
           </a:bodyPr>
           <a:lstStyle/>
           <a:p>
-            <a:pPr indent="0" marL="0">
-              <a:buNone/>
-            </a:pPr>
-            <a:r>
-              <a:rPr lang="en-US" sz="2300" b="1" dirty="0">
-                <a:solidFill>
-                  <a:srgbClr val="FFFFFF"/>
-                </a:solidFill>
-                <a:latin typeface="Nanum Gothic" pitchFamily="34" charset="0"/>
-                <a:ea typeface="Nanum Gothic" pitchFamily="34" charset="-122"/>
-                <a:cs typeface="Nanum Gothic" pitchFamily="34" charset="-120"/>
-              </a:rPr>
-              <a:t>철도가 성립하는 조건을</a:t>
-            </a:r>
-            <a:endParaRPr lang="en-US" sz="2300" dirty="0"/>
-          </a:p>
-          <a:p>
-            <a:pPr indent="0" marL="0">
-              <a:buNone/>
-            </a:pPr>
-            <a:r>
-              <a:rPr lang="en-US" sz="2300" b="1" dirty="0">
-                <a:solidFill>
-                  <a:srgbClr val="FFFFFF"/>
-                </a:solidFill>
-                <a:latin typeface="Nanum Gothic" pitchFamily="34" charset="0"/>
-                <a:ea typeface="Nanum Gothic" pitchFamily="34" charset="-122"/>
-                <a:cs typeface="Nanum Gothic" pitchFamily="34" charset="-120"/>
-              </a:rPr>
-              <a:t>AI가 먼저 역제안합니다</a:t>
-            </a:r>
-            <a:endParaRPr lang="en-US" sz="2300" dirty="0"/>
+            <a:r>
+              <a:t>우리가 화주에게</a:t>
+            </a:r>
+          </a:p>
+          <a:p>
+            <a:r>
+              <a:t>다가갑니다</a:t>
+            </a:r>
           </a:p>
         </p:txBody>
       </p:sp>
@@ -2112,440 +2104,14 @@
           </a:bodyPr>
           <a:lstStyle/>
           <a:p>
-            <a:pPr indent="0" marL="0">
-              <a:lnSpc>
-                <a:spcPct val="105000"/>
-              </a:lnSpc>
-              <a:buNone/>
-            </a:pPr>
-            <a:r>
-              <a:rPr lang="en-US" sz="1120" dirty="0">
-                <a:solidFill>
-                  <a:srgbClr val="C8D7EA"/>
-                </a:solidFill>
-                <a:latin typeface="Nanum Gothic" pitchFamily="34" charset="0"/>
-                <a:ea typeface="Nanum Gothic" pitchFamily="34" charset="-122"/>
-                <a:cs typeface="Nanum Gothic" pitchFamily="34" charset="-120"/>
-              </a:rPr>
-              <a:t>흩어진 소량 화물과 기존 정기열차를 연결해</a:t>
-            </a:r>
-            <a:endParaRPr lang="en-US" sz="1120" dirty="0"/>
-          </a:p>
-          <a:p>
-            <a:pPr indent="0" marL="0">
-              <a:lnSpc>
-                <a:spcPct val="105000"/>
-              </a:lnSpc>
-              <a:buNone/>
-            </a:pPr>
-            <a:r>
-              <a:rPr lang="en-US" sz="1120" dirty="0">
-                <a:solidFill>
-                  <a:srgbClr val="C8D7EA"/>
-                </a:solidFill>
-                <a:latin typeface="Nanum Gothic" pitchFamily="34" charset="0"/>
-                <a:ea typeface="Nanum Gothic" pitchFamily="34" charset="-122"/>
-                <a:cs typeface="Nanum Gothic" pitchFamily="34" charset="-120"/>
-              </a:rPr>
-              <a:t>비용·시간·탄소의 교환조건을 투명하게 보여주는 화주용 서비스</a:t>
-            </a:r>
-            <a:endParaRPr lang="en-US" sz="1120" dirty="0"/>
-          </a:p>
-        </p:txBody>
-      </p:sp>
-      <p:sp>
-        <p:nvSpPr>
-          <p:cNvPr id="11" name="Shape 9"/>
-          <p:cNvSpPr/>
-          <p:nvPr/>
-        </p:nvSpPr>
-        <p:spPr>
-          <a:xfrm>
-            <a:off x="548640" y="4828032"/>
-            <a:ext cx="4498848" cy="1243584"/>
-          </a:xfrm>
-          <a:prstGeom prst="roundRect">
-            <a:avLst>
-              <a:gd name="adj" fmla="val 5882"/>
-            </a:avLst>
-          </a:prstGeom>
-          <a:solidFill>
-            <a:srgbClr val="102B4F"/>
-          </a:solidFill>
-          <a:ln w="10160">
-            <a:solidFill>
-              <a:srgbClr val="234263"/>
-            </a:solidFill>
-            <a:prstDash val="solid"/>
-          </a:ln>
-        </p:spPr>
-      </p:sp>
-      <p:sp>
-        <p:nvSpPr>
-          <p:cNvPr id="12" name="Text 10"/>
-          <p:cNvSpPr/>
-          <p:nvPr/>
-        </p:nvSpPr>
-        <p:spPr>
-          <a:xfrm>
-            <a:off x="749808" y="5010912"/>
-            <a:ext cx="731520" cy="182880"/>
-          </a:xfrm>
-          <a:prstGeom prst="rect">
-            <a:avLst/>
-          </a:prstGeom>
-          <a:noFill/>
-          <a:ln/>
-        </p:spPr>
-        <p:txBody>
-          <a:bodyPr wrap="square" lIns="0" tIns="0" rIns="0" bIns="0" rtlCol="0" anchor="ctr">
-            <a:normAutofit/>
-          </a:bodyPr>
-          <a:lstStyle/>
-          <a:p>
-            <a:pPr indent="0" marL="0">
-              <a:buNone/>
-            </a:pPr>
-            <a:r>
-              <a:rPr lang="en-US" sz="840" b="1" dirty="0">
-                <a:solidFill>
-                  <a:srgbClr val="86B7FF"/>
-                </a:solidFill>
-                <a:latin typeface="Nanum Gothic" pitchFamily="34" charset="0"/>
-                <a:ea typeface="Nanum Gothic" pitchFamily="34" charset="-122"/>
-                <a:cs typeface="Nanum Gothic" pitchFamily="34" charset="-120"/>
-              </a:rPr>
-              <a:t>도전 그룹</a:t>
-            </a:r>
-            <a:endParaRPr lang="en-US" sz="840" dirty="0"/>
-          </a:p>
-        </p:txBody>
-      </p:sp>
-      <p:sp>
-        <p:nvSpPr>
-          <p:cNvPr id="13" name="Text 11"/>
-          <p:cNvSpPr/>
-          <p:nvPr/>
-        </p:nvSpPr>
-        <p:spPr>
-          <a:xfrm>
-            <a:off x="1572768" y="4983480"/>
-            <a:ext cx="1280160" cy="228600"/>
-          </a:xfrm>
-          <a:prstGeom prst="rect">
-            <a:avLst/>
-          </a:prstGeom>
-          <a:noFill/>
-          <a:ln/>
-        </p:spPr>
-        <p:txBody>
-          <a:bodyPr wrap="square" lIns="0" tIns="0" rIns="0" bIns="0" rtlCol="0" anchor="ctr">
-            <a:normAutofit/>
-          </a:bodyPr>
-          <a:lstStyle/>
-          <a:p>
-            <a:pPr indent="0" marL="0">
-              <a:buNone/>
-            </a:pPr>
-            <a:r>
-              <a:rPr lang="en-US" sz="1050" b="1" dirty="0">
-                <a:solidFill>
-                  <a:srgbClr val="FFFFFF"/>
-                </a:solidFill>
-                <a:latin typeface="Nanum Gothic" pitchFamily="34" charset="0"/>
-                <a:ea typeface="Nanum Gothic" pitchFamily="34" charset="-122"/>
-                <a:cs typeface="Nanum Gothic" pitchFamily="34" charset="-120"/>
-              </a:rPr>
-              <a:t>한국철도공사</a:t>
-            </a:r>
-            <a:endParaRPr lang="en-US" sz="1050" dirty="0"/>
-          </a:p>
-        </p:txBody>
-      </p:sp>
-      <p:sp>
-        <p:nvSpPr>
-          <p:cNvPr id="14" name="Text 12"/>
-          <p:cNvSpPr/>
-          <p:nvPr/>
-        </p:nvSpPr>
-        <p:spPr>
-          <a:xfrm>
-            <a:off x="2962656" y="5010912"/>
-            <a:ext cx="438912" cy="182880"/>
-          </a:xfrm>
-          <a:prstGeom prst="rect">
-            <a:avLst/>
-          </a:prstGeom>
-          <a:noFill/>
-          <a:ln/>
-        </p:spPr>
-        <p:txBody>
-          <a:bodyPr wrap="square" lIns="0" tIns="0" rIns="0" bIns="0" rtlCol="0" anchor="ctr">
-            <a:normAutofit/>
-          </a:bodyPr>
-          <a:lstStyle/>
-          <a:p>
-            <a:pPr indent="0" marL="0">
-              <a:buNone/>
-            </a:pPr>
-            <a:r>
-              <a:rPr lang="en-US" sz="840" b="1" dirty="0">
-                <a:solidFill>
-                  <a:srgbClr val="86B7FF"/>
-                </a:solidFill>
-                <a:latin typeface="Nanum Gothic" pitchFamily="34" charset="0"/>
-                <a:ea typeface="Nanum Gothic" pitchFamily="34" charset="-122"/>
-                <a:cs typeface="Nanum Gothic" pitchFamily="34" charset="-120"/>
-              </a:rPr>
-              <a:t>팀명</a:t>
-            </a:r>
-            <a:endParaRPr lang="en-US" sz="840" dirty="0"/>
-          </a:p>
-        </p:txBody>
-      </p:sp>
-      <p:sp>
-        <p:nvSpPr>
-          <p:cNvPr id="15" name="Text 13"/>
-          <p:cNvSpPr/>
-          <p:nvPr/>
-        </p:nvSpPr>
-        <p:spPr>
-          <a:xfrm>
-            <a:off x="3456432" y="4983480"/>
-            <a:ext cx="1371600" cy="228600"/>
-          </a:xfrm>
-          <a:prstGeom prst="rect">
-            <a:avLst/>
-          </a:prstGeom>
-          <a:noFill/>
-          <a:ln/>
-        </p:spPr>
-        <p:txBody>
-          <a:bodyPr wrap="square" lIns="0" tIns="0" rIns="0" bIns="0" rtlCol="0" anchor="ctr">
-            <a:normAutofit/>
-          </a:bodyPr>
-          <a:lstStyle/>
-          <a:p>
-            <a:pPr indent="0" marL="0">
-              <a:buNone/>
-            </a:pPr>
-            <a:r>
-              <a:rPr lang="en-US" sz="1010" b="1" dirty="0">
-                <a:solidFill>
-                  <a:srgbClr val="FFFFFF"/>
-                </a:solidFill>
-                <a:latin typeface="Nanum Gothic" pitchFamily="34" charset="0"/>
-                <a:ea typeface="Nanum Gothic" pitchFamily="34" charset="-122"/>
-                <a:cs typeface="Nanum Gothic" pitchFamily="34" charset="-120"/>
-              </a:rPr>
-              <a:t>Galaxy Express 99</a:t>
-            </a:r>
-            <a:endParaRPr lang="en-US" sz="1010" dirty="0"/>
-          </a:p>
-        </p:txBody>
-      </p:sp>
-      <p:sp>
-        <p:nvSpPr>
-          <p:cNvPr id="16" name="Text 14"/>
-          <p:cNvSpPr/>
-          <p:nvPr/>
-        </p:nvSpPr>
-        <p:spPr>
-          <a:xfrm>
-            <a:off x="749808" y="5413248"/>
-            <a:ext cx="731520" cy="182880"/>
-          </a:xfrm>
-          <a:prstGeom prst="rect">
-            <a:avLst/>
-          </a:prstGeom>
-          <a:noFill/>
-          <a:ln/>
-        </p:spPr>
-        <p:txBody>
-          <a:bodyPr wrap="square" lIns="0" tIns="0" rIns="0" bIns="0" rtlCol="0" anchor="ctr">
-            <a:normAutofit/>
-          </a:bodyPr>
-          <a:lstStyle/>
-          <a:p>
-            <a:pPr indent="0" marL="0">
-              <a:buNone/>
-            </a:pPr>
-            <a:r>
-              <a:rPr lang="en-US" sz="840" b="1" dirty="0">
-                <a:solidFill>
-                  <a:srgbClr val="86B7FF"/>
-                </a:solidFill>
-                <a:latin typeface="Nanum Gothic" pitchFamily="34" charset="0"/>
-                <a:ea typeface="Nanum Gothic" pitchFamily="34" charset="-122"/>
-                <a:cs typeface="Nanum Gothic" pitchFamily="34" charset="-120"/>
-              </a:rPr>
-              <a:t>팀원·역할</a:t>
-            </a:r>
-            <a:endParaRPr lang="en-US" sz="840" dirty="0"/>
-          </a:p>
-        </p:txBody>
-      </p:sp>
-      <p:sp>
-        <p:nvSpPr>
-          <p:cNvPr id="17" name="Text 15"/>
-          <p:cNvSpPr/>
-          <p:nvPr/>
-        </p:nvSpPr>
-        <p:spPr>
-          <a:xfrm>
-            <a:off x="1572768" y="5385816"/>
-            <a:ext cx="3273552" cy="237744"/>
-          </a:xfrm>
-          <a:prstGeom prst="rect">
-            <a:avLst/>
-          </a:prstGeom>
-          <a:noFill/>
-          <a:ln/>
-        </p:spPr>
-        <p:txBody>
-          <a:bodyPr wrap="square" lIns="0" tIns="0" rIns="0" bIns="0" rtlCol="0" anchor="ctr">
-            <a:normAutofit/>
-          </a:bodyPr>
-          <a:lstStyle/>
-          <a:p>
-            <a:pPr indent="0" marL="0">
-              <a:buNone/>
-            </a:pPr>
-            <a:r>
-              <a:rPr lang="en-US" sz="880" dirty="0">
-                <a:solidFill>
-                  <a:srgbClr val="FFFFFF"/>
-                </a:solidFill>
-                <a:latin typeface="Nanum Gothic" pitchFamily="34" charset="0"/>
-                <a:ea typeface="Nanum Gothic" pitchFamily="34" charset="-122"/>
-                <a:cs typeface="Nanum Gothic" pitchFamily="34" charset="-120"/>
-              </a:rPr>
-              <a:t>프로젝트팀 · 서비스 기획/UX · AI/Backend · Frontend/QA</a:t>
-            </a:r>
-            <a:endParaRPr lang="en-US" sz="880" dirty="0"/>
-          </a:p>
-        </p:txBody>
-      </p:sp>
-      <p:sp>
-        <p:nvSpPr>
-          <p:cNvPr id="18" name="Text 16"/>
-          <p:cNvSpPr/>
-          <p:nvPr/>
-        </p:nvSpPr>
-        <p:spPr>
-          <a:xfrm>
-            <a:off x="749808" y="5788152"/>
-            <a:ext cx="731520" cy="164592"/>
-          </a:xfrm>
-          <a:prstGeom prst="rect">
-            <a:avLst/>
-          </a:prstGeom>
-          <a:noFill/>
-          <a:ln/>
-        </p:spPr>
-        <p:txBody>
-          <a:bodyPr wrap="square" lIns="0" tIns="0" rIns="0" bIns="0" rtlCol="0" anchor="ctr">
-            <a:normAutofit/>
-          </a:bodyPr>
-          <a:lstStyle/>
-          <a:p>
-            <a:pPr indent="0" marL="0">
-              <a:buNone/>
-            </a:pPr>
-            <a:r>
-              <a:rPr lang="en-US" sz="840" b="1" dirty="0">
-                <a:solidFill>
-                  <a:srgbClr val="86B7FF"/>
-                </a:solidFill>
-                <a:latin typeface="Nanum Gothic" pitchFamily="34" charset="0"/>
-                <a:ea typeface="Nanum Gothic" pitchFamily="34" charset="-122"/>
-                <a:cs typeface="Nanum Gothic" pitchFamily="34" charset="-120"/>
-              </a:rPr>
-              <a:t>작성일</a:t>
-            </a:r>
-            <a:endParaRPr lang="en-US" sz="840" dirty="0"/>
-          </a:p>
-        </p:txBody>
-      </p:sp>
-      <p:sp>
-        <p:nvSpPr>
-          <p:cNvPr id="19" name="Text 17"/>
-          <p:cNvSpPr/>
-          <p:nvPr/>
-        </p:nvSpPr>
-        <p:spPr>
-          <a:xfrm>
-            <a:off x="1572768" y="5751576"/>
-            <a:ext cx="1097280" cy="219456"/>
-          </a:xfrm>
-          <a:prstGeom prst="rect">
-            <a:avLst/>
-          </a:prstGeom>
-          <a:noFill/>
-          <a:ln/>
-        </p:spPr>
-        <p:txBody>
-          <a:bodyPr wrap="square" lIns="0" tIns="0" rIns="0" bIns="0" rtlCol="0" anchor="ctr">
-            <a:normAutofit/>
-          </a:bodyPr>
-          <a:lstStyle/>
-          <a:p>
-            <a:pPr indent="0" marL="0">
-              <a:buNone/>
-            </a:pPr>
-            <a:r>
-              <a:rPr lang="en-US" sz="950" dirty="0">
-                <a:solidFill>
-                  <a:srgbClr val="FFFFFF"/>
-                </a:solidFill>
-                <a:latin typeface="Nanum Gothic" pitchFamily="34" charset="0"/>
-                <a:ea typeface="Nanum Gothic" pitchFamily="34" charset="-122"/>
-                <a:cs typeface="Nanum Gothic" pitchFamily="34" charset="-120"/>
-              </a:rPr>
-              <a:t>2026. 08. 13</a:t>
-            </a:r>
-            <a:endParaRPr lang="en-US" sz="950" dirty="0"/>
-          </a:p>
-        </p:txBody>
-      </p:sp>
-      <p:sp>
-        <p:nvSpPr>
-          <p:cNvPr id="20" name="Text 18"/>
-          <p:cNvSpPr/>
-          <p:nvPr/>
-        </p:nvSpPr>
-        <p:spPr>
-          <a:xfrm>
-            <a:off x="3236976" y="5751576"/>
-            <a:ext cx="1572768" cy="219456"/>
-          </a:xfrm>
-          <a:prstGeom prst="rect">
-            <a:avLst/>
-          </a:prstGeom>
-          <a:noFill/>
-          <a:ln/>
-        </p:spPr>
-        <p:txBody>
-          <a:bodyPr wrap="square" lIns="0" tIns="0" rIns="0" bIns="0" rtlCol="0" anchor="ctr">
-            <a:normAutofit/>
-          </a:bodyPr>
-          <a:lstStyle/>
-          <a:p>
-            <a:pPr algn="r" indent="0" marL="0">
-              <a:buNone/>
-            </a:pPr>
-            <a:r>
-              <a:rPr lang="en-US" sz="950" b="1" dirty="0">
-                <a:solidFill>
-                  <a:srgbClr val="C8D7EA"/>
-                </a:solidFill>
-                <a:latin typeface="Nanum Gothic" pitchFamily="34" charset="0"/>
-                <a:ea typeface="Nanum Gothic" pitchFamily="34" charset="-122"/>
-                <a:cs typeface="Nanum Gothic" pitchFamily="34" charset="-120"/>
-              </a:rPr>
-              <a:t>본선 제출용 결과보고서</a:t>
-            </a:r>
-            <a:endParaRPr lang="en-US" sz="950" dirty="0"/>
+            <a:r>
+              <a:t>화주가 철도를 찾아 헤매지 않도록,</a:t>
+            </a:r>
+          </a:p>
+          <a:p>
+            <a:r>
+              <a:t>코레일이 먼저 가능한 운송 조건을 설계하고 제안합니다.</a:t>
+            </a:r>
           </a:p>
         </p:txBody>
       </p:sp>
@@ -2582,6 +2148,10 @@
             </a:outerShdw>
           </a:effectLst>
         </p:spPr>
+        <p:txBody>
+          <a:bodyPr/>
+          <a:p/>
+        </p:txBody>
       </p:sp>
       <p:pic>
         <p:nvPicPr>
@@ -2642,7 +2212,7 @@
                 <a:ea typeface="Nanum Gothic" pitchFamily="34" charset="-122"/>
                 <a:cs typeface="Nanum Gothic" pitchFamily="34" charset="-120"/>
               </a:rPr>
-              <a:t>LIVE PROTOTYPE</a:t>
+              <a:t>통합 물류 서비스</a:t>
             </a:r>
             <a:endParaRPr lang="en-US" sz="820" dirty="0"/>
           </a:p>
@@ -7318,6 +6888,10 @@
             <a:prstDash val="solid"/>
           </a:ln>
         </p:spPr>
+        <p:txBody>
+          <a:bodyPr/>
+          <a:p/>
+        </p:txBody>
       </p:sp>
       <p:sp>
         <p:nvSpPr>
@@ -7436,7 +7010,7 @@
                 <a:ea typeface="Nanum Gothic" pitchFamily="34" charset="-122"/>
                 <a:cs typeface="Nanum Gothic" pitchFamily="34" charset="-120"/>
               </a:rPr>
-              <a:t>화주가 원하는 것은 철도 정보가 아니라, 요청한 화물이 실제로 갈 수 있는지에 대한 답입니다.</a:t>
+              <a:t>화주는 문전 운송부터 도착 마감까지, 실제 실행 가능한 하나의 답을 원합니다.</a:t>
             </a:r>
             <a:endParaRPr lang="en-US" sz="950" dirty="0"/>
           </a:p>
@@ -7464,6 +7038,10 @@
             <a:prstDash val="solid"/>
           </a:ln>
         </p:spPr>
+        <p:txBody>
+          <a:bodyPr/>
+          <a:p/>
+        </p:txBody>
       </p:sp>
       <p:sp>
         <p:nvSpPr>
@@ -7491,6 +7069,10 @@
             <a:prstDash val="solid"/>
           </a:ln>
         </p:spPr>
+        <p:txBody>
+          <a:bodyPr/>
+          <a:p/>
+        </p:txBody>
       </p:sp>
       <p:sp>
         <p:nvSpPr>
@@ -7527,7 +7109,7 @@
                 <a:ea typeface="Nanum Gothic" pitchFamily="34" charset="-122"/>
                 <a:cs typeface="Nanum Gothic" pitchFamily="34" charset="-120"/>
               </a:rPr>
-              <a:t>“화물이 없는 것이 아니라, 실제 수송이 성립하는 조건을 찾기 어렵습니다.”</a:t>
+              <a:t>“이용 의향은 있어도 누구에게 무엇을 묻고, 어떤 조건을 바꿔야 하는지 알기 어렵습니다.”</a:t>
             </a:r>
             <a:endParaRPr lang="en-US" sz="1700" dirty="0"/>
           </a:p>
@@ -9264,6 +8846,10 @@
             <a:prstDash val="solid"/>
           </a:ln>
         </p:spPr>
+        <p:txBody>
+          <a:bodyPr/>
+          <a:p/>
+        </p:txBody>
       </p:sp>
       <p:sp>
         <p:nvSpPr>
@@ -9341,7 +8927,7 @@
                 <a:ea typeface="Nanum Gothic" pitchFamily="34" charset="-122"/>
                 <a:cs typeface="Nanum Gothic" pitchFamily="34" charset="-120"/>
               </a:rPr>
-              <a:t>아이템 개요</a:t>
+              <a:t>해결책 · 코레일 플러스 물류</a:t>
             </a:r>
             <a:endParaRPr lang="en-US" sz="2400" dirty="0"/>
           </a:p>
@@ -9382,7 +8968,7 @@
                 <a:ea typeface="Nanum Gothic" pitchFamily="34" charset="-122"/>
                 <a:cs typeface="Nanum Gothic" pitchFamily="34" charset="-120"/>
               </a:rPr>
-              <a:t>철도를 안내하는 앱이 아니라, 화주 조건을 실행 가능한 검토안으로 바꾸는 의사결정 서비스입니다.</a:t>
+              <a:t>탐색·비교·공동수송·검토 요청을 하나로 잇는 화주 중심 통합 서비스입니다.</a:t>
             </a:r>
             <a:endParaRPr lang="en-US" sz="950" dirty="0"/>
           </a:p>
@@ -9410,6 +8996,10 @@
             <a:prstDash val="solid"/>
           </a:ln>
         </p:spPr>
+        <p:txBody>
+          <a:bodyPr/>
+          <a:p/>
+        </p:txBody>
       </p:sp>
       <p:sp>
         <p:nvSpPr>
@@ -9437,6 +9027,10 @@
             <a:prstDash val="solid"/>
           </a:ln>
         </p:spPr>
+        <p:txBody>
+          <a:bodyPr/>
+          <a:p/>
+        </p:txBody>
       </p:sp>
       <p:sp>
         <p:nvSpPr>
@@ -9461,38 +9055,14 @@
           </a:bodyPr>
           <a:lstStyle/>
           <a:p>
-            <a:pPr indent="0" marL="0">
-              <a:buNone/>
-            </a:pPr>
-            <a:r>
-              <a:rPr lang="en-US" sz="1520" b="1" dirty="0">
-                <a:solidFill>
-                  <a:srgbClr val="FFFFFF"/>
-                </a:solidFill>
-                <a:latin typeface="Nanum Gothic" pitchFamily="34" charset="0"/>
-                <a:ea typeface="Nanum Gothic" pitchFamily="34" charset="-122"/>
-                <a:cs typeface="Nanum Gothic" pitchFamily="34" charset="-120"/>
-              </a:rPr>
-              <a:t>철도로 갈 수 있는 조건을 먼저 만들고,</a:t>
-            </a:r>
-            <a:endParaRPr lang="en-US" sz="1520" dirty="0"/>
-          </a:p>
-          <a:p>
-            <a:pPr indent="0" marL="0">
-              <a:buNone/>
-            </a:pPr>
-            <a:r>
-              <a:rPr lang="en-US" sz="1520" b="1" dirty="0">
-                <a:solidFill>
-                  <a:srgbClr val="FFFFFF"/>
-                </a:solidFill>
-                <a:latin typeface="Nanum Gothic" pitchFamily="34" charset="0"/>
-                <a:ea typeface="Nanum Gothic" pitchFamily="34" charset="-122"/>
-                <a:cs typeface="Nanum Gothic" pitchFamily="34" charset="-120"/>
-              </a:rPr>
-              <a:t>사용자와 코레일이 함께 확정하는 화물 운송 설계 서비스</a:t>
-            </a:r>
-            <a:endParaRPr lang="en-US" sz="1520" dirty="0"/>
+            <a:r>
+              <a:t>화주가 찾아오는 물류가 아니라,</a:t>
+            </a:r>
+          </a:p>
+          <a:p>
+            <a:r>
+              <a:t>코레일이 가능한 조건을 만들어 먼저 제안하는 통합 서비스</a:t>
+            </a:r>
           </a:p>
         </p:txBody>
       </p:sp>

--- a/RAILPOOL_AI_최종결과보고서_RailFit내용반영본_편집본.pptx
+++ b/RAILPOOL_AI_최종결과보고서_RailFit내용반영본_편집본.pptx
@@ -1822,6 +1822,10 @@
             <a:prstDash val="solid"/>
           </a:ln>
         </p:spPr>
+        <p:txBody>
+          <a:bodyPr/>
+          <a:p/>
+        </p:txBody>
       </p:sp>
       <p:sp>
         <p:nvSpPr>
@@ -1851,6 +1855,10 @@
             <a:prstDash val="solid"/>
           </a:ln>
         </p:spPr>
+        <p:txBody>
+          <a:bodyPr/>
+          <a:p/>
+        </p:txBody>
       </p:sp>
       <p:sp>
         <p:nvSpPr>
@@ -1880,6 +1888,10 @@
             <a:prstDash val="solid"/>
           </a:ln>
         </p:spPr>
+        <p:txBody>
+          <a:bodyPr/>
+          <a:p/>
+        </p:txBody>
       </p:sp>
       <p:sp>
         <p:nvSpPr>
@@ -1907,6 +1919,10 @@
             <a:prstDash val="solid"/>
           </a:ln>
         </p:spPr>
+        <p:txBody>
+          <a:bodyPr/>
+          <a:p/>
+        </p:txBody>
       </p:sp>
       <p:sp>
         <p:nvSpPr>
@@ -1943,7 +1959,7 @@
                 <a:ea typeface="Nanum Gothic" pitchFamily="34" charset="-122"/>
                 <a:cs typeface="Nanum Gothic" pitchFamily="34" charset="-120"/>
               </a:rPr>
-              <a:t>MOVE AI CHALLENGE 2026</a:t>
+              <a:t>은하철도99  |  MOVE AI CHALLENGE 2026</a:t>
             </a:r>
             <a:endParaRPr lang="en-US" sz="950" dirty="0"/>
           </a:p>
@@ -1984,7 +2000,7 @@
                 <a:ea typeface="Nanum Gothic" pitchFamily="34" charset="-122"/>
                 <a:cs typeface="Nanum Gothic" pitchFamily="34" charset="-120"/>
               </a:rPr>
-              <a:t>RAILPOOL AI</a:t>
+              <a:t>코레일 플러스 물류</a:t>
             </a:r>
             <a:endParaRPr lang="en-US" sz="3400" dirty="0"/>
           </a:p>
@@ -2025,7 +2041,7 @@
                 <a:ea typeface="Nanum Gothic" pitchFamily="34" charset="-122"/>
                 <a:cs typeface="Nanum Gothic" pitchFamily="34" charset="-120"/>
               </a:rPr>
-              <a:t>레일물류</a:t>
+              <a:t>KORAIL PLUS LOGISTICS</a:t>
             </a:r>
             <a:endParaRPr lang="en-US" sz="2000" dirty="0"/>
           </a:p>
@@ -2066,7 +2082,8 @@
                 <a:ea typeface="Nanum Gothic" pitchFamily="34" charset="-122"/>
                 <a:cs typeface="Nanum Gothic" pitchFamily="34" charset="-120"/>
               </a:rPr>
-              <a:t>철도가 성립하는 조건을</a:t>
+              <a:t>우리가 화주에게
+다가갑니다</a:t>
             </a:r>
             <a:endParaRPr lang="en-US" sz="2300" dirty="0"/>
           </a:p>
@@ -2074,17 +2091,6 @@
             <a:pPr indent="0" marL="0">
               <a:buNone/>
             </a:pPr>
-            <a:r>
-              <a:rPr lang="en-US" sz="2300" b="1" dirty="0">
-                <a:solidFill>
-                  <a:srgbClr val="FFFFFF"/>
-                </a:solidFill>
-                <a:latin typeface="Nanum Gothic" pitchFamily="34" charset="0"/>
-                <a:ea typeface="Nanum Gothic" pitchFamily="34" charset="-122"/>
-                <a:cs typeface="Nanum Gothic" pitchFamily="34" charset="-120"/>
-              </a:rPr>
-              <a:t>AI가 먼저 역제안합니다</a:t>
-            </a:r>
             <a:endParaRPr lang="en-US" sz="2300" dirty="0"/>
           </a:p>
         </p:txBody>
@@ -2127,7 +2133,8 @@
                 <a:ea typeface="Nanum Gothic" pitchFamily="34" charset="-122"/>
                 <a:cs typeface="Nanum Gothic" pitchFamily="34" charset="-120"/>
               </a:rPr>
-              <a:t>흩어진 소량 화물과 기존 정기열차를 연결해</a:t>
+              <a:t>화주가 철도를 찾아 헤매지 않도록,
+코레일이 먼저 가능한 운송 조건을 설계하고 제안합니다.</a:t>
             </a:r>
             <a:endParaRPr lang="en-US" sz="1120" dirty="0"/>
           </a:p>
@@ -2138,17 +2145,6 @@
               </a:lnSpc>
               <a:buNone/>
             </a:pPr>
-            <a:r>
-              <a:rPr lang="en-US" sz="1120" dirty="0">
-                <a:solidFill>
-                  <a:srgbClr val="C8D7EA"/>
-                </a:solidFill>
-                <a:latin typeface="Nanum Gothic" pitchFamily="34" charset="0"/>
-                <a:ea typeface="Nanum Gothic" pitchFamily="34" charset="-122"/>
-                <a:cs typeface="Nanum Gothic" pitchFamily="34" charset="-120"/>
-              </a:rPr>
-              <a:t>비용·시간·탄소의 교환조건을 투명하게 보여주는 화주용 서비스</a:t>
-            </a:r>
             <a:endParaRPr lang="en-US" sz="1120" dirty="0"/>
           </a:p>
         </p:txBody>
@@ -2179,374 +2175,9 @@
             <a:prstDash val="solid"/>
           </a:ln>
         </p:spPr>
-      </p:sp>
-      <p:sp>
-        <p:nvSpPr>
-          <p:cNvPr id="12" name="Text 10"/>
-          <p:cNvSpPr/>
-          <p:nvPr/>
-        </p:nvSpPr>
-        <p:spPr>
-          <a:xfrm>
-            <a:off x="749808" y="5010912"/>
-            <a:ext cx="731520" cy="182880"/>
-          </a:xfrm>
-          <a:prstGeom prst="rect">
-            <a:avLst/>
-          </a:prstGeom>
-          <a:noFill/>
-          <a:ln/>
-        </p:spPr>
-        <p:txBody>
-          <a:bodyPr wrap="square" lIns="0" tIns="0" rIns="0" bIns="0" rtlCol="0" anchor="ctr">
-            <a:normAutofit/>
-          </a:bodyPr>
-          <a:lstStyle/>
-          <a:p>
-            <a:pPr indent="0" marL="0">
-              <a:buNone/>
-            </a:pPr>
-            <a:r>
-              <a:rPr lang="en-US" sz="840" b="1" dirty="0">
-                <a:solidFill>
-                  <a:srgbClr val="86B7FF"/>
-                </a:solidFill>
-                <a:latin typeface="Nanum Gothic" pitchFamily="34" charset="0"/>
-                <a:ea typeface="Nanum Gothic" pitchFamily="34" charset="-122"/>
-                <a:cs typeface="Nanum Gothic" pitchFamily="34" charset="-120"/>
-              </a:rPr>
-              <a:t>도전 그룹</a:t>
-            </a:r>
-            <a:endParaRPr lang="en-US" sz="840" dirty="0"/>
-          </a:p>
-        </p:txBody>
-      </p:sp>
-      <p:sp>
-        <p:nvSpPr>
-          <p:cNvPr id="13" name="Text 11"/>
-          <p:cNvSpPr/>
-          <p:nvPr/>
-        </p:nvSpPr>
-        <p:spPr>
-          <a:xfrm>
-            <a:off x="1572768" y="4983480"/>
-            <a:ext cx="1280160" cy="228600"/>
-          </a:xfrm>
-          <a:prstGeom prst="rect">
-            <a:avLst/>
-          </a:prstGeom>
-          <a:noFill/>
-          <a:ln/>
-        </p:spPr>
-        <p:txBody>
-          <a:bodyPr wrap="square" lIns="0" tIns="0" rIns="0" bIns="0" rtlCol="0" anchor="ctr">
-            <a:normAutofit/>
-          </a:bodyPr>
-          <a:lstStyle/>
-          <a:p>
-            <a:pPr indent="0" marL="0">
-              <a:buNone/>
-            </a:pPr>
-            <a:r>
-              <a:rPr lang="en-US" sz="1050" b="1" dirty="0">
-                <a:solidFill>
-                  <a:srgbClr val="FFFFFF"/>
-                </a:solidFill>
-                <a:latin typeface="Nanum Gothic" pitchFamily="34" charset="0"/>
-                <a:ea typeface="Nanum Gothic" pitchFamily="34" charset="-122"/>
-                <a:cs typeface="Nanum Gothic" pitchFamily="34" charset="-120"/>
-              </a:rPr>
-              <a:t>한국철도공사</a:t>
-            </a:r>
-            <a:endParaRPr lang="en-US" sz="1050" dirty="0"/>
-          </a:p>
-        </p:txBody>
-      </p:sp>
-      <p:sp>
-        <p:nvSpPr>
-          <p:cNvPr id="14" name="Text 12"/>
-          <p:cNvSpPr/>
-          <p:nvPr/>
-        </p:nvSpPr>
-        <p:spPr>
-          <a:xfrm>
-            <a:off x="2962656" y="5010912"/>
-            <a:ext cx="438912" cy="182880"/>
-          </a:xfrm>
-          <a:prstGeom prst="rect">
-            <a:avLst/>
-          </a:prstGeom>
-          <a:noFill/>
-          <a:ln/>
-        </p:spPr>
-        <p:txBody>
-          <a:bodyPr wrap="square" lIns="0" tIns="0" rIns="0" bIns="0" rtlCol="0" anchor="ctr">
-            <a:normAutofit/>
-          </a:bodyPr>
-          <a:lstStyle/>
-          <a:p>
-            <a:pPr indent="0" marL="0">
-              <a:buNone/>
-            </a:pPr>
-            <a:r>
-              <a:rPr lang="en-US" sz="840" b="1" dirty="0">
-                <a:solidFill>
-                  <a:srgbClr val="86B7FF"/>
-                </a:solidFill>
-                <a:latin typeface="Nanum Gothic" pitchFamily="34" charset="0"/>
-                <a:ea typeface="Nanum Gothic" pitchFamily="34" charset="-122"/>
-                <a:cs typeface="Nanum Gothic" pitchFamily="34" charset="-120"/>
-              </a:rPr>
-              <a:t>팀명</a:t>
-            </a:r>
-            <a:endParaRPr lang="en-US" sz="840" dirty="0"/>
-          </a:p>
-        </p:txBody>
-      </p:sp>
-      <p:sp>
-        <p:nvSpPr>
-          <p:cNvPr id="15" name="Text 13"/>
-          <p:cNvSpPr/>
-          <p:nvPr/>
-        </p:nvSpPr>
-        <p:spPr>
-          <a:xfrm>
-            <a:off x="3456432" y="4983480"/>
-            <a:ext cx="1371600" cy="228600"/>
-          </a:xfrm>
-          <a:prstGeom prst="rect">
-            <a:avLst/>
-          </a:prstGeom>
-          <a:noFill/>
-          <a:ln/>
-        </p:spPr>
-        <p:txBody>
-          <a:bodyPr wrap="square" lIns="0" tIns="0" rIns="0" bIns="0" rtlCol="0" anchor="ctr">
-            <a:normAutofit/>
-          </a:bodyPr>
-          <a:lstStyle/>
-          <a:p>
-            <a:pPr indent="0" marL="0">
-              <a:buNone/>
-            </a:pPr>
-            <a:r>
-              <a:rPr lang="en-US" sz="1010" b="1" dirty="0">
-                <a:solidFill>
-                  <a:srgbClr val="FFFFFF"/>
-                </a:solidFill>
-                <a:latin typeface="Nanum Gothic" pitchFamily="34" charset="0"/>
-                <a:ea typeface="Nanum Gothic" pitchFamily="34" charset="-122"/>
-                <a:cs typeface="Nanum Gothic" pitchFamily="34" charset="-120"/>
-              </a:rPr>
-              <a:t>Galaxy Express 99</a:t>
-            </a:r>
-            <a:endParaRPr lang="en-US" sz="1010" dirty="0"/>
-          </a:p>
-        </p:txBody>
-      </p:sp>
-      <p:sp>
-        <p:nvSpPr>
-          <p:cNvPr id="16" name="Text 14"/>
-          <p:cNvSpPr/>
-          <p:nvPr/>
-        </p:nvSpPr>
-        <p:spPr>
-          <a:xfrm>
-            <a:off x="749808" y="5413248"/>
-            <a:ext cx="731520" cy="182880"/>
-          </a:xfrm>
-          <a:prstGeom prst="rect">
-            <a:avLst/>
-          </a:prstGeom>
-          <a:noFill/>
-          <a:ln/>
-        </p:spPr>
-        <p:txBody>
-          <a:bodyPr wrap="square" lIns="0" tIns="0" rIns="0" bIns="0" rtlCol="0" anchor="ctr">
-            <a:normAutofit/>
-          </a:bodyPr>
-          <a:lstStyle/>
-          <a:p>
-            <a:pPr indent="0" marL="0">
-              <a:buNone/>
-            </a:pPr>
-            <a:r>
-              <a:rPr lang="en-US" sz="840" b="1" dirty="0">
-                <a:solidFill>
-                  <a:srgbClr val="86B7FF"/>
-                </a:solidFill>
-                <a:latin typeface="Nanum Gothic" pitchFamily="34" charset="0"/>
-                <a:ea typeface="Nanum Gothic" pitchFamily="34" charset="-122"/>
-                <a:cs typeface="Nanum Gothic" pitchFamily="34" charset="-120"/>
-              </a:rPr>
-              <a:t>팀원·역할</a:t>
-            </a:r>
-            <a:endParaRPr lang="en-US" sz="840" dirty="0"/>
-          </a:p>
-        </p:txBody>
-      </p:sp>
-      <p:sp>
-        <p:nvSpPr>
-          <p:cNvPr id="17" name="Text 15"/>
-          <p:cNvSpPr/>
-          <p:nvPr/>
-        </p:nvSpPr>
-        <p:spPr>
-          <a:xfrm>
-            <a:off x="1572768" y="5385816"/>
-            <a:ext cx="3273552" cy="237744"/>
-          </a:xfrm>
-          <a:prstGeom prst="rect">
-            <a:avLst/>
-          </a:prstGeom>
-          <a:noFill/>
-          <a:ln/>
-        </p:spPr>
-        <p:txBody>
-          <a:bodyPr wrap="square" lIns="0" tIns="0" rIns="0" bIns="0" rtlCol="0" anchor="ctr">
-            <a:normAutofit/>
-          </a:bodyPr>
-          <a:lstStyle/>
-          <a:p>
-            <a:pPr indent="0" marL="0">
-              <a:buNone/>
-            </a:pPr>
-            <a:r>
-              <a:rPr lang="en-US" sz="880" dirty="0">
-                <a:solidFill>
-                  <a:srgbClr val="FFFFFF"/>
-                </a:solidFill>
-                <a:latin typeface="Nanum Gothic" pitchFamily="34" charset="0"/>
-                <a:ea typeface="Nanum Gothic" pitchFamily="34" charset="-122"/>
-                <a:cs typeface="Nanum Gothic" pitchFamily="34" charset="-120"/>
-              </a:rPr>
-              <a:t>프로젝트팀 · 서비스 기획/UX · AI/Backend · Frontend/QA</a:t>
-            </a:r>
-            <a:endParaRPr lang="en-US" sz="880" dirty="0"/>
-          </a:p>
-        </p:txBody>
-      </p:sp>
-      <p:sp>
-        <p:nvSpPr>
-          <p:cNvPr id="18" name="Text 16"/>
-          <p:cNvSpPr/>
-          <p:nvPr/>
-        </p:nvSpPr>
-        <p:spPr>
-          <a:xfrm>
-            <a:off x="749808" y="5788152"/>
-            <a:ext cx="731520" cy="164592"/>
-          </a:xfrm>
-          <a:prstGeom prst="rect">
-            <a:avLst/>
-          </a:prstGeom>
-          <a:noFill/>
-          <a:ln/>
-        </p:spPr>
-        <p:txBody>
-          <a:bodyPr wrap="square" lIns="0" tIns="0" rIns="0" bIns="0" rtlCol="0" anchor="ctr">
-            <a:normAutofit/>
-          </a:bodyPr>
-          <a:lstStyle/>
-          <a:p>
-            <a:pPr indent="0" marL="0">
-              <a:buNone/>
-            </a:pPr>
-            <a:r>
-              <a:rPr lang="en-US" sz="840" b="1" dirty="0">
-                <a:solidFill>
-                  <a:srgbClr val="86B7FF"/>
-                </a:solidFill>
-                <a:latin typeface="Nanum Gothic" pitchFamily="34" charset="0"/>
-                <a:ea typeface="Nanum Gothic" pitchFamily="34" charset="-122"/>
-                <a:cs typeface="Nanum Gothic" pitchFamily="34" charset="-120"/>
-              </a:rPr>
-              <a:t>작성일</a:t>
-            </a:r>
-            <a:endParaRPr lang="en-US" sz="840" dirty="0"/>
-          </a:p>
-        </p:txBody>
-      </p:sp>
-      <p:sp>
-        <p:nvSpPr>
-          <p:cNvPr id="19" name="Text 17"/>
-          <p:cNvSpPr/>
-          <p:nvPr/>
-        </p:nvSpPr>
-        <p:spPr>
-          <a:xfrm>
-            <a:off x="1572768" y="5751576"/>
-            <a:ext cx="1097280" cy="219456"/>
-          </a:xfrm>
-          <a:prstGeom prst="rect">
-            <a:avLst/>
-          </a:prstGeom>
-          <a:noFill/>
-          <a:ln/>
-        </p:spPr>
-        <p:txBody>
-          <a:bodyPr wrap="square" lIns="0" tIns="0" rIns="0" bIns="0" rtlCol="0" anchor="ctr">
-            <a:normAutofit/>
-          </a:bodyPr>
-          <a:lstStyle/>
-          <a:p>
-            <a:pPr indent="0" marL="0">
-              <a:buNone/>
-            </a:pPr>
-            <a:r>
-              <a:rPr lang="en-US" sz="950" dirty="0">
-                <a:solidFill>
-                  <a:srgbClr val="FFFFFF"/>
-                </a:solidFill>
-                <a:latin typeface="Nanum Gothic" pitchFamily="34" charset="0"/>
-                <a:ea typeface="Nanum Gothic" pitchFamily="34" charset="-122"/>
-                <a:cs typeface="Nanum Gothic" pitchFamily="34" charset="-120"/>
-              </a:rPr>
-              <a:t>2026. 08. 13</a:t>
-            </a:r>
-            <a:endParaRPr lang="en-US" sz="950" dirty="0"/>
-          </a:p>
-        </p:txBody>
-      </p:sp>
-      <p:sp>
-        <p:nvSpPr>
-          <p:cNvPr id="20" name="Text 18"/>
-          <p:cNvSpPr/>
-          <p:nvPr/>
-        </p:nvSpPr>
-        <p:spPr>
-          <a:xfrm>
-            <a:off x="3236976" y="5751576"/>
-            <a:ext cx="1572768" cy="219456"/>
-          </a:xfrm>
-          <a:prstGeom prst="rect">
-            <a:avLst/>
-          </a:prstGeom>
-          <a:noFill/>
-          <a:ln/>
-        </p:spPr>
-        <p:txBody>
-          <a:bodyPr wrap="square" lIns="0" tIns="0" rIns="0" bIns="0" rtlCol="0" anchor="ctr">
-            <a:normAutofit/>
-          </a:bodyPr>
-          <a:lstStyle/>
-          <a:p>
-            <a:pPr algn="r" indent="0" marL="0">
-              <a:buNone/>
-            </a:pPr>
-            <a:r>
-              <a:rPr lang="en-US" sz="950" b="1" dirty="0">
-                <a:solidFill>
-                  <a:srgbClr val="C8D7EA"/>
-                </a:solidFill>
-                <a:latin typeface="Nanum Gothic" pitchFamily="34" charset="0"/>
-                <a:ea typeface="Nanum Gothic" pitchFamily="34" charset="-122"/>
-                <a:cs typeface="Nanum Gothic" pitchFamily="34" charset="-120"/>
-              </a:rPr>
-              <a:t>본선 제출용 결과보고서</a:t>
-            </a:r>
-            <a:endParaRPr lang="en-US" sz="950" dirty="0"/>
-          </a:p>
+        <p:txBody>
+          <a:bodyPr/>
+          <a:p/>
         </p:txBody>
       </p:sp>
       <p:sp>
@@ -2582,6 +2213,10 @@
             </a:outerShdw>
           </a:effectLst>
         </p:spPr>
+        <p:txBody>
+          <a:bodyPr/>
+          <a:p/>
+        </p:txBody>
       </p:sp>
       <p:pic>
         <p:nvPicPr>
@@ -2642,7 +2277,7 @@
                 <a:ea typeface="Nanum Gothic" pitchFamily="34" charset="-122"/>
                 <a:cs typeface="Nanum Gothic" pitchFamily="34" charset="-120"/>
               </a:rPr>
-              <a:t>LIVE PROTOTYPE</a:t>
+              <a:t>통합 물류 서비스</a:t>
             </a:r>
             <a:endParaRPr lang="en-US" sz="820" dirty="0"/>
           </a:p>
@@ -2699,6 +2334,10 @@
             <a:prstDash val="solid"/>
           </a:ln>
         </p:spPr>
+        <p:txBody>
+          <a:bodyPr/>
+          <a:p/>
+        </p:txBody>
       </p:sp>
       <p:sp>
         <p:nvSpPr>
@@ -2845,6 +2484,10 @@
             <a:prstDash val="solid"/>
           </a:ln>
         </p:spPr>
+        <p:txBody>
+          <a:bodyPr/>
+          <a:p/>
+        </p:txBody>
       </p:sp>
       <p:sp>
         <p:nvSpPr>
@@ -2872,6 +2515,10 @@
             <a:prstDash val="solid"/>
           </a:ln>
         </p:spPr>
+        <p:txBody>
+          <a:bodyPr/>
+          <a:p/>
+        </p:txBody>
       </p:sp>
       <p:sp>
         <p:nvSpPr>
@@ -2981,6 +2628,10 @@
             <a:prstDash val="solid"/>
           </a:ln>
         </p:spPr>
+        <p:txBody>
+          <a:bodyPr/>
+          <a:p/>
+        </p:txBody>
       </p:sp>
       <p:sp>
         <p:nvSpPr>
@@ -3131,6 +2782,10 @@
             <a:prstDash val="solid"/>
           </a:ln>
         </p:spPr>
+        <p:txBody>
+          <a:bodyPr/>
+          <a:p/>
+        </p:txBody>
       </p:sp>
       <p:sp>
         <p:nvSpPr>
@@ -3281,6 +2936,10 @@
             <a:prstDash val="solid"/>
           </a:ln>
         </p:spPr>
+        <p:txBody>
+          <a:bodyPr/>
+          <a:p/>
+        </p:txBody>
       </p:sp>
       <p:sp>
         <p:nvSpPr>
@@ -3431,6 +3090,10 @@
             <a:prstDash val="solid"/>
           </a:ln>
         </p:spPr>
+        <p:txBody>
+          <a:bodyPr/>
+          <a:p/>
+        </p:txBody>
       </p:sp>
       <p:sp>
         <p:nvSpPr>
@@ -3581,6 +3244,10 @@
             <a:prstDash val="solid"/>
           </a:ln>
         </p:spPr>
+        <p:txBody>
+          <a:bodyPr/>
+          <a:p/>
+        </p:txBody>
       </p:sp>
       <p:sp>
         <p:nvSpPr>
@@ -3731,6 +3398,10 @@
             <a:prstDash val="solid"/>
           </a:ln>
         </p:spPr>
+        <p:txBody>
+          <a:bodyPr/>
+          <a:p/>
+        </p:txBody>
       </p:sp>
       <p:sp>
         <p:nvSpPr>
@@ -3799,6 +3470,10 @@
             <a:prstDash val="solid"/>
           </a:ln>
         </p:spPr>
+        <p:txBody>
+          <a:bodyPr/>
+          <a:p/>
+        </p:txBody>
       </p:sp>
       <p:sp>
         <p:nvSpPr>
@@ -3867,6 +3542,10 @@
             <a:prstDash val="solid"/>
           </a:ln>
         </p:spPr>
+        <p:txBody>
+          <a:bodyPr/>
+          <a:p/>
+        </p:txBody>
       </p:sp>
       <p:sp>
         <p:nvSpPr>
@@ -3976,6 +3655,10 @@
             <a:prstDash val="solid"/>
           </a:ln>
         </p:spPr>
+        <p:txBody>
+          <a:bodyPr/>
+          <a:p/>
+        </p:txBody>
       </p:sp>
       <p:sp>
         <p:nvSpPr>
@@ -4085,6 +3768,10 @@
             <a:prstDash val="solid"/>
           </a:ln>
         </p:spPr>
+        <p:txBody>
+          <a:bodyPr/>
+          <a:p/>
+        </p:txBody>
       </p:sp>
       <p:sp>
         <p:nvSpPr>
@@ -4194,6 +3881,10 @@
             <a:prstDash val="solid"/>
           </a:ln>
         </p:spPr>
+        <p:txBody>
+          <a:bodyPr/>
+          <a:p/>
+        </p:txBody>
       </p:sp>
       <p:sp>
         <p:nvSpPr>
@@ -4303,6 +3994,10 @@
             <a:prstDash val="solid"/>
           </a:ln>
         </p:spPr>
+        <p:txBody>
+          <a:bodyPr/>
+          <a:p/>
+        </p:txBody>
       </p:sp>
       <p:sp>
         <p:nvSpPr>
@@ -4371,6 +4066,10 @@
             <a:prstDash val="solid"/>
           </a:ln>
         </p:spPr>
+        <p:txBody>
+          <a:bodyPr/>
+          <a:p/>
+        </p:txBody>
       </p:sp>
       <p:sp>
         <p:nvSpPr>
@@ -4521,6 +4220,10 @@
             <a:prstDash val="solid"/>
           </a:ln>
         </p:spPr>
+        <p:txBody>
+          <a:bodyPr/>
+          <a:p/>
+        </p:txBody>
       </p:sp>
       <p:sp>
         <p:nvSpPr>
@@ -4671,6 +4374,10 @@
             <a:prstDash val="solid"/>
           </a:ln>
         </p:spPr>
+        <p:txBody>
+          <a:bodyPr/>
+          <a:p/>
+        </p:txBody>
       </p:sp>
       <p:sp>
         <p:nvSpPr>
@@ -4821,6 +4528,10 @@
             <a:prstDash val="solid"/>
           </a:ln>
         </p:spPr>
+        <p:txBody>
+          <a:bodyPr/>
+          <a:p/>
+        </p:txBody>
       </p:sp>
       <p:sp>
         <p:nvSpPr>
@@ -4926,6 +4637,10 @@
             <a:prstDash val="solid"/>
           </a:ln>
         </p:spPr>
+        <p:txBody>
+          <a:bodyPr/>
+          <a:p/>
+        </p:txBody>
       </p:sp>
       <p:sp>
         <p:nvSpPr>
@@ -5060,6 +4775,10 @@
             <a:prstDash val="solid"/>
           </a:ln>
         </p:spPr>
+        <p:txBody>
+          <a:bodyPr/>
+          <a:p/>
+        </p:txBody>
       </p:sp>
       <p:sp>
         <p:nvSpPr>
@@ -5206,6 +4925,10 @@
             <a:prstDash val="solid"/>
           </a:ln>
         </p:spPr>
+        <p:txBody>
+          <a:bodyPr/>
+          <a:p/>
+        </p:txBody>
       </p:sp>
       <p:sp>
         <p:nvSpPr>
@@ -5270,6 +4993,10 @@
             <a:prstDash val="solid"/>
           </a:ln>
         </p:spPr>
+        <p:txBody>
+          <a:bodyPr/>
+          <a:p/>
+        </p:txBody>
       </p:sp>
       <p:sp>
         <p:nvSpPr>
@@ -5295,6 +5022,10 @@
             <a:prstDash val="solid"/>
           </a:ln>
         </p:spPr>
+        <p:txBody>
+          <a:bodyPr/>
+          <a:p/>
+        </p:txBody>
       </p:sp>
       <p:sp>
         <p:nvSpPr>
@@ -5443,6 +5174,10 @@
             <a:prstDash val="solid"/>
           </a:ln>
         </p:spPr>
+        <p:txBody>
+          <a:bodyPr/>
+          <a:p/>
+        </p:txBody>
       </p:sp>
       <p:sp>
         <p:nvSpPr>
@@ -5591,6 +5326,10 @@
             <a:prstDash val="solid"/>
           </a:ln>
         </p:spPr>
+        <p:txBody>
+          <a:bodyPr/>
+          <a:p/>
+        </p:txBody>
       </p:sp>
       <p:sp>
         <p:nvSpPr>
@@ -5739,6 +5478,10 @@
             <a:prstDash val="solid"/>
           </a:ln>
         </p:spPr>
+        <p:txBody>
+          <a:bodyPr/>
+          <a:p/>
+        </p:txBody>
       </p:sp>
       <p:sp>
         <p:nvSpPr>
@@ -5887,6 +5630,10 @@
             <a:prstDash val="solid"/>
           </a:ln>
         </p:spPr>
+        <p:txBody>
+          <a:bodyPr/>
+          <a:p/>
+        </p:txBody>
       </p:sp>
       <p:sp>
         <p:nvSpPr>
@@ -6035,6 +5782,10 @@
             <a:prstDash val="solid"/>
           </a:ln>
         </p:spPr>
+        <p:txBody>
+          <a:bodyPr/>
+          <a:p/>
+        </p:txBody>
       </p:sp>
       <p:sp>
         <p:nvSpPr>
@@ -6183,6 +5934,10 @@
             <a:prstDash val="solid"/>
           </a:ln>
         </p:spPr>
+        <p:txBody>
+          <a:bodyPr/>
+          <a:p/>
+        </p:txBody>
       </p:sp>
       <p:sp>
         <p:nvSpPr>
@@ -6333,6 +6088,10 @@
             <a:prstDash val="solid"/>
           </a:ln>
         </p:spPr>
+        <p:txBody>
+          <a:bodyPr/>
+          <a:p/>
+        </p:txBody>
       </p:sp>
       <p:sp>
         <p:nvSpPr>
@@ -6399,6 +6158,10 @@
             <a:prstDash val="solid"/>
           </a:ln>
         </p:spPr>
+        <p:txBody>
+          <a:bodyPr/>
+          <a:p/>
+        </p:txBody>
       </p:sp>
       <p:sp>
         <p:nvSpPr>
@@ -6506,6 +6269,10 @@
             <a:prstDash val="solid"/>
           </a:ln>
         </p:spPr>
+        <p:txBody>
+          <a:bodyPr/>
+          <a:p/>
+        </p:txBody>
       </p:sp>
       <p:sp>
         <p:nvSpPr>
@@ -6613,6 +6380,10 @@
             <a:prstDash val="solid"/>
           </a:ln>
         </p:spPr>
+        <p:txBody>
+          <a:bodyPr/>
+          <a:p/>
+        </p:txBody>
       </p:sp>
       <p:sp>
         <p:nvSpPr>
@@ -6720,6 +6491,10 @@
             <a:prstDash val="solid"/>
           </a:ln>
         </p:spPr>
+        <p:txBody>
+          <a:bodyPr/>
+          <a:p/>
+        </p:txBody>
       </p:sp>
       <p:sp>
         <p:nvSpPr>
@@ -6829,6 +6604,10 @@
             <a:prstDash val="solid"/>
           </a:ln>
         </p:spPr>
+        <p:txBody>
+          <a:bodyPr/>
+          <a:p/>
+        </p:txBody>
       </p:sp>
       <p:sp>
         <p:nvSpPr>
@@ -7120,6 +6899,10 @@
             <a:prstDash val="solid"/>
           </a:ln>
         </p:spPr>
+        <p:txBody>
+          <a:bodyPr/>
+          <a:p/>
+        </p:txBody>
       </p:sp>
       <p:sp>
         <p:nvSpPr>
@@ -7184,6 +6967,10 @@
             <a:prstDash val="solid"/>
           </a:ln>
         </p:spPr>
+        <p:txBody>
+          <a:bodyPr/>
+          <a:p/>
+        </p:txBody>
       </p:sp>
       <p:sp>
         <p:nvSpPr>
@@ -7318,6 +7105,10 @@
             <a:prstDash val="solid"/>
           </a:ln>
         </p:spPr>
+        <p:txBody>
+          <a:bodyPr/>
+          <a:p/>
+        </p:txBody>
       </p:sp>
       <p:sp>
         <p:nvSpPr>
@@ -7436,7 +7227,7 @@
                 <a:ea typeface="Nanum Gothic" pitchFamily="34" charset="-122"/>
                 <a:cs typeface="Nanum Gothic" pitchFamily="34" charset="-120"/>
               </a:rPr>
-              <a:t>화주가 원하는 것은 철도 정보가 아니라, 요청한 화물이 실제로 갈 수 있는지에 대한 답입니다.</a:t>
+              <a:t>화주는 문전 운송부터 도착 마감까지, 실제 실행 가능한 하나의 답을 원합니다.</a:t>
             </a:r>
             <a:endParaRPr lang="en-US" sz="950" dirty="0"/>
           </a:p>
@@ -7464,6 +7255,10 @@
             <a:prstDash val="solid"/>
           </a:ln>
         </p:spPr>
+        <p:txBody>
+          <a:bodyPr/>
+          <a:p/>
+        </p:txBody>
       </p:sp>
       <p:sp>
         <p:nvSpPr>
@@ -7491,6 +7286,10 @@
             <a:prstDash val="solid"/>
           </a:ln>
         </p:spPr>
+        <p:txBody>
+          <a:bodyPr/>
+          <a:p/>
+        </p:txBody>
       </p:sp>
       <p:sp>
         <p:nvSpPr>
@@ -7527,7 +7326,7 @@
                 <a:ea typeface="Nanum Gothic" pitchFamily="34" charset="-122"/>
                 <a:cs typeface="Nanum Gothic" pitchFamily="34" charset="-120"/>
               </a:rPr>
-              <a:t>“화물이 없는 것이 아니라, 실제 수송이 성립하는 조건을 찾기 어렵습니다.”</a:t>
+              <a:t>“이용 의향은 있어도 누구에게 무엇을 묻고, 어떤 조건을 바꿔야 하는지 알기 어렵습니다.”</a:t>
             </a:r>
             <a:endParaRPr lang="en-US" sz="1700" dirty="0"/>
           </a:p>
@@ -7566,6 +7365,10 @@
             </a:outerShdw>
           </a:effectLst>
         </p:spPr>
+        <p:txBody>
+          <a:bodyPr/>
+          <a:p/>
+        </p:txBody>
       </p:sp>
       <p:sp>
         <p:nvSpPr>
@@ -7593,6 +7396,10 @@
             <a:prstDash val="solid"/>
           </a:ln>
         </p:spPr>
+        <p:txBody>
+          <a:bodyPr/>
+          <a:p/>
+        </p:txBody>
       </p:sp>
       <p:sp>
         <p:nvSpPr>
@@ -7750,6 +7557,10 @@
             </a:outerShdw>
           </a:effectLst>
         </p:spPr>
+        <p:txBody>
+          <a:bodyPr/>
+          <a:p/>
+        </p:txBody>
       </p:sp>
       <p:sp>
         <p:nvSpPr>
@@ -7777,6 +7588,10 @@
             <a:prstDash val="solid"/>
           </a:ln>
         </p:spPr>
+        <p:txBody>
+          <a:bodyPr/>
+          <a:p/>
+        </p:txBody>
       </p:sp>
       <p:sp>
         <p:nvSpPr>
@@ -7934,6 +7749,10 @@
             </a:outerShdw>
           </a:effectLst>
         </p:spPr>
+        <p:txBody>
+          <a:bodyPr/>
+          <a:p/>
+        </p:txBody>
       </p:sp>
       <p:sp>
         <p:nvSpPr>
@@ -7961,6 +7780,10 @@
             <a:prstDash val="solid"/>
           </a:ln>
         </p:spPr>
+        <p:txBody>
+          <a:bodyPr/>
+          <a:p/>
+        </p:txBody>
       </p:sp>
       <p:sp>
         <p:nvSpPr>
@@ -8150,6 +7973,10 @@
             <a:prstDash val="solid"/>
           </a:ln>
         </p:spPr>
+        <p:txBody>
+          <a:bodyPr/>
+          <a:p/>
+        </p:txBody>
       </p:sp>
       <p:sp>
         <p:nvSpPr>
@@ -8298,6 +8125,10 @@
             <a:prstDash val="solid"/>
           </a:ln>
         </p:spPr>
+        <p:txBody>
+          <a:bodyPr/>
+          <a:p/>
+        </p:txBody>
       </p:sp>
       <p:sp>
         <p:nvSpPr>
@@ -8446,6 +8277,10 @@
             <a:prstDash val="solid"/>
           </a:ln>
         </p:spPr>
+        <p:txBody>
+          <a:bodyPr/>
+          <a:p/>
+        </p:txBody>
       </p:sp>
       <p:sp>
         <p:nvSpPr>
@@ -8594,6 +8429,10 @@
             <a:prstDash val="solid"/>
           </a:ln>
         </p:spPr>
+        <p:txBody>
+          <a:bodyPr/>
+          <a:p/>
+        </p:txBody>
       </p:sp>
       <p:sp>
         <p:nvSpPr>
@@ -8742,6 +8581,10 @@
             <a:prstDash val="solid"/>
           </a:ln>
         </p:spPr>
+        <p:txBody>
+          <a:bodyPr/>
+          <a:p/>
+        </p:txBody>
       </p:sp>
       <p:sp>
         <p:nvSpPr>
@@ -8848,6 +8691,10 @@
             <a:tailEnd type="triangle"/>
           </a:ln>
         </p:spPr>
+        <p:txBody>
+          <a:bodyPr/>
+          <a:p/>
+        </p:txBody>
       </p:sp>
       <p:sp>
         <p:nvSpPr>
@@ -8875,6 +8722,10 @@
             <a:prstDash val="solid"/>
           </a:ln>
         </p:spPr>
+        <p:txBody>
+          <a:bodyPr/>
+          <a:p/>
+        </p:txBody>
       </p:sp>
       <p:sp>
         <p:nvSpPr>
@@ -9025,6 +8876,10 @@
             <a:prstDash val="solid"/>
           </a:ln>
         </p:spPr>
+        <p:txBody>
+          <a:bodyPr/>
+          <a:p/>
+        </p:txBody>
       </p:sp>
       <p:sp>
         <p:nvSpPr>
@@ -9130,6 +8985,10 @@
             <a:prstDash val="solid"/>
           </a:ln>
         </p:spPr>
+        <p:txBody>
+          <a:bodyPr/>
+          <a:p/>
+        </p:txBody>
       </p:sp>
       <p:sp>
         <p:nvSpPr>
@@ -9264,6 +9123,10 @@
             <a:prstDash val="solid"/>
           </a:ln>
         </p:spPr>
+        <p:txBody>
+          <a:bodyPr/>
+          <a:p/>
+        </p:txBody>
       </p:sp>
       <p:sp>
         <p:nvSpPr>
@@ -9341,7 +9204,7 @@
                 <a:ea typeface="Nanum Gothic" pitchFamily="34" charset="-122"/>
                 <a:cs typeface="Nanum Gothic" pitchFamily="34" charset="-120"/>
               </a:rPr>
-              <a:t>아이템 개요</a:t>
+              <a:t>해결책 · 코레일 플러스 물류</a:t>
             </a:r>
             <a:endParaRPr lang="en-US" sz="2400" dirty="0"/>
           </a:p>
@@ -9382,7 +9245,7 @@
                 <a:ea typeface="Nanum Gothic" pitchFamily="34" charset="-122"/>
                 <a:cs typeface="Nanum Gothic" pitchFamily="34" charset="-120"/>
               </a:rPr>
-              <a:t>철도를 안내하는 앱이 아니라, 화주 조건을 실행 가능한 검토안으로 바꾸는 의사결정 서비스입니다.</a:t>
+              <a:t>탐색·비교·공동수송·검토 요청을 하나로 잇는 화주 중심 통합 서비스입니다.</a:t>
             </a:r>
             <a:endParaRPr lang="en-US" sz="950" dirty="0"/>
           </a:p>
@@ -9410,6 +9273,10 @@
             <a:prstDash val="solid"/>
           </a:ln>
         </p:spPr>
+        <p:txBody>
+          <a:bodyPr/>
+          <a:p/>
+        </p:txBody>
       </p:sp>
       <p:sp>
         <p:nvSpPr>
@@ -9437,6 +9304,10 @@
             <a:prstDash val="solid"/>
           </a:ln>
         </p:spPr>
+        <p:txBody>
+          <a:bodyPr/>
+          <a:p/>
+        </p:txBody>
       </p:sp>
       <p:sp>
         <p:nvSpPr>
@@ -9473,7 +9344,8 @@
                 <a:ea typeface="Nanum Gothic" pitchFamily="34" charset="-122"/>
                 <a:cs typeface="Nanum Gothic" pitchFamily="34" charset="-120"/>
               </a:rPr>
-              <a:t>철도로 갈 수 있는 조건을 먼저 만들고,</a:t>
+              <a:t>화주가 찾아오는 물류가 아니라,
+코레일이 가능한 조건을 만들어 먼저 제안하는 통합 서비스</a:t>
             </a:r>
             <a:endParaRPr lang="en-US" sz="1520" dirty="0"/>
           </a:p>
@@ -9481,17 +9353,6 @@
             <a:pPr indent="0" marL="0">
               <a:buNone/>
             </a:pPr>
-            <a:r>
-              <a:rPr lang="en-US" sz="1520" b="1" dirty="0">
-                <a:solidFill>
-                  <a:srgbClr val="FFFFFF"/>
-                </a:solidFill>
-                <a:latin typeface="Nanum Gothic" pitchFamily="34" charset="0"/>
-                <a:ea typeface="Nanum Gothic" pitchFamily="34" charset="-122"/>
-                <a:cs typeface="Nanum Gothic" pitchFamily="34" charset="-120"/>
-              </a:rPr>
-              <a:t>사용자와 코레일이 함께 확정하는 화물 운송 설계 서비스</a:t>
-            </a:r>
             <a:endParaRPr lang="en-US" sz="1520" dirty="0"/>
           </a:p>
         </p:txBody>
@@ -9522,6 +9383,10 @@
             <a:prstDash val="solid"/>
           </a:ln>
         </p:spPr>
+        <p:txBody>
+          <a:bodyPr/>
+          <a:p/>
+        </p:txBody>
       </p:sp>
       <p:sp>
         <p:nvSpPr>
@@ -9648,6 +9513,10 @@
             <a:prstDash val="solid"/>
           </a:ln>
         </p:spPr>
+        <p:txBody>
+          <a:bodyPr/>
+          <a:p/>
+        </p:txBody>
       </p:sp>
       <p:sp>
         <p:nvSpPr>
@@ -9774,6 +9643,10 @@
             <a:prstDash val="solid"/>
           </a:ln>
         </p:spPr>
+        <p:txBody>
+          <a:bodyPr/>
+          <a:p/>
+        </p:txBody>
       </p:sp>
       <p:sp>
         <p:nvSpPr>
@@ -9941,6 +9814,10 @@
             <a:prstDash val="solid"/>
           </a:ln>
         </p:spPr>
+        <p:txBody>
+          <a:bodyPr/>
+          <a:p/>
+        </p:txBody>
       </p:sp>
       <p:sp>
         <p:nvSpPr>
@@ -10047,6 +9924,10 @@
             <a:tailEnd type="triangle"/>
           </a:ln>
         </p:spPr>
+        <p:txBody>
+          <a:bodyPr/>
+          <a:p/>
+        </p:txBody>
       </p:sp>
       <p:sp>
         <p:nvSpPr>
@@ -10074,6 +9955,10 @@
             <a:prstDash val="solid"/>
           </a:ln>
         </p:spPr>
+        <p:txBody>
+          <a:bodyPr/>
+          <a:p/>
+        </p:txBody>
       </p:sp>
       <p:sp>
         <p:nvSpPr>
@@ -10180,6 +10065,10 @@
             <a:tailEnd type="triangle"/>
           </a:ln>
         </p:spPr>
+        <p:txBody>
+          <a:bodyPr/>
+          <a:p/>
+        </p:txBody>
       </p:sp>
       <p:sp>
         <p:nvSpPr>
@@ -10207,6 +10096,10 @@
             <a:prstDash val="solid"/>
           </a:ln>
         </p:spPr>
+        <p:txBody>
+          <a:bodyPr/>
+          <a:p/>
+        </p:txBody>
       </p:sp>
       <p:sp>
         <p:nvSpPr>
@@ -10316,6 +10209,10 @@
             <a:prstDash val="solid"/>
           </a:ln>
         </p:spPr>
+        <p:txBody>
+          <a:bodyPr/>
+          <a:p/>
+        </p:txBody>
       </p:sp>
       <p:sp>
         <p:nvSpPr>
@@ -10422,6 +10319,10 @@
             <a:tailEnd type="triangle"/>
           </a:ln>
         </p:spPr>
+        <p:txBody>
+          <a:bodyPr/>
+          <a:p/>
+        </p:txBody>
       </p:sp>
       <p:sp>
         <p:nvSpPr>
@@ -10449,6 +10350,10 @@
             <a:prstDash val="solid"/>
           </a:ln>
         </p:spPr>
+        <p:txBody>
+          <a:bodyPr/>
+          <a:p/>
+        </p:txBody>
       </p:sp>
       <p:sp>
         <p:nvSpPr>
@@ -10555,6 +10460,10 @@
             <a:tailEnd type="triangle"/>
           </a:ln>
         </p:spPr>
+        <p:txBody>
+          <a:bodyPr/>
+          <a:p/>
+        </p:txBody>
       </p:sp>
       <p:sp>
         <p:nvSpPr>
@@ -10582,6 +10491,10 @@
             <a:prstDash val="solid"/>
           </a:ln>
         </p:spPr>
+        <p:txBody>
+          <a:bodyPr/>
+          <a:p/>
+        </p:txBody>
       </p:sp>
       <p:sp>
         <p:nvSpPr>
@@ -10691,6 +10604,10 @@
             <a:prstDash val="solid"/>
           </a:ln>
         </p:spPr>
+        <p:txBody>
+          <a:bodyPr/>
+          <a:p/>
+        </p:txBody>
       </p:sp>
       <p:sp>
         <p:nvSpPr>
@@ -10766,6 +10683,10 @@
             </a:outerShdw>
           </a:effectLst>
         </p:spPr>
+        <p:txBody>
+          <a:bodyPr/>
+          <a:p/>
+        </p:txBody>
       </p:sp>
       <p:pic>
         <p:nvPicPr>
@@ -10817,6 +10738,10 @@
             <a:prstDash val="solid"/>
           </a:ln>
         </p:spPr>
+        <p:txBody>
+          <a:bodyPr/>
+          <a:p/>
+        </p:txBody>
       </p:sp>
       <p:sp>
         <p:nvSpPr>
@@ -10881,6 +10806,10 @@
             <a:prstDash val="solid"/>
           </a:ln>
         </p:spPr>
+        <p:txBody>
+          <a:bodyPr/>
+          <a:p/>
+        </p:txBody>
       </p:sp>
       <p:sp>
         <p:nvSpPr>
@@ -11015,6 +10944,10 @@
             <a:prstDash val="solid"/>
           </a:ln>
         </p:spPr>
+        <p:txBody>
+          <a:bodyPr/>
+          <a:p/>
+        </p:txBody>
       </p:sp>
       <p:sp>
         <p:nvSpPr>
@@ -11161,6 +11094,10 @@
             <a:prstDash val="solid"/>
           </a:ln>
         </p:spPr>
+        <p:txBody>
+          <a:bodyPr/>
+          <a:p/>
+        </p:txBody>
       </p:sp>
       <p:sp>
         <p:nvSpPr>
@@ -11188,6 +11125,10 @@
             <a:prstDash val="solid"/>
           </a:ln>
         </p:spPr>
+        <p:txBody>
+          <a:bodyPr/>
+          <a:p/>
+        </p:txBody>
       </p:sp>
       <p:sp>
         <p:nvSpPr>
@@ -11311,6 +11252,10 @@
             <a:tailEnd type="triangle"/>
           </a:ln>
         </p:spPr>
+        <p:txBody>
+          <a:bodyPr/>
+          <a:p/>
+        </p:txBody>
       </p:sp>
       <p:sp>
         <p:nvSpPr>
@@ -11345,6 +11290,10 @@
             </a:outerShdw>
           </a:effectLst>
         </p:spPr>
+        <p:txBody>
+          <a:bodyPr/>
+          <a:p/>
+        </p:txBody>
       </p:sp>
       <p:sp>
         <p:nvSpPr>
@@ -11468,6 +11417,10 @@
             <a:tailEnd type="triangle"/>
           </a:ln>
         </p:spPr>
+        <p:txBody>
+          <a:bodyPr/>
+          <a:p/>
+        </p:txBody>
       </p:sp>
       <p:sp>
         <p:nvSpPr>
@@ -11495,6 +11448,10 @@
             <a:prstDash val="solid"/>
           </a:ln>
         </p:spPr>
+        <p:txBody>
+          <a:bodyPr/>
+          <a:p/>
+        </p:txBody>
       </p:sp>
       <p:sp>
         <p:nvSpPr>
@@ -11618,6 +11575,10 @@
             <a:tailEnd type="triangle"/>
           </a:ln>
         </p:spPr>
+        <p:txBody>
+          <a:bodyPr/>
+          <a:p/>
+        </p:txBody>
       </p:sp>
       <p:sp>
         <p:nvSpPr>
@@ -11645,6 +11606,10 @@
             <a:prstDash val="solid"/>
           </a:ln>
         </p:spPr>
+        <p:txBody>
+          <a:bodyPr/>
+          <a:p/>
+        </p:txBody>
       </p:sp>
       <p:sp>
         <p:nvSpPr>
@@ -11768,6 +11733,10 @@
             <a:tailEnd type="triangle"/>
           </a:ln>
         </p:spPr>
+        <p:txBody>
+          <a:bodyPr/>
+          <a:p/>
+        </p:txBody>
       </p:sp>
       <p:sp>
         <p:nvSpPr>
@@ -11795,6 +11764,10 @@
             <a:prstDash val="solid"/>
           </a:ln>
         </p:spPr>
+        <p:txBody>
+          <a:bodyPr/>
+          <a:p/>
+        </p:txBody>
       </p:sp>
       <p:sp>
         <p:nvSpPr>
@@ -11921,6 +11894,10 @@
             <a:prstDash val="solid"/>
           </a:ln>
         </p:spPr>
+        <p:txBody>
+          <a:bodyPr/>
+          <a:p/>
+        </p:txBody>
       </p:sp>
       <p:sp>
         <p:nvSpPr>
@@ -12047,6 +12024,10 @@
             <a:prstDash val="solid"/>
           </a:ln>
         </p:spPr>
+        <p:txBody>
+          <a:bodyPr/>
+          <a:p/>
+        </p:txBody>
       </p:sp>
       <p:sp>
         <p:nvSpPr>
@@ -12173,6 +12154,10 @@
             <a:prstDash val="solid"/>
           </a:ln>
         </p:spPr>
+        <p:txBody>
+          <a:bodyPr/>
+          <a:p/>
+        </p:txBody>
       </p:sp>
       <p:sp>
         <p:nvSpPr>
@@ -12241,6 +12226,10 @@
             <a:prstDash val="solid"/>
           </a:ln>
         </p:spPr>
+        <p:txBody>
+          <a:bodyPr/>
+          <a:p/>
+        </p:txBody>
       </p:sp>
       <p:sp>
         <p:nvSpPr>
@@ -12347,6 +12336,10 @@
             <a:tailEnd type="triangle"/>
           </a:ln>
         </p:spPr>
+        <p:txBody>
+          <a:bodyPr/>
+          <a:p/>
+        </p:txBody>
       </p:sp>
       <p:sp>
         <p:nvSpPr>
@@ -12371,6 +12364,10 @@
             <a:tailEnd type="triangle"/>
           </a:ln>
         </p:spPr>
+        <p:txBody>
+          <a:bodyPr/>
+          <a:p/>
+        </p:txBody>
       </p:sp>
       <p:sp>
         <p:nvSpPr>
@@ -12395,6 +12392,10 @@
             <a:tailEnd type="triangle"/>
           </a:ln>
         </p:spPr>
+        <p:txBody>
+          <a:bodyPr/>
+          <a:p/>
+        </p:txBody>
       </p:sp>
       <p:sp>
         <p:nvSpPr>
@@ -12422,6 +12423,10 @@
             <a:prstDash val="solid"/>
           </a:ln>
         </p:spPr>
+        <p:txBody>
+          <a:bodyPr/>
+          <a:p/>
+        </p:txBody>
       </p:sp>
       <p:sp>
         <p:nvSpPr>
@@ -12572,6 +12577,10 @@
             <a:prstDash val="solid"/>
           </a:ln>
         </p:spPr>
+        <p:txBody>
+          <a:bodyPr/>
+          <a:p/>
+        </p:txBody>
       </p:sp>
       <p:sp>
         <p:nvSpPr>
@@ -12681,6 +12690,10 @@
             <a:prstDash val="solid"/>
           </a:ln>
         </p:spPr>
+        <p:txBody>
+          <a:bodyPr/>
+          <a:p/>
+        </p:txBody>
       </p:sp>
       <p:sp>
         <p:nvSpPr>
@@ -12790,6 +12803,10 @@
             <a:prstDash val="solid"/>
           </a:ln>
         </p:spPr>
+        <p:txBody>
+          <a:bodyPr/>
+          <a:p/>
+        </p:txBody>
       </p:sp>
       <p:sp>
         <p:nvSpPr>
@@ -12899,6 +12916,10 @@
             <a:prstDash val="solid"/>
           </a:ln>
         </p:spPr>
+        <p:txBody>
+          <a:bodyPr/>
+          <a:p/>
+        </p:txBody>
       </p:sp>
       <p:sp>
         <p:nvSpPr>
@@ -13008,6 +13029,10 @@
             <a:prstDash val="solid"/>
           </a:ln>
         </p:spPr>
+        <p:txBody>
+          <a:bodyPr/>
+          <a:p/>
+        </p:txBody>
       </p:sp>
       <p:sp>
         <p:nvSpPr>
@@ -13154,6 +13179,10 @@
             <a:prstDash val="solid"/>
           </a:ln>
         </p:spPr>
+        <p:txBody>
+          <a:bodyPr/>
+          <a:p/>
+        </p:txBody>
       </p:sp>
       <p:sp>
         <p:nvSpPr>
@@ -13288,6 +13317,10 @@
             <a:prstDash val="solid"/>
           </a:ln>
         </p:spPr>
+        <p:txBody>
+          <a:bodyPr/>
+          <a:p/>
+        </p:txBody>
       </p:sp>
       <p:sp>
         <p:nvSpPr>
@@ -13434,6 +13467,10 @@
             <a:prstDash val="solid"/>
           </a:ln>
         </p:spPr>
+        <p:txBody>
+          <a:bodyPr/>
+          <a:p/>
+        </p:txBody>
       </p:sp>
       <p:sp>
         <p:nvSpPr>
@@ -13468,6 +13505,10 @@
             </a:outerShdw>
           </a:effectLst>
         </p:spPr>
+        <p:txBody>
+          <a:bodyPr/>
+          <a:p/>
+        </p:txBody>
       </p:sp>
       <p:pic>
         <p:nvPicPr>
@@ -13519,6 +13560,10 @@
             <a:prstDash val="solid"/>
           </a:ln>
         </p:spPr>
+        <p:txBody>
+          <a:bodyPr/>
+          <a:p/>
+        </p:txBody>
       </p:sp>
       <p:sp>
         <p:nvSpPr>
@@ -13666,6 +13711,10 @@
             <a:tailEnd type="triangle"/>
           </a:ln>
         </p:spPr>
+        <p:txBody>
+          <a:bodyPr/>
+          <a:p/>
+        </p:txBody>
       </p:sp>
       <p:sp>
         <p:nvSpPr>
@@ -13700,6 +13749,10 @@
             </a:outerShdw>
           </a:effectLst>
         </p:spPr>
+        <p:txBody>
+          <a:bodyPr/>
+          <a:p/>
+        </p:txBody>
       </p:sp>
       <p:pic>
         <p:nvPicPr>
@@ -13751,6 +13804,10 @@
             <a:prstDash val="solid"/>
           </a:ln>
         </p:spPr>
+        <p:txBody>
+          <a:bodyPr/>
+          <a:p/>
+        </p:txBody>
       </p:sp>
       <p:sp>
         <p:nvSpPr>
@@ -13898,6 +13955,10 @@
             <a:tailEnd type="triangle"/>
           </a:ln>
         </p:spPr>
+        <p:txBody>
+          <a:bodyPr/>
+          <a:p/>
+        </p:txBody>
       </p:sp>
       <p:sp>
         <p:nvSpPr>
@@ -13932,6 +13993,10 @@
             </a:outerShdw>
           </a:effectLst>
         </p:spPr>
+        <p:txBody>
+          <a:bodyPr/>
+          <a:p/>
+        </p:txBody>
       </p:sp>
       <p:pic>
         <p:nvPicPr>
@@ -13983,6 +14048,10 @@
             <a:prstDash val="solid"/>
           </a:ln>
         </p:spPr>
+        <p:txBody>
+          <a:bodyPr/>
+          <a:p/>
+        </p:txBody>
       </p:sp>
       <p:sp>
         <p:nvSpPr>
@@ -14130,6 +14199,10 @@
             <a:tailEnd type="triangle"/>
           </a:ln>
         </p:spPr>
+        <p:txBody>
+          <a:bodyPr/>
+          <a:p/>
+        </p:txBody>
       </p:sp>
       <p:sp>
         <p:nvSpPr>
@@ -14164,6 +14237,10 @@
             </a:outerShdw>
           </a:effectLst>
         </p:spPr>
+        <p:txBody>
+          <a:bodyPr/>
+          <a:p/>
+        </p:txBody>
       </p:sp>
       <p:pic>
         <p:nvPicPr>
@@ -14215,6 +14292,10 @@
             <a:prstDash val="solid"/>
           </a:ln>
         </p:spPr>
+        <p:txBody>
+          <a:bodyPr/>
+          <a:p/>
+        </p:txBody>
       </p:sp>
       <p:sp>
         <p:nvSpPr>
@@ -14365,6 +14446,10 @@
             <a:prstDash val="solid"/>
           </a:ln>
         </p:spPr>
+        <p:txBody>
+          <a:bodyPr/>
+          <a:p/>
+        </p:txBody>
       </p:sp>
       <p:sp>
         <p:nvSpPr>
@@ -14429,6 +14514,10 @@
             <a:prstDash val="solid"/>
           </a:ln>
         </p:spPr>
+        <p:txBody>
+          <a:bodyPr/>
+          <a:p/>
+        </p:txBody>
       </p:sp>
       <p:sp>
         <p:nvSpPr>
@@ -14563,6 +14652,10 @@
             <a:prstDash val="solid"/>
           </a:ln>
         </p:spPr>
+        <p:txBody>
+          <a:bodyPr/>
+          <a:p/>
+        </p:txBody>
       </p:sp>
       <p:sp>
         <p:nvSpPr>
@@ -14709,6 +14802,10 @@
             <a:prstDash val="solid"/>
           </a:ln>
         </p:spPr>
+        <p:txBody>
+          <a:bodyPr/>
+          <a:p/>
+        </p:txBody>
       </p:sp>
       <p:sp>
         <p:nvSpPr>
@@ -14743,6 +14840,10 @@
             </a:outerShdw>
           </a:effectLst>
         </p:spPr>
+        <p:txBody>
+          <a:bodyPr/>
+          <a:p/>
+        </p:txBody>
       </p:sp>
       <p:pic>
         <p:nvPicPr>
@@ -14794,6 +14895,10 @@
             <a:prstDash val="solid"/>
           </a:ln>
         </p:spPr>
+        <p:txBody>
+          <a:bodyPr/>
+          <a:p/>
+        </p:txBody>
       </p:sp>
       <p:sp>
         <p:nvSpPr>
@@ -14941,6 +15046,10 @@
             <a:tailEnd type="triangle"/>
           </a:ln>
         </p:spPr>
+        <p:txBody>
+          <a:bodyPr/>
+          <a:p/>
+        </p:txBody>
       </p:sp>
       <p:sp>
         <p:nvSpPr>
@@ -14975,6 +15084,10 @@
             </a:outerShdw>
           </a:effectLst>
         </p:spPr>
+        <p:txBody>
+          <a:bodyPr/>
+          <a:p/>
+        </p:txBody>
       </p:sp>
       <p:pic>
         <p:nvPicPr>
@@ -15026,6 +15139,10 @@
             <a:prstDash val="solid"/>
           </a:ln>
         </p:spPr>
+        <p:txBody>
+          <a:bodyPr/>
+          <a:p/>
+        </p:txBody>
       </p:sp>
       <p:sp>
         <p:nvSpPr>
@@ -15173,6 +15290,10 @@
             <a:tailEnd type="triangle"/>
           </a:ln>
         </p:spPr>
+        <p:txBody>
+          <a:bodyPr/>
+          <a:p/>
+        </p:txBody>
       </p:sp>
       <p:sp>
         <p:nvSpPr>
@@ -15207,6 +15328,10 @@
             </a:outerShdw>
           </a:effectLst>
         </p:spPr>
+        <p:txBody>
+          <a:bodyPr/>
+          <a:p/>
+        </p:txBody>
       </p:sp>
       <p:pic>
         <p:nvPicPr>
@@ -15258,6 +15383,10 @@
             <a:prstDash val="solid"/>
           </a:ln>
         </p:spPr>
+        <p:txBody>
+          <a:bodyPr/>
+          <a:p/>
+        </p:txBody>
       </p:sp>
       <p:sp>
         <p:nvSpPr>
@@ -15408,6 +15537,10 @@
             <a:prstDash val="solid"/>
           </a:ln>
         </p:spPr>
+        <p:txBody>
+          <a:bodyPr/>
+          <a:p/>
+        </p:txBody>
       </p:sp>
       <p:sp>
         <p:nvSpPr>
@@ -15513,6 +15646,10 @@
             <a:prstDash val="solid"/>
           </a:ln>
         </p:spPr>
+        <p:txBody>
+          <a:bodyPr/>
+          <a:p/>
+        </p:txBody>
       </p:sp>
       <p:sp>
         <p:nvSpPr>
@@ -15647,6 +15784,10 @@
             <a:prstDash val="solid"/>
           </a:ln>
         </p:spPr>
+        <p:txBody>
+          <a:bodyPr/>
+          <a:p/>
+        </p:txBody>
       </p:sp>
       <p:sp>
         <p:nvSpPr>
@@ -15793,6 +15934,10 @@
             <a:prstDash val="solid"/>
           </a:ln>
         </p:spPr>
+        <p:txBody>
+          <a:bodyPr/>
+          <a:p/>
+        </p:txBody>
       </p:sp>
       <p:sp>
         <p:nvSpPr>
@@ -15820,6 +15965,10 @@
             <a:prstDash val="solid"/>
           </a:ln>
         </p:spPr>
+        <p:txBody>
+          <a:bodyPr/>
+          <a:p/>
+        </p:txBody>
       </p:sp>
       <p:sp>
         <p:nvSpPr>
@@ -15970,6 +16119,10 @@
             <a:prstDash val="solid"/>
           </a:ln>
         </p:spPr>
+        <p:txBody>
+          <a:bodyPr/>
+          <a:p/>
+        </p:txBody>
       </p:sp>
       <p:sp>
         <p:nvSpPr>
@@ -16137,6 +16290,10 @@
             <a:prstDash val="solid"/>
           </a:ln>
         </p:spPr>
+        <p:txBody>
+          <a:bodyPr/>
+          <a:p/>
+        </p:txBody>
       </p:sp>
       <p:sp>
         <p:nvSpPr>
@@ -16304,6 +16461,10 @@
             <a:prstDash val="solid"/>
           </a:ln>
         </p:spPr>
+        <p:txBody>
+          <a:bodyPr/>
+          <a:p/>
+        </p:txBody>
       </p:sp>
       <p:sp>
         <p:nvSpPr>
@@ -16471,6 +16632,10 @@
             <a:prstDash val="solid"/>
           </a:ln>
         </p:spPr>
+        <p:txBody>
+          <a:bodyPr/>
+          <a:p/>
+        </p:txBody>
       </p:sp>
       <p:sp>
         <p:nvSpPr>
@@ -16638,6 +16803,10 @@
             <a:prstDash val="solid"/>
           </a:ln>
         </p:spPr>
+        <p:txBody>
+          <a:bodyPr/>
+          <a:p/>
+        </p:txBody>
       </p:sp>
       <p:sp>
         <p:nvSpPr>
@@ -16805,6 +16974,10 @@
             <a:prstDash val="solid"/>
           </a:ln>
         </p:spPr>
+        <p:txBody>
+          <a:bodyPr/>
+          <a:p/>
+        </p:txBody>
       </p:sp>
       <p:sp>
         <p:nvSpPr>
@@ -16869,6 +17042,10 @@
             <a:prstDash val="solid"/>
           </a:ln>
         </p:spPr>
+        <p:txBody>
+          <a:bodyPr/>
+          <a:p/>
+        </p:txBody>
       </p:sp>
       <p:sp>
         <p:nvSpPr>
@@ -17003,6 +17180,10 @@
             <a:prstDash val="solid"/>
           </a:ln>
         </p:spPr>
+        <p:txBody>
+          <a:bodyPr/>
+          <a:p/>
+        </p:txBody>
       </p:sp>
       <p:sp>
         <p:nvSpPr>
@@ -17149,6 +17330,10 @@
             <a:prstDash val="solid"/>
           </a:ln>
         </p:spPr>
+        <p:txBody>
+          <a:bodyPr/>
+          <a:p/>
+        </p:txBody>
       </p:sp>
       <p:sp>
         <p:nvSpPr>
@@ -17176,6 +17361,10 @@
             <a:prstDash val="solid"/>
           </a:ln>
         </p:spPr>
+        <p:txBody>
+          <a:bodyPr/>
+          <a:p/>
+        </p:txBody>
       </p:sp>
       <p:sp>
         <p:nvSpPr>
@@ -17326,6 +17515,10 @@
             <a:prstDash val="solid"/>
           </a:ln>
         </p:spPr>
+        <p:txBody>
+          <a:bodyPr/>
+          <a:p/>
+        </p:txBody>
       </p:sp>
       <p:sp>
         <p:nvSpPr>
@@ -17568,6 +17761,10 @@
             <a:prstDash val="solid"/>
           </a:ln>
         </p:spPr>
+        <p:txBody>
+          <a:bodyPr/>
+          <a:p/>
+        </p:txBody>
       </p:sp>
       <p:sp>
         <p:nvSpPr>
@@ -17593,6 +17790,10 @@
             <a:prstDash val="solid"/>
           </a:ln>
         </p:spPr>
+        <p:txBody>
+          <a:bodyPr/>
+          <a:p/>
+        </p:txBody>
       </p:sp>
       <p:sp>
         <p:nvSpPr>
@@ -17740,6 +17941,10 @@
             <a:tailEnd type="triangle"/>
           </a:ln>
         </p:spPr>
+        <p:txBody>
+          <a:bodyPr/>
+          <a:p/>
+        </p:txBody>
       </p:sp>
       <p:sp>
         <p:nvSpPr>
@@ -17767,6 +17972,10 @@
             <a:prstDash val="solid"/>
           </a:ln>
         </p:spPr>
+        <p:txBody>
+          <a:bodyPr/>
+          <a:p/>
+        </p:txBody>
       </p:sp>
       <p:sp>
         <p:nvSpPr>
@@ -17792,6 +18001,10 @@
             <a:prstDash val="solid"/>
           </a:ln>
         </p:spPr>
+        <p:txBody>
+          <a:bodyPr/>
+          <a:p/>
+        </p:txBody>
       </p:sp>
       <p:sp>
         <p:nvSpPr>
@@ -17939,6 +18152,10 @@
             <a:tailEnd type="triangle"/>
           </a:ln>
         </p:spPr>
+        <p:txBody>
+          <a:bodyPr/>
+          <a:p/>
+        </p:txBody>
       </p:sp>
       <p:sp>
         <p:nvSpPr>
@@ -17966,6 +18183,10 @@
             <a:prstDash val="solid"/>
           </a:ln>
         </p:spPr>
+        <p:txBody>
+          <a:bodyPr/>
+          <a:p/>
+        </p:txBody>
       </p:sp>
       <p:sp>
         <p:nvSpPr>
@@ -17991,6 +18212,10 @@
             <a:prstDash val="solid"/>
           </a:ln>
         </p:spPr>
+        <p:txBody>
+          <a:bodyPr/>
+          <a:p/>
+        </p:txBody>
       </p:sp>
       <p:sp>
         <p:nvSpPr>
@@ -18138,6 +18363,10 @@
             <a:tailEnd type="triangle"/>
           </a:ln>
         </p:spPr>
+        <p:txBody>
+          <a:bodyPr/>
+          <a:p/>
+        </p:txBody>
       </p:sp>
       <p:sp>
         <p:nvSpPr>
@@ -18165,6 +18394,10 @@
             <a:prstDash val="solid"/>
           </a:ln>
         </p:spPr>
+        <p:txBody>
+          <a:bodyPr/>
+          <a:p/>
+        </p:txBody>
       </p:sp>
       <p:sp>
         <p:nvSpPr>
@@ -18190,6 +18423,10 @@
             <a:prstDash val="solid"/>
           </a:ln>
         </p:spPr>
+        <p:txBody>
+          <a:bodyPr/>
+          <a:p/>
+        </p:txBody>
       </p:sp>
       <p:sp>
         <p:nvSpPr>
@@ -18337,6 +18574,10 @@
             <a:tailEnd type="triangle"/>
           </a:ln>
         </p:spPr>
+        <p:txBody>
+          <a:bodyPr/>
+          <a:p/>
+        </p:txBody>
       </p:sp>
       <p:sp>
         <p:nvSpPr>
@@ -18364,6 +18605,10 @@
             <a:prstDash val="solid"/>
           </a:ln>
         </p:spPr>
+        <p:txBody>
+          <a:bodyPr/>
+          <a:p/>
+        </p:txBody>
       </p:sp>
       <p:sp>
         <p:nvSpPr>
@@ -18389,6 +18634,10 @@
             <a:prstDash val="solid"/>
           </a:ln>
         </p:spPr>
+        <p:txBody>
+          <a:bodyPr/>
+          <a:p/>
+        </p:txBody>
       </p:sp>
       <p:sp>
         <p:nvSpPr>
@@ -18580,6 +18829,10 @@
             <a:prstDash val="solid"/>
           </a:ln>
         </p:spPr>
+        <p:txBody>
+          <a:bodyPr/>
+          <a:p/>
+        </p:txBody>
       </p:sp>
       <p:sp>
         <p:nvSpPr>
@@ -18648,6 +18901,10 @@
             <a:prstDash val="solid"/>
           </a:ln>
         </p:spPr>
+        <p:txBody>
+          <a:bodyPr/>
+          <a:p/>
+        </p:txBody>
       </p:sp>
       <p:sp>
         <p:nvSpPr>
@@ -18716,6 +18973,10 @@
             <a:prstDash val="solid"/>
           </a:ln>
         </p:spPr>
+        <p:txBody>
+          <a:bodyPr/>
+          <a:p/>
+        </p:txBody>
       </p:sp>
       <p:sp>
         <p:nvSpPr>
@@ -18784,6 +19045,10 @@
             <a:prstDash val="solid"/>
           </a:ln>
         </p:spPr>
+        <p:txBody>
+          <a:bodyPr/>
+          <a:p/>
+        </p:txBody>
       </p:sp>
       <p:sp>
         <p:nvSpPr>
@@ -18852,6 +19117,10 @@
             <a:prstDash val="solid"/>
           </a:ln>
         </p:spPr>
+        <p:txBody>
+          <a:bodyPr/>
+          <a:p/>
+        </p:txBody>
       </p:sp>
       <p:sp>
         <p:nvSpPr>
@@ -18957,6 +19226,10 @@
             <a:prstDash val="solid"/>
           </a:ln>
         </p:spPr>
+        <p:txBody>
+          <a:bodyPr/>
+          <a:p/>
+        </p:txBody>
       </p:sp>
       <p:sp>
         <p:nvSpPr>
@@ -19091,6 +19364,10 @@
             <a:prstDash val="solid"/>
           </a:ln>
         </p:spPr>
+        <p:txBody>
+          <a:bodyPr/>
+          <a:p/>
+        </p:txBody>
       </p:sp>
       <p:sp>
         <p:nvSpPr>
@@ -19237,6 +19514,10 @@
             <a:prstDash val="solid"/>
           </a:ln>
         </p:spPr>
+        <p:txBody>
+          <a:bodyPr/>
+          <a:p/>
+        </p:txBody>
       </p:sp>
       <p:sp>
         <p:nvSpPr>
@@ -19264,6 +19545,10 @@
             <a:prstDash val="solid"/>
           </a:ln>
         </p:spPr>
+        <p:txBody>
+          <a:bodyPr/>
+          <a:p/>
+        </p:txBody>
       </p:sp>
       <p:sp>
         <p:nvSpPr>
@@ -19373,6 +19658,10 @@
             <a:prstDash val="solid"/>
           </a:ln>
         </p:spPr>
+        <p:txBody>
+          <a:bodyPr/>
+          <a:p/>
+        </p:txBody>
       </p:sp>
       <p:sp>
         <p:nvSpPr>
@@ -19482,6 +19771,10 @@
             <a:prstDash val="solid"/>
           </a:ln>
         </p:spPr>
+        <p:txBody>
+          <a:bodyPr/>
+          <a:p/>
+        </p:txBody>
       </p:sp>
       <p:sp>
         <p:nvSpPr>
@@ -19591,6 +19884,10 @@
             <a:prstDash val="solid"/>
           </a:ln>
         </p:spPr>
+        <p:txBody>
+          <a:bodyPr/>
+          <a:p/>
+        </p:txBody>
       </p:sp>
       <p:sp>
         <p:nvSpPr>
@@ -19700,6 +19997,10 @@
             <a:prstDash val="solid"/>
           </a:ln>
         </p:spPr>
+        <p:txBody>
+          <a:bodyPr/>
+          <a:p/>
+        </p:txBody>
       </p:sp>
       <p:sp>
         <p:nvSpPr>
@@ -19846,6 +20147,10 @@
             <a:prstDash val="solid"/>
           </a:ln>
         </p:spPr>
+        <p:txBody>
+          <a:bodyPr/>
+          <a:p/>
+        </p:txBody>
       </p:sp>
       <p:sp>
         <p:nvSpPr>
@@ -19955,6 +20260,10 @@
             <a:prstDash val="solid"/>
           </a:ln>
         </p:spPr>
+        <p:txBody>
+          <a:bodyPr/>
+          <a:p/>
+        </p:txBody>
       </p:sp>
       <p:sp>
         <p:nvSpPr>
@@ -20021,6 +20330,10 @@
             <a:prstDash val="solid"/>
           </a:ln>
         </p:spPr>
+        <p:txBody>
+          <a:bodyPr/>
+          <a:p/>
+        </p:txBody>
       </p:sp>
       <p:sp>
         <p:nvSpPr>
@@ -20130,6 +20443,10 @@
             <a:prstDash val="solid"/>
           </a:ln>
         </p:spPr>
+        <p:txBody>
+          <a:bodyPr/>
+          <a:p/>
+        </p:txBody>
       </p:sp>
       <p:sp>
         <p:nvSpPr>
@@ -20280,6 +20597,10 @@
             <a:prstDash val="solid"/>
           </a:ln>
         </p:spPr>
+        <p:txBody>
+          <a:bodyPr/>
+          <a:p/>
+        </p:txBody>
       </p:sp>
       <p:sp>
         <p:nvSpPr>
@@ -20346,6 +20667,10 @@
             <a:prstDash val="solid"/>
           </a:ln>
         </p:spPr>
+        <p:txBody>
+          <a:bodyPr/>
+          <a:p/>
+        </p:txBody>
       </p:sp>
       <p:sp>
         <p:nvSpPr>
@@ -20455,6 +20780,10 @@
             <a:prstDash val="solid"/>
           </a:ln>
         </p:spPr>
+        <p:txBody>
+          <a:bodyPr/>
+          <a:p/>
+        </p:txBody>
       </p:sp>
       <p:sp>
         <p:nvSpPr>
@@ -20605,6 +20934,10 @@
             <a:prstDash val="solid"/>
           </a:ln>
         </p:spPr>
+        <p:txBody>
+          <a:bodyPr/>
+          <a:p/>
+        </p:txBody>
       </p:sp>
       <p:sp>
         <p:nvSpPr>
@@ -20671,6 +21004,10 @@
             <a:prstDash val="solid"/>
           </a:ln>
         </p:spPr>
+        <p:txBody>
+          <a:bodyPr/>
+          <a:p/>
+        </p:txBody>
       </p:sp>
       <p:sp>
         <p:nvSpPr>
@@ -20780,6 +21117,10 @@
             <a:prstDash val="solid"/>
           </a:ln>
         </p:spPr>
+        <p:txBody>
+          <a:bodyPr/>
+          <a:p/>
+        </p:txBody>
       </p:sp>
       <p:sp>
         <p:nvSpPr>
@@ -20848,6 +21189,10 @@
             <a:prstDash val="solid"/>
           </a:ln>
         </p:spPr>
+        <p:txBody>
+          <a:bodyPr/>
+          <a:p/>
+        </p:txBody>
       </p:sp>
       <p:sp>
         <p:nvSpPr>
@@ -20923,6 +21268,10 @@
             </a:outerShdw>
           </a:effectLst>
         </p:spPr>
+        <p:txBody>
+          <a:bodyPr/>
+          <a:p/>
+        </p:txBody>
       </p:sp>
       <p:pic>
         <p:nvPicPr>
@@ -20974,6 +21323,10 @@
             <a:prstDash val="solid"/>
           </a:ln>
         </p:spPr>
+        <p:txBody>
+          <a:bodyPr/>
+          <a:p/>
+        </p:txBody>
       </p:sp>
       <p:sp>
         <p:nvSpPr>
@@ -21137,6 +21490,10 @@
             <a:prstDash val="solid"/>
           </a:ln>
         </p:spPr>
+        <p:txBody>
+          <a:bodyPr/>
+          <a:p/>
+        </p:txBody>
       </p:sp>
       <p:sp>
         <p:nvSpPr>

--- a/RAILPOOL_AI_최종결과보고서_RailFit내용반영본_편집본.pptx
+++ b/RAILPOOL_AI_최종결과보고서_RailFit내용반영본_편집본.pptx
@@ -2151,37 +2151,6 @@
       </p:sp>
       <p:sp>
         <p:nvSpPr>
-          <p:cNvPr id="11" name="Shape 9"/>
-          <p:cNvSpPr/>
-          <p:nvPr/>
-        </p:nvSpPr>
-        <p:spPr>
-          <a:xfrm>
-            <a:off x="548640" y="4828032"/>
-            <a:ext cx="4498848" cy="1243584"/>
-          </a:xfrm>
-          <a:prstGeom prst="roundRect">
-            <a:avLst>
-              <a:gd name="adj" fmla="val 5882"/>
-            </a:avLst>
-          </a:prstGeom>
-          <a:solidFill>
-            <a:srgbClr val="102B4F"/>
-          </a:solidFill>
-          <a:ln w="10160">
-            <a:solidFill>
-              <a:srgbClr val="234263"/>
-            </a:solidFill>
-            <a:prstDash val="solid"/>
-          </a:ln>
-        </p:spPr>
-        <p:txBody>
-          <a:bodyPr/>
-          <a:p/>
-        </p:txBody>
-      </p:sp>
-      <p:sp>
-        <p:nvSpPr>
           <p:cNvPr id="21" name="Shape 19"/>
           <p:cNvSpPr/>
           <p:nvPr/>
@@ -2334,10 +2303,6 @@
             <a:prstDash val="solid"/>
           </a:ln>
         </p:spPr>
-        <p:txBody>
-          <a:bodyPr/>
-          <a:p/>
-        </p:txBody>
       </p:sp>
       <p:sp>
         <p:nvSpPr>
@@ -2484,10 +2449,6 @@
             <a:prstDash val="solid"/>
           </a:ln>
         </p:spPr>
-        <p:txBody>
-          <a:bodyPr/>
-          <a:p/>
-        </p:txBody>
       </p:sp>
       <p:sp>
         <p:nvSpPr>
@@ -2515,10 +2476,6 @@
             <a:prstDash val="solid"/>
           </a:ln>
         </p:spPr>
-        <p:txBody>
-          <a:bodyPr/>
-          <a:p/>
-        </p:txBody>
       </p:sp>
       <p:sp>
         <p:nvSpPr>
@@ -2628,10 +2585,6 @@
             <a:prstDash val="solid"/>
           </a:ln>
         </p:spPr>
-        <p:txBody>
-          <a:bodyPr/>
-          <a:p/>
-        </p:txBody>
       </p:sp>
       <p:sp>
         <p:nvSpPr>
@@ -2782,10 +2735,6 @@
             <a:prstDash val="solid"/>
           </a:ln>
         </p:spPr>
-        <p:txBody>
-          <a:bodyPr/>
-          <a:p/>
-        </p:txBody>
       </p:sp>
       <p:sp>
         <p:nvSpPr>
@@ -2936,10 +2885,6 @@
             <a:prstDash val="solid"/>
           </a:ln>
         </p:spPr>
-        <p:txBody>
-          <a:bodyPr/>
-          <a:p/>
-        </p:txBody>
       </p:sp>
       <p:sp>
         <p:nvSpPr>
@@ -3090,10 +3035,6 @@
             <a:prstDash val="solid"/>
           </a:ln>
         </p:spPr>
-        <p:txBody>
-          <a:bodyPr/>
-          <a:p/>
-        </p:txBody>
       </p:sp>
       <p:sp>
         <p:nvSpPr>
@@ -3244,10 +3185,6 @@
             <a:prstDash val="solid"/>
           </a:ln>
         </p:spPr>
-        <p:txBody>
-          <a:bodyPr/>
-          <a:p/>
-        </p:txBody>
       </p:sp>
       <p:sp>
         <p:nvSpPr>
@@ -3398,10 +3335,6 @@
             <a:prstDash val="solid"/>
           </a:ln>
         </p:spPr>
-        <p:txBody>
-          <a:bodyPr/>
-          <a:p/>
-        </p:txBody>
       </p:sp>
       <p:sp>
         <p:nvSpPr>
@@ -3470,10 +3403,6 @@
             <a:prstDash val="solid"/>
           </a:ln>
         </p:spPr>
-        <p:txBody>
-          <a:bodyPr/>
-          <a:p/>
-        </p:txBody>
       </p:sp>
       <p:sp>
         <p:nvSpPr>
@@ -3542,10 +3471,6 @@
             <a:prstDash val="solid"/>
           </a:ln>
         </p:spPr>
-        <p:txBody>
-          <a:bodyPr/>
-          <a:p/>
-        </p:txBody>
       </p:sp>
       <p:sp>
         <p:nvSpPr>
@@ -3655,10 +3580,6 @@
             <a:prstDash val="solid"/>
           </a:ln>
         </p:spPr>
-        <p:txBody>
-          <a:bodyPr/>
-          <a:p/>
-        </p:txBody>
       </p:sp>
       <p:sp>
         <p:nvSpPr>
@@ -3768,10 +3689,6 @@
             <a:prstDash val="solid"/>
           </a:ln>
         </p:spPr>
-        <p:txBody>
-          <a:bodyPr/>
-          <a:p/>
-        </p:txBody>
       </p:sp>
       <p:sp>
         <p:nvSpPr>
@@ -3881,10 +3798,6 @@
             <a:prstDash val="solid"/>
           </a:ln>
         </p:spPr>
-        <p:txBody>
-          <a:bodyPr/>
-          <a:p/>
-        </p:txBody>
       </p:sp>
       <p:sp>
         <p:nvSpPr>
@@ -3994,10 +3907,6 @@
             <a:prstDash val="solid"/>
           </a:ln>
         </p:spPr>
-        <p:txBody>
-          <a:bodyPr/>
-          <a:p/>
-        </p:txBody>
       </p:sp>
       <p:sp>
         <p:nvSpPr>
@@ -4066,10 +3975,6 @@
             <a:prstDash val="solid"/>
           </a:ln>
         </p:spPr>
-        <p:txBody>
-          <a:bodyPr/>
-          <a:p/>
-        </p:txBody>
       </p:sp>
       <p:sp>
         <p:nvSpPr>
@@ -4220,10 +4125,6 @@
             <a:prstDash val="solid"/>
           </a:ln>
         </p:spPr>
-        <p:txBody>
-          <a:bodyPr/>
-          <a:p/>
-        </p:txBody>
       </p:sp>
       <p:sp>
         <p:nvSpPr>
@@ -4374,10 +4275,6 @@
             <a:prstDash val="solid"/>
           </a:ln>
         </p:spPr>
-        <p:txBody>
-          <a:bodyPr/>
-          <a:p/>
-        </p:txBody>
       </p:sp>
       <p:sp>
         <p:nvSpPr>
@@ -4528,10 +4425,6 @@
             <a:prstDash val="solid"/>
           </a:ln>
         </p:spPr>
-        <p:txBody>
-          <a:bodyPr/>
-          <a:p/>
-        </p:txBody>
       </p:sp>
       <p:sp>
         <p:nvSpPr>
@@ -4637,10 +4530,6 @@
             <a:prstDash val="solid"/>
           </a:ln>
         </p:spPr>
-        <p:txBody>
-          <a:bodyPr/>
-          <a:p/>
-        </p:txBody>
       </p:sp>
       <p:sp>
         <p:nvSpPr>
@@ -4775,10 +4664,6 @@
             <a:prstDash val="solid"/>
           </a:ln>
         </p:spPr>
-        <p:txBody>
-          <a:bodyPr/>
-          <a:p/>
-        </p:txBody>
       </p:sp>
       <p:sp>
         <p:nvSpPr>
@@ -4925,10 +4810,6 @@
             <a:prstDash val="solid"/>
           </a:ln>
         </p:spPr>
-        <p:txBody>
-          <a:bodyPr/>
-          <a:p/>
-        </p:txBody>
       </p:sp>
       <p:sp>
         <p:nvSpPr>
@@ -4993,10 +4874,6 @@
             <a:prstDash val="solid"/>
           </a:ln>
         </p:spPr>
-        <p:txBody>
-          <a:bodyPr/>
-          <a:p/>
-        </p:txBody>
       </p:sp>
       <p:sp>
         <p:nvSpPr>
@@ -5022,10 +4899,6 @@
             <a:prstDash val="solid"/>
           </a:ln>
         </p:spPr>
-        <p:txBody>
-          <a:bodyPr/>
-          <a:p/>
-        </p:txBody>
       </p:sp>
       <p:sp>
         <p:nvSpPr>
@@ -5174,10 +5047,6 @@
             <a:prstDash val="solid"/>
           </a:ln>
         </p:spPr>
-        <p:txBody>
-          <a:bodyPr/>
-          <a:p/>
-        </p:txBody>
       </p:sp>
       <p:sp>
         <p:nvSpPr>
@@ -5326,10 +5195,6 @@
             <a:prstDash val="solid"/>
           </a:ln>
         </p:spPr>
-        <p:txBody>
-          <a:bodyPr/>
-          <a:p/>
-        </p:txBody>
       </p:sp>
       <p:sp>
         <p:nvSpPr>
@@ -5478,10 +5343,6 @@
             <a:prstDash val="solid"/>
           </a:ln>
         </p:spPr>
-        <p:txBody>
-          <a:bodyPr/>
-          <a:p/>
-        </p:txBody>
       </p:sp>
       <p:sp>
         <p:nvSpPr>
@@ -5630,10 +5491,6 @@
             <a:prstDash val="solid"/>
           </a:ln>
         </p:spPr>
-        <p:txBody>
-          <a:bodyPr/>
-          <a:p/>
-        </p:txBody>
       </p:sp>
       <p:sp>
         <p:nvSpPr>
@@ -5782,10 +5639,6 @@
             <a:prstDash val="solid"/>
           </a:ln>
         </p:spPr>
-        <p:txBody>
-          <a:bodyPr/>
-          <a:p/>
-        </p:txBody>
       </p:sp>
       <p:sp>
         <p:nvSpPr>
@@ -5934,10 +5787,6 @@
             <a:prstDash val="solid"/>
           </a:ln>
         </p:spPr>
-        <p:txBody>
-          <a:bodyPr/>
-          <a:p/>
-        </p:txBody>
       </p:sp>
       <p:sp>
         <p:nvSpPr>
@@ -6088,10 +5937,6 @@
             <a:prstDash val="solid"/>
           </a:ln>
         </p:spPr>
-        <p:txBody>
-          <a:bodyPr/>
-          <a:p/>
-        </p:txBody>
       </p:sp>
       <p:sp>
         <p:nvSpPr>
@@ -6158,10 +6003,6 @@
             <a:prstDash val="solid"/>
           </a:ln>
         </p:spPr>
-        <p:txBody>
-          <a:bodyPr/>
-          <a:p/>
-        </p:txBody>
       </p:sp>
       <p:sp>
         <p:nvSpPr>
@@ -6269,10 +6110,6 @@
             <a:prstDash val="solid"/>
           </a:ln>
         </p:spPr>
-        <p:txBody>
-          <a:bodyPr/>
-          <a:p/>
-        </p:txBody>
       </p:sp>
       <p:sp>
         <p:nvSpPr>
@@ -6380,10 +6217,6 @@
             <a:prstDash val="solid"/>
           </a:ln>
         </p:spPr>
-        <p:txBody>
-          <a:bodyPr/>
-          <a:p/>
-        </p:txBody>
       </p:sp>
       <p:sp>
         <p:nvSpPr>
@@ -6491,10 +6324,6 @@
             <a:prstDash val="solid"/>
           </a:ln>
         </p:spPr>
-        <p:txBody>
-          <a:bodyPr/>
-          <a:p/>
-        </p:txBody>
       </p:sp>
       <p:sp>
         <p:nvSpPr>
@@ -6604,10 +6433,6 @@
             <a:prstDash val="solid"/>
           </a:ln>
         </p:spPr>
-        <p:txBody>
-          <a:bodyPr/>
-          <a:p/>
-        </p:txBody>
       </p:sp>
       <p:sp>
         <p:nvSpPr>
@@ -6899,10 +6724,6 @@
             <a:prstDash val="solid"/>
           </a:ln>
         </p:spPr>
-        <p:txBody>
-          <a:bodyPr/>
-          <a:p/>
-        </p:txBody>
       </p:sp>
       <p:sp>
         <p:nvSpPr>
@@ -6967,10 +6788,6 @@
             <a:prstDash val="solid"/>
           </a:ln>
         </p:spPr>
-        <p:txBody>
-          <a:bodyPr/>
-          <a:p/>
-        </p:txBody>
       </p:sp>
       <p:sp>
         <p:nvSpPr>
@@ -10944,10 +10761,6 @@
             <a:prstDash val="solid"/>
           </a:ln>
         </p:spPr>
-        <p:txBody>
-          <a:bodyPr/>
-          <a:p/>
-        </p:txBody>
       </p:sp>
       <p:sp>
         <p:nvSpPr>
@@ -11094,10 +10907,6 @@
             <a:prstDash val="solid"/>
           </a:ln>
         </p:spPr>
-        <p:txBody>
-          <a:bodyPr/>
-          <a:p/>
-        </p:txBody>
       </p:sp>
       <p:sp>
         <p:nvSpPr>
@@ -11125,10 +10934,6 @@
             <a:prstDash val="solid"/>
           </a:ln>
         </p:spPr>
-        <p:txBody>
-          <a:bodyPr/>
-          <a:p/>
-        </p:txBody>
       </p:sp>
       <p:sp>
         <p:nvSpPr>
@@ -11252,10 +11057,6 @@
             <a:tailEnd type="triangle"/>
           </a:ln>
         </p:spPr>
-        <p:txBody>
-          <a:bodyPr/>
-          <a:p/>
-        </p:txBody>
       </p:sp>
       <p:sp>
         <p:nvSpPr>
@@ -11290,10 +11091,6 @@
             </a:outerShdw>
           </a:effectLst>
         </p:spPr>
-        <p:txBody>
-          <a:bodyPr/>
-          <a:p/>
-        </p:txBody>
       </p:sp>
       <p:sp>
         <p:nvSpPr>
@@ -11417,10 +11214,6 @@
             <a:tailEnd type="triangle"/>
           </a:ln>
         </p:spPr>
-        <p:txBody>
-          <a:bodyPr/>
-          <a:p/>
-        </p:txBody>
       </p:sp>
       <p:sp>
         <p:nvSpPr>
@@ -11448,10 +11241,6 @@
             <a:prstDash val="solid"/>
           </a:ln>
         </p:spPr>
-        <p:txBody>
-          <a:bodyPr/>
-          <a:p/>
-        </p:txBody>
       </p:sp>
       <p:sp>
         <p:nvSpPr>
@@ -11575,10 +11364,6 @@
             <a:tailEnd type="triangle"/>
           </a:ln>
         </p:spPr>
-        <p:txBody>
-          <a:bodyPr/>
-          <a:p/>
-        </p:txBody>
       </p:sp>
       <p:sp>
         <p:nvSpPr>
@@ -11606,10 +11391,6 @@
             <a:prstDash val="solid"/>
           </a:ln>
         </p:spPr>
-        <p:txBody>
-          <a:bodyPr/>
-          <a:p/>
-        </p:txBody>
       </p:sp>
       <p:sp>
         <p:nvSpPr>
@@ -11733,10 +11514,6 @@
             <a:tailEnd type="triangle"/>
           </a:ln>
         </p:spPr>
-        <p:txBody>
-          <a:bodyPr/>
-          <a:p/>
-        </p:txBody>
       </p:sp>
       <p:sp>
         <p:nvSpPr>
@@ -11764,10 +11541,6 @@
             <a:prstDash val="solid"/>
           </a:ln>
         </p:spPr>
-        <p:txBody>
-          <a:bodyPr/>
-          <a:p/>
-        </p:txBody>
       </p:sp>
       <p:sp>
         <p:nvSpPr>
@@ -11894,10 +11667,6 @@
             <a:prstDash val="solid"/>
           </a:ln>
         </p:spPr>
-        <p:txBody>
-          <a:bodyPr/>
-          <a:p/>
-        </p:txBody>
       </p:sp>
       <p:sp>
         <p:nvSpPr>
@@ -12024,10 +11793,6 @@
             <a:prstDash val="solid"/>
           </a:ln>
         </p:spPr>
-        <p:txBody>
-          <a:bodyPr/>
-          <a:p/>
-        </p:txBody>
       </p:sp>
       <p:sp>
         <p:nvSpPr>
@@ -12154,10 +11919,6 @@
             <a:prstDash val="solid"/>
           </a:ln>
         </p:spPr>
-        <p:txBody>
-          <a:bodyPr/>
-          <a:p/>
-        </p:txBody>
       </p:sp>
       <p:sp>
         <p:nvSpPr>
@@ -12226,10 +11987,6 @@
             <a:prstDash val="solid"/>
           </a:ln>
         </p:spPr>
-        <p:txBody>
-          <a:bodyPr/>
-          <a:p/>
-        </p:txBody>
       </p:sp>
       <p:sp>
         <p:nvSpPr>
@@ -12336,10 +12093,6 @@
             <a:tailEnd type="triangle"/>
           </a:ln>
         </p:spPr>
-        <p:txBody>
-          <a:bodyPr/>
-          <a:p/>
-        </p:txBody>
       </p:sp>
       <p:sp>
         <p:nvSpPr>
@@ -12364,10 +12117,6 @@
             <a:tailEnd type="triangle"/>
           </a:ln>
         </p:spPr>
-        <p:txBody>
-          <a:bodyPr/>
-          <a:p/>
-        </p:txBody>
       </p:sp>
       <p:sp>
         <p:nvSpPr>
@@ -12392,10 +12141,6 @@
             <a:tailEnd type="triangle"/>
           </a:ln>
         </p:spPr>
-        <p:txBody>
-          <a:bodyPr/>
-          <a:p/>
-        </p:txBody>
       </p:sp>
       <p:sp>
         <p:nvSpPr>
@@ -12423,10 +12168,6 @@
             <a:prstDash val="solid"/>
           </a:ln>
         </p:spPr>
-        <p:txBody>
-          <a:bodyPr/>
-          <a:p/>
-        </p:txBody>
       </p:sp>
       <p:sp>
         <p:nvSpPr>
@@ -12577,10 +12318,6 @@
             <a:prstDash val="solid"/>
           </a:ln>
         </p:spPr>
-        <p:txBody>
-          <a:bodyPr/>
-          <a:p/>
-        </p:txBody>
       </p:sp>
       <p:sp>
         <p:nvSpPr>
@@ -12690,10 +12427,6 @@
             <a:prstDash val="solid"/>
           </a:ln>
         </p:spPr>
-        <p:txBody>
-          <a:bodyPr/>
-          <a:p/>
-        </p:txBody>
       </p:sp>
       <p:sp>
         <p:nvSpPr>
@@ -12803,10 +12536,6 @@
             <a:prstDash val="solid"/>
           </a:ln>
         </p:spPr>
-        <p:txBody>
-          <a:bodyPr/>
-          <a:p/>
-        </p:txBody>
       </p:sp>
       <p:sp>
         <p:nvSpPr>
@@ -12916,10 +12645,6 @@
             <a:prstDash val="solid"/>
           </a:ln>
         </p:spPr>
-        <p:txBody>
-          <a:bodyPr/>
-          <a:p/>
-        </p:txBody>
       </p:sp>
       <p:sp>
         <p:nvSpPr>
@@ -13029,10 +12754,6 @@
             <a:prstDash val="solid"/>
           </a:ln>
         </p:spPr>
-        <p:txBody>
-          <a:bodyPr/>
-          <a:p/>
-        </p:txBody>
       </p:sp>
       <p:sp>
         <p:nvSpPr>
@@ -13179,10 +12900,6 @@
             <a:prstDash val="solid"/>
           </a:ln>
         </p:spPr>
-        <p:txBody>
-          <a:bodyPr/>
-          <a:p/>
-        </p:txBody>
       </p:sp>
       <p:sp>
         <p:nvSpPr>
@@ -13317,10 +13034,6 @@
             <a:prstDash val="solid"/>
           </a:ln>
         </p:spPr>
-        <p:txBody>
-          <a:bodyPr/>
-          <a:p/>
-        </p:txBody>
       </p:sp>
       <p:sp>
         <p:nvSpPr>
@@ -13467,10 +13180,6 @@
             <a:prstDash val="solid"/>
           </a:ln>
         </p:spPr>
-        <p:txBody>
-          <a:bodyPr/>
-          <a:p/>
-        </p:txBody>
       </p:sp>
       <p:sp>
         <p:nvSpPr>
@@ -13505,10 +13214,6 @@
             </a:outerShdw>
           </a:effectLst>
         </p:spPr>
-        <p:txBody>
-          <a:bodyPr/>
-          <a:p/>
-        </p:txBody>
       </p:sp>
       <p:pic>
         <p:nvPicPr>
@@ -13560,10 +13265,6 @@
             <a:prstDash val="solid"/>
           </a:ln>
         </p:spPr>
-        <p:txBody>
-          <a:bodyPr/>
-          <a:p/>
-        </p:txBody>
       </p:sp>
       <p:sp>
         <p:nvSpPr>
@@ -13711,10 +13412,6 @@
             <a:tailEnd type="triangle"/>
           </a:ln>
         </p:spPr>
-        <p:txBody>
-          <a:bodyPr/>
-          <a:p/>
-        </p:txBody>
       </p:sp>
       <p:sp>
         <p:nvSpPr>
@@ -13749,10 +13446,6 @@
             </a:outerShdw>
           </a:effectLst>
         </p:spPr>
-        <p:txBody>
-          <a:bodyPr/>
-          <a:p/>
-        </p:txBody>
       </p:sp>
       <p:pic>
         <p:nvPicPr>
@@ -13804,10 +13497,6 @@
             <a:prstDash val="solid"/>
           </a:ln>
         </p:spPr>
-        <p:txBody>
-          <a:bodyPr/>
-          <a:p/>
-        </p:txBody>
       </p:sp>
       <p:sp>
         <p:nvSpPr>
@@ -13955,10 +13644,6 @@
             <a:tailEnd type="triangle"/>
           </a:ln>
         </p:spPr>
-        <p:txBody>
-          <a:bodyPr/>
-          <a:p/>
-        </p:txBody>
       </p:sp>
       <p:sp>
         <p:nvSpPr>
@@ -13993,10 +13678,6 @@
             </a:outerShdw>
           </a:effectLst>
         </p:spPr>
-        <p:txBody>
-          <a:bodyPr/>
-          <a:p/>
-        </p:txBody>
       </p:sp>
       <p:pic>
         <p:nvPicPr>
@@ -14048,10 +13729,6 @@
             <a:prstDash val="solid"/>
           </a:ln>
         </p:spPr>
-        <p:txBody>
-          <a:bodyPr/>
-          <a:p/>
-        </p:txBody>
       </p:sp>
       <p:sp>
         <p:nvSpPr>
@@ -14199,10 +13876,6 @@
             <a:tailEnd type="triangle"/>
           </a:ln>
         </p:spPr>
-        <p:txBody>
-          <a:bodyPr/>
-          <a:p/>
-        </p:txBody>
       </p:sp>
       <p:sp>
         <p:nvSpPr>
@@ -14237,10 +13910,6 @@
             </a:outerShdw>
           </a:effectLst>
         </p:spPr>
-        <p:txBody>
-          <a:bodyPr/>
-          <a:p/>
-        </p:txBody>
       </p:sp>
       <p:pic>
         <p:nvPicPr>
@@ -14292,10 +13961,6 @@
             <a:prstDash val="solid"/>
           </a:ln>
         </p:spPr>
-        <p:txBody>
-          <a:bodyPr/>
-          <a:p/>
-        </p:txBody>
       </p:sp>
       <p:sp>
         <p:nvSpPr>
@@ -14446,10 +14111,6 @@
             <a:prstDash val="solid"/>
           </a:ln>
         </p:spPr>
-        <p:txBody>
-          <a:bodyPr/>
-          <a:p/>
-        </p:txBody>
       </p:sp>
       <p:sp>
         <p:nvSpPr>
@@ -14514,10 +14175,6 @@
             <a:prstDash val="solid"/>
           </a:ln>
         </p:spPr>
-        <p:txBody>
-          <a:bodyPr/>
-          <a:p/>
-        </p:txBody>
       </p:sp>
       <p:sp>
         <p:nvSpPr>
@@ -14652,10 +14309,6 @@
             <a:prstDash val="solid"/>
           </a:ln>
         </p:spPr>
-        <p:txBody>
-          <a:bodyPr/>
-          <a:p/>
-        </p:txBody>
       </p:sp>
       <p:sp>
         <p:nvSpPr>
@@ -14802,10 +14455,6 @@
             <a:prstDash val="solid"/>
           </a:ln>
         </p:spPr>
-        <p:txBody>
-          <a:bodyPr/>
-          <a:p/>
-        </p:txBody>
       </p:sp>
       <p:sp>
         <p:nvSpPr>
@@ -14840,10 +14489,6 @@
             </a:outerShdw>
           </a:effectLst>
         </p:spPr>
-        <p:txBody>
-          <a:bodyPr/>
-          <a:p/>
-        </p:txBody>
       </p:sp>
       <p:pic>
         <p:nvPicPr>
@@ -14895,10 +14540,6 @@
             <a:prstDash val="solid"/>
           </a:ln>
         </p:spPr>
-        <p:txBody>
-          <a:bodyPr/>
-          <a:p/>
-        </p:txBody>
       </p:sp>
       <p:sp>
         <p:nvSpPr>
@@ -15046,10 +14687,6 @@
             <a:tailEnd type="triangle"/>
           </a:ln>
         </p:spPr>
-        <p:txBody>
-          <a:bodyPr/>
-          <a:p/>
-        </p:txBody>
       </p:sp>
       <p:sp>
         <p:nvSpPr>
@@ -15084,10 +14721,6 @@
             </a:outerShdw>
           </a:effectLst>
         </p:spPr>
-        <p:txBody>
-          <a:bodyPr/>
-          <a:p/>
-        </p:txBody>
       </p:sp>
       <p:pic>
         <p:nvPicPr>
@@ -15139,10 +14772,6 @@
             <a:prstDash val="solid"/>
           </a:ln>
         </p:spPr>
-        <p:txBody>
-          <a:bodyPr/>
-          <a:p/>
-        </p:txBody>
       </p:sp>
       <p:sp>
         <p:nvSpPr>
@@ -15290,10 +14919,6 @@
             <a:tailEnd type="triangle"/>
           </a:ln>
         </p:spPr>
-        <p:txBody>
-          <a:bodyPr/>
-          <a:p/>
-        </p:txBody>
       </p:sp>
       <p:sp>
         <p:nvSpPr>
@@ -15328,10 +14953,6 @@
             </a:outerShdw>
           </a:effectLst>
         </p:spPr>
-        <p:txBody>
-          <a:bodyPr/>
-          <a:p/>
-        </p:txBody>
       </p:sp>
       <p:pic>
         <p:nvPicPr>
@@ -15383,10 +15004,6 @@
             <a:prstDash val="solid"/>
           </a:ln>
         </p:spPr>
-        <p:txBody>
-          <a:bodyPr/>
-          <a:p/>
-        </p:txBody>
       </p:sp>
       <p:sp>
         <p:nvSpPr>
@@ -15537,10 +15154,6 @@
             <a:prstDash val="solid"/>
           </a:ln>
         </p:spPr>
-        <p:txBody>
-          <a:bodyPr/>
-          <a:p/>
-        </p:txBody>
       </p:sp>
       <p:sp>
         <p:nvSpPr>
@@ -15646,10 +15259,6 @@
             <a:prstDash val="solid"/>
           </a:ln>
         </p:spPr>
-        <p:txBody>
-          <a:bodyPr/>
-          <a:p/>
-        </p:txBody>
       </p:sp>
       <p:sp>
         <p:nvSpPr>
@@ -15784,10 +15393,6 @@
             <a:prstDash val="solid"/>
           </a:ln>
         </p:spPr>
-        <p:txBody>
-          <a:bodyPr/>
-          <a:p/>
-        </p:txBody>
       </p:sp>
       <p:sp>
         <p:nvSpPr>
@@ -15934,10 +15539,6 @@
             <a:prstDash val="solid"/>
           </a:ln>
         </p:spPr>
-        <p:txBody>
-          <a:bodyPr/>
-          <a:p/>
-        </p:txBody>
       </p:sp>
       <p:sp>
         <p:nvSpPr>
@@ -15965,10 +15566,6 @@
             <a:prstDash val="solid"/>
           </a:ln>
         </p:spPr>
-        <p:txBody>
-          <a:bodyPr/>
-          <a:p/>
-        </p:txBody>
       </p:sp>
       <p:sp>
         <p:nvSpPr>
@@ -16119,10 +15716,6 @@
             <a:prstDash val="solid"/>
           </a:ln>
         </p:spPr>
-        <p:txBody>
-          <a:bodyPr/>
-          <a:p/>
-        </p:txBody>
       </p:sp>
       <p:sp>
         <p:nvSpPr>
@@ -16290,10 +15883,6 @@
             <a:prstDash val="solid"/>
           </a:ln>
         </p:spPr>
-        <p:txBody>
-          <a:bodyPr/>
-          <a:p/>
-        </p:txBody>
       </p:sp>
       <p:sp>
         <p:nvSpPr>
@@ -16461,10 +16050,6 @@
             <a:prstDash val="solid"/>
           </a:ln>
         </p:spPr>
-        <p:txBody>
-          <a:bodyPr/>
-          <a:p/>
-        </p:txBody>
       </p:sp>
       <p:sp>
         <p:nvSpPr>
@@ -16632,10 +16217,6 @@
             <a:prstDash val="solid"/>
           </a:ln>
         </p:spPr>
-        <p:txBody>
-          <a:bodyPr/>
-          <a:p/>
-        </p:txBody>
       </p:sp>
       <p:sp>
         <p:nvSpPr>
@@ -16803,10 +16384,6 @@
             <a:prstDash val="solid"/>
           </a:ln>
         </p:spPr>
-        <p:txBody>
-          <a:bodyPr/>
-          <a:p/>
-        </p:txBody>
       </p:sp>
       <p:sp>
         <p:nvSpPr>
@@ -16974,10 +16551,6 @@
             <a:prstDash val="solid"/>
           </a:ln>
         </p:spPr>
-        <p:txBody>
-          <a:bodyPr/>
-          <a:p/>
-        </p:txBody>
       </p:sp>
       <p:sp>
         <p:nvSpPr>
@@ -17042,10 +16615,6 @@
             <a:prstDash val="solid"/>
           </a:ln>
         </p:spPr>
-        <p:txBody>
-          <a:bodyPr/>
-          <a:p/>
-        </p:txBody>
       </p:sp>
       <p:sp>
         <p:nvSpPr>
@@ -17180,10 +16749,6 @@
             <a:prstDash val="solid"/>
           </a:ln>
         </p:spPr>
-        <p:txBody>
-          <a:bodyPr/>
-          <a:p/>
-        </p:txBody>
       </p:sp>
       <p:sp>
         <p:nvSpPr>
@@ -17330,10 +16895,6 @@
             <a:prstDash val="solid"/>
           </a:ln>
         </p:spPr>
-        <p:txBody>
-          <a:bodyPr/>
-          <a:p/>
-        </p:txBody>
       </p:sp>
       <p:sp>
         <p:nvSpPr>
@@ -17361,10 +16922,6 @@
             <a:prstDash val="solid"/>
           </a:ln>
         </p:spPr>
-        <p:txBody>
-          <a:bodyPr/>
-          <a:p/>
-        </p:txBody>
       </p:sp>
       <p:sp>
         <p:nvSpPr>
@@ -17515,10 +17072,6 @@
             <a:prstDash val="solid"/>
           </a:ln>
         </p:spPr>
-        <p:txBody>
-          <a:bodyPr/>
-          <a:p/>
-        </p:txBody>
       </p:sp>
       <p:sp>
         <p:nvSpPr>
@@ -17761,10 +17314,6 @@
             <a:prstDash val="solid"/>
           </a:ln>
         </p:spPr>
-        <p:txBody>
-          <a:bodyPr/>
-          <a:p/>
-        </p:txBody>
       </p:sp>
       <p:sp>
         <p:nvSpPr>
@@ -17790,10 +17339,6 @@
             <a:prstDash val="solid"/>
           </a:ln>
         </p:spPr>
-        <p:txBody>
-          <a:bodyPr/>
-          <a:p/>
-        </p:txBody>
       </p:sp>
       <p:sp>
         <p:nvSpPr>
@@ -17941,10 +17486,6 @@
             <a:tailEnd type="triangle"/>
           </a:ln>
         </p:spPr>
-        <p:txBody>
-          <a:bodyPr/>
-          <a:p/>
-        </p:txBody>
       </p:sp>
       <p:sp>
         <p:nvSpPr>
@@ -17972,10 +17513,6 @@
             <a:prstDash val="solid"/>
           </a:ln>
         </p:spPr>
-        <p:txBody>
-          <a:bodyPr/>
-          <a:p/>
-        </p:txBody>
       </p:sp>
       <p:sp>
         <p:nvSpPr>
@@ -18001,10 +17538,6 @@
             <a:prstDash val="solid"/>
           </a:ln>
         </p:spPr>
-        <p:txBody>
-          <a:bodyPr/>
-          <a:p/>
-        </p:txBody>
       </p:sp>
       <p:sp>
         <p:nvSpPr>
@@ -18152,10 +17685,6 @@
             <a:tailEnd type="triangle"/>
           </a:ln>
         </p:spPr>
-        <p:txBody>
-          <a:bodyPr/>
-          <a:p/>
-        </p:txBody>
       </p:sp>
       <p:sp>
         <p:nvSpPr>
@@ -18183,10 +17712,6 @@
             <a:prstDash val="solid"/>
           </a:ln>
         </p:spPr>
-        <p:txBody>
-          <a:bodyPr/>
-          <a:p/>
-        </p:txBody>
       </p:sp>
       <p:sp>
         <p:nvSpPr>
@@ -18212,10 +17737,6 @@
             <a:prstDash val="solid"/>
           </a:ln>
         </p:spPr>
-        <p:txBody>
-          <a:bodyPr/>
-          <a:p/>
-        </p:txBody>
       </p:sp>
       <p:sp>
         <p:nvSpPr>
@@ -18363,10 +17884,6 @@
             <a:tailEnd type="triangle"/>
           </a:ln>
         </p:spPr>
-        <p:txBody>
-          <a:bodyPr/>
-          <a:p/>
-        </p:txBody>
       </p:sp>
       <p:sp>
         <p:nvSpPr>
@@ -18394,10 +17911,6 @@
             <a:prstDash val="solid"/>
           </a:ln>
         </p:spPr>
-        <p:txBody>
-          <a:bodyPr/>
-          <a:p/>
-        </p:txBody>
       </p:sp>
       <p:sp>
         <p:nvSpPr>
@@ -18423,10 +17936,6 @@
             <a:prstDash val="solid"/>
           </a:ln>
         </p:spPr>
-        <p:txBody>
-          <a:bodyPr/>
-          <a:p/>
-        </p:txBody>
       </p:sp>
       <p:sp>
         <p:nvSpPr>
@@ -18574,10 +18083,6 @@
             <a:tailEnd type="triangle"/>
           </a:ln>
         </p:spPr>
-        <p:txBody>
-          <a:bodyPr/>
-          <a:p/>
-        </p:txBody>
       </p:sp>
       <p:sp>
         <p:nvSpPr>
@@ -18605,10 +18110,6 @@
             <a:prstDash val="solid"/>
           </a:ln>
         </p:spPr>
-        <p:txBody>
-          <a:bodyPr/>
-          <a:p/>
-        </p:txBody>
       </p:sp>
       <p:sp>
         <p:nvSpPr>
@@ -18634,10 +18135,6 @@
             <a:prstDash val="solid"/>
           </a:ln>
         </p:spPr>
-        <p:txBody>
-          <a:bodyPr/>
-          <a:p/>
-        </p:txBody>
       </p:sp>
       <p:sp>
         <p:nvSpPr>
@@ -18829,10 +18326,6 @@
             <a:prstDash val="solid"/>
           </a:ln>
         </p:spPr>
-        <p:txBody>
-          <a:bodyPr/>
-          <a:p/>
-        </p:txBody>
       </p:sp>
       <p:sp>
         <p:nvSpPr>
@@ -18901,10 +18394,6 @@
             <a:prstDash val="solid"/>
           </a:ln>
         </p:spPr>
-        <p:txBody>
-          <a:bodyPr/>
-          <a:p/>
-        </p:txBody>
       </p:sp>
       <p:sp>
         <p:nvSpPr>
@@ -18973,10 +18462,6 @@
             <a:prstDash val="solid"/>
           </a:ln>
         </p:spPr>
-        <p:txBody>
-          <a:bodyPr/>
-          <a:p/>
-        </p:txBody>
       </p:sp>
       <p:sp>
         <p:nvSpPr>
@@ -19045,10 +18530,6 @@
             <a:prstDash val="solid"/>
           </a:ln>
         </p:spPr>
-        <p:txBody>
-          <a:bodyPr/>
-          <a:p/>
-        </p:txBody>
       </p:sp>
       <p:sp>
         <p:nvSpPr>
@@ -19117,10 +18598,6 @@
             <a:prstDash val="solid"/>
           </a:ln>
         </p:spPr>
-        <p:txBody>
-          <a:bodyPr/>
-          <a:p/>
-        </p:txBody>
       </p:sp>
       <p:sp>
         <p:nvSpPr>
@@ -19226,10 +18703,6 @@
             <a:prstDash val="solid"/>
           </a:ln>
         </p:spPr>
-        <p:txBody>
-          <a:bodyPr/>
-          <a:p/>
-        </p:txBody>
       </p:sp>
       <p:sp>
         <p:nvSpPr>
@@ -19364,10 +18837,6 @@
             <a:prstDash val="solid"/>
           </a:ln>
         </p:spPr>
-        <p:txBody>
-          <a:bodyPr/>
-          <a:p/>
-        </p:txBody>
       </p:sp>
       <p:sp>
         <p:nvSpPr>
@@ -19514,10 +18983,6 @@
             <a:prstDash val="solid"/>
           </a:ln>
         </p:spPr>
-        <p:txBody>
-          <a:bodyPr/>
-          <a:p/>
-        </p:txBody>
       </p:sp>
       <p:sp>
         <p:nvSpPr>
@@ -19545,10 +19010,6 @@
             <a:prstDash val="solid"/>
           </a:ln>
         </p:spPr>
-        <p:txBody>
-          <a:bodyPr/>
-          <a:p/>
-        </p:txBody>
       </p:sp>
       <p:sp>
         <p:nvSpPr>
@@ -19658,10 +19119,6 @@
             <a:prstDash val="solid"/>
           </a:ln>
         </p:spPr>
-        <p:txBody>
-          <a:bodyPr/>
-          <a:p/>
-        </p:txBody>
       </p:sp>
       <p:sp>
         <p:nvSpPr>
@@ -19771,10 +19228,6 @@
             <a:prstDash val="solid"/>
           </a:ln>
         </p:spPr>
-        <p:txBody>
-          <a:bodyPr/>
-          <a:p/>
-        </p:txBody>
       </p:sp>
       <p:sp>
         <p:nvSpPr>
@@ -19884,10 +19337,6 @@
             <a:prstDash val="solid"/>
           </a:ln>
         </p:spPr>
-        <p:txBody>
-          <a:bodyPr/>
-          <a:p/>
-        </p:txBody>
       </p:sp>
       <p:sp>
         <p:nvSpPr>
@@ -19997,10 +19446,6 @@
             <a:prstDash val="solid"/>
           </a:ln>
         </p:spPr>
-        <p:txBody>
-          <a:bodyPr/>
-          <a:p/>
-        </p:txBody>
       </p:sp>
       <p:sp>
         <p:nvSpPr>
@@ -20147,10 +19592,6 @@
             <a:prstDash val="solid"/>
           </a:ln>
         </p:spPr>
-        <p:txBody>
-          <a:bodyPr/>
-          <a:p/>
-        </p:txBody>
       </p:sp>
       <p:sp>
         <p:nvSpPr>
@@ -20260,10 +19701,6 @@
             <a:prstDash val="solid"/>
           </a:ln>
         </p:spPr>
-        <p:txBody>
-          <a:bodyPr/>
-          <a:p/>
-        </p:txBody>
       </p:sp>
       <p:sp>
         <p:nvSpPr>
@@ -20330,10 +19767,6 @@
             <a:prstDash val="solid"/>
           </a:ln>
         </p:spPr>
-        <p:txBody>
-          <a:bodyPr/>
-          <a:p/>
-        </p:txBody>
       </p:sp>
       <p:sp>
         <p:nvSpPr>
@@ -20443,10 +19876,6 @@
             <a:prstDash val="solid"/>
           </a:ln>
         </p:spPr>
-        <p:txBody>
-          <a:bodyPr/>
-          <a:p/>
-        </p:txBody>
       </p:sp>
       <p:sp>
         <p:nvSpPr>
@@ -20597,10 +20026,6 @@
             <a:prstDash val="solid"/>
           </a:ln>
         </p:spPr>
-        <p:txBody>
-          <a:bodyPr/>
-          <a:p/>
-        </p:txBody>
       </p:sp>
       <p:sp>
         <p:nvSpPr>
@@ -20667,10 +20092,6 @@
             <a:prstDash val="solid"/>
           </a:ln>
         </p:spPr>
-        <p:txBody>
-          <a:bodyPr/>
-          <a:p/>
-        </p:txBody>
       </p:sp>
       <p:sp>
         <p:nvSpPr>
@@ -20780,10 +20201,6 @@
             <a:prstDash val="solid"/>
           </a:ln>
         </p:spPr>
-        <p:txBody>
-          <a:bodyPr/>
-          <a:p/>
-        </p:txBody>
       </p:sp>
       <p:sp>
         <p:nvSpPr>
@@ -20934,10 +20351,6 @@
             <a:prstDash val="solid"/>
           </a:ln>
         </p:spPr>
-        <p:txBody>
-          <a:bodyPr/>
-          <a:p/>
-        </p:txBody>
       </p:sp>
       <p:sp>
         <p:nvSpPr>
@@ -21004,10 +20417,6 @@
             <a:prstDash val="solid"/>
           </a:ln>
         </p:spPr>
-        <p:txBody>
-          <a:bodyPr/>
-          <a:p/>
-        </p:txBody>
       </p:sp>
       <p:sp>
         <p:nvSpPr>
@@ -21117,10 +20526,6 @@
             <a:prstDash val="solid"/>
           </a:ln>
         </p:spPr>
-        <p:txBody>
-          <a:bodyPr/>
-          <a:p/>
-        </p:txBody>
       </p:sp>
       <p:sp>
         <p:nvSpPr>
@@ -21189,10 +20594,6 @@
             <a:prstDash val="solid"/>
           </a:ln>
         </p:spPr>
-        <p:txBody>
-          <a:bodyPr/>
-          <a:p/>
-        </p:txBody>
       </p:sp>
       <p:sp>
         <p:nvSpPr>
@@ -21268,10 +20669,6 @@
             </a:outerShdw>
           </a:effectLst>
         </p:spPr>
-        <p:txBody>
-          <a:bodyPr/>
-          <a:p/>
-        </p:txBody>
       </p:sp>
       <p:pic>
         <p:nvPicPr>
@@ -21323,10 +20720,6 @@
             <a:prstDash val="solid"/>
           </a:ln>
         </p:spPr>
-        <p:txBody>
-          <a:bodyPr/>
-          <a:p/>
-        </p:txBody>
       </p:sp>
       <p:sp>
         <p:nvSpPr>
@@ -21490,10 +20883,6 @@
             <a:prstDash val="solid"/>
           </a:ln>
         </p:spPr>
-        <p:txBody>
-          <a:bodyPr/>
-          <a:p/>
-        </p:txBody>
       </p:sp>
       <p:sp>
         <p:nvSpPr>

--- a/RAILPOOL_AI_최종결과보고서_RailFit내용반영본_편집본.pptx
+++ b/RAILPOOL_AI_최종결과보고서_RailFit내용반영본_편집본.pptx
@@ -1822,6 +1822,10 @@
             <a:prstDash val="solid"/>
           </a:ln>
         </p:spPr>
+        <p:txBody>
+          <a:bodyPr/>
+          <a:p/>
+        </p:txBody>
       </p:sp>
       <p:sp>
         <p:nvSpPr>
@@ -1851,6 +1855,10 @@
             <a:prstDash val="solid"/>
           </a:ln>
         </p:spPr>
+        <p:txBody>
+          <a:bodyPr/>
+          <a:p/>
+        </p:txBody>
       </p:sp>
       <p:sp>
         <p:nvSpPr>
@@ -1880,6 +1888,10 @@
             <a:prstDash val="solid"/>
           </a:ln>
         </p:spPr>
+        <p:txBody>
+          <a:bodyPr/>
+          <a:p/>
+        </p:txBody>
       </p:sp>
       <p:sp>
         <p:nvSpPr>
@@ -1907,6 +1919,10 @@
             <a:prstDash val="solid"/>
           </a:ln>
         </p:spPr>
+        <p:txBody>
+          <a:bodyPr/>
+          <a:p/>
+        </p:txBody>
       </p:sp>
       <p:sp>
         <p:nvSpPr>
@@ -1943,7 +1959,7 @@
                 <a:ea typeface="Nanum Gothic" pitchFamily="34" charset="-122"/>
                 <a:cs typeface="Nanum Gothic" pitchFamily="34" charset="-120"/>
               </a:rPr>
-              <a:t>MOVE AI CHALLENGE 2026</a:t>
+              <a:t>은하철도99  |  MOVE AI CHALLENGE 2026</a:t>
             </a:r>
             <a:endParaRPr lang="en-US" sz="950" dirty="0"/>
           </a:p>
@@ -1984,7 +2000,7 @@
                 <a:ea typeface="Nanum Gothic" pitchFamily="34" charset="-122"/>
                 <a:cs typeface="Nanum Gothic" pitchFamily="34" charset="-120"/>
               </a:rPr>
-              <a:t>RAILPOOL AI</a:t>
+              <a:t>코레일 플러스 물류</a:t>
             </a:r>
             <a:endParaRPr lang="en-US" sz="3400" dirty="0"/>
           </a:p>
@@ -2025,7 +2041,7 @@
                 <a:ea typeface="Nanum Gothic" pitchFamily="34" charset="-122"/>
                 <a:cs typeface="Nanum Gothic" pitchFamily="34" charset="-120"/>
               </a:rPr>
-              <a:t>레일물류</a:t>
+              <a:t>KORAIL PLUS LOGISTICS</a:t>
             </a:r>
             <a:endParaRPr lang="en-US" sz="2000" dirty="0"/>
           </a:p>
@@ -2066,7 +2082,8 @@
                 <a:ea typeface="Nanum Gothic" pitchFamily="34" charset="-122"/>
                 <a:cs typeface="Nanum Gothic" pitchFamily="34" charset="-120"/>
               </a:rPr>
-              <a:t>철도가 성립하는 조건을</a:t>
+              <a:t>우리가 화주에게
+다가갑니다</a:t>
             </a:r>
             <a:endParaRPr lang="en-US" sz="2300" dirty="0"/>
           </a:p>
@@ -2074,17 +2091,6 @@
             <a:pPr indent="0" marL="0">
               <a:buNone/>
             </a:pPr>
-            <a:r>
-              <a:rPr lang="en-US" sz="2300" b="1" dirty="0">
-                <a:solidFill>
-                  <a:srgbClr val="FFFFFF"/>
-                </a:solidFill>
-                <a:latin typeface="Nanum Gothic" pitchFamily="34" charset="0"/>
-                <a:ea typeface="Nanum Gothic" pitchFamily="34" charset="-122"/>
-                <a:cs typeface="Nanum Gothic" pitchFamily="34" charset="-120"/>
-              </a:rPr>
-              <a:t>AI가 먼저 역제안합니다</a:t>
-            </a:r>
             <a:endParaRPr lang="en-US" sz="2300" dirty="0"/>
           </a:p>
         </p:txBody>
@@ -2127,7 +2133,8 @@
                 <a:ea typeface="Nanum Gothic" pitchFamily="34" charset="-122"/>
                 <a:cs typeface="Nanum Gothic" pitchFamily="34" charset="-120"/>
               </a:rPr>
-              <a:t>흩어진 소량 화물과 기존 정기열차를 연결해</a:t>
+              <a:t>화주가 철도를 찾아 헤매지 않도록,
+코레일이 먼저 가능한 운송 조건을 설계하고 제안합니다.</a:t>
             </a:r>
             <a:endParaRPr lang="en-US" sz="1120" dirty="0"/>
           </a:p>
@@ -2138,414 +2145,7 @@
               </a:lnSpc>
               <a:buNone/>
             </a:pPr>
-            <a:r>
-              <a:rPr lang="en-US" sz="1120" dirty="0">
-                <a:solidFill>
-                  <a:srgbClr val="C8D7EA"/>
-                </a:solidFill>
-                <a:latin typeface="Nanum Gothic" pitchFamily="34" charset="0"/>
-                <a:ea typeface="Nanum Gothic" pitchFamily="34" charset="-122"/>
-                <a:cs typeface="Nanum Gothic" pitchFamily="34" charset="-120"/>
-              </a:rPr>
-              <a:t>비용·시간·탄소의 교환조건을 투명하게 보여주는 화주용 서비스</a:t>
-            </a:r>
             <a:endParaRPr lang="en-US" sz="1120" dirty="0"/>
-          </a:p>
-        </p:txBody>
-      </p:sp>
-      <p:sp>
-        <p:nvSpPr>
-          <p:cNvPr id="11" name="Shape 9"/>
-          <p:cNvSpPr/>
-          <p:nvPr/>
-        </p:nvSpPr>
-        <p:spPr>
-          <a:xfrm>
-            <a:off x="548640" y="4828032"/>
-            <a:ext cx="4498848" cy="1243584"/>
-          </a:xfrm>
-          <a:prstGeom prst="roundRect">
-            <a:avLst>
-              <a:gd name="adj" fmla="val 5882"/>
-            </a:avLst>
-          </a:prstGeom>
-          <a:solidFill>
-            <a:srgbClr val="102B4F"/>
-          </a:solidFill>
-          <a:ln w="10160">
-            <a:solidFill>
-              <a:srgbClr val="234263"/>
-            </a:solidFill>
-            <a:prstDash val="solid"/>
-          </a:ln>
-        </p:spPr>
-      </p:sp>
-      <p:sp>
-        <p:nvSpPr>
-          <p:cNvPr id="12" name="Text 10"/>
-          <p:cNvSpPr/>
-          <p:nvPr/>
-        </p:nvSpPr>
-        <p:spPr>
-          <a:xfrm>
-            <a:off x="749808" y="5010912"/>
-            <a:ext cx="731520" cy="182880"/>
-          </a:xfrm>
-          <a:prstGeom prst="rect">
-            <a:avLst/>
-          </a:prstGeom>
-          <a:noFill/>
-          <a:ln/>
-        </p:spPr>
-        <p:txBody>
-          <a:bodyPr wrap="square" lIns="0" tIns="0" rIns="0" bIns="0" rtlCol="0" anchor="ctr">
-            <a:normAutofit/>
-          </a:bodyPr>
-          <a:lstStyle/>
-          <a:p>
-            <a:pPr indent="0" marL="0">
-              <a:buNone/>
-            </a:pPr>
-            <a:r>
-              <a:rPr lang="en-US" sz="840" b="1" dirty="0">
-                <a:solidFill>
-                  <a:srgbClr val="86B7FF"/>
-                </a:solidFill>
-                <a:latin typeface="Nanum Gothic" pitchFamily="34" charset="0"/>
-                <a:ea typeface="Nanum Gothic" pitchFamily="34" charset="-122"/>
-                <a:cs typeface="Nanum Gothic" pitchFamily="34" charset="-120"/>
-              </a:rPr>
-              <a:t>도전 그룹</a:t>
-            </a:r>
-            <a:endParaRPr lang="en-US" sz="840" dirty="0"/>
-          </a:p>
-        </p:txBody>
-      </p:sp>
-      <p:sp>
-        <p:nvSpPr>
-          <p:cNvPr id="13" name="Text 11"/>
-          <p:cNvSpPr/>
-          <p:nvPr/>
-        </p:nvSpPr>
-        <p:spPr>
-          <a:xfrm>
-            <a:off x="1572768" y="4983480"/>
-            <a:ext cx="1280160" cy="228600"/>
-          </a:xfrm>
-          <a:prstGeom prst="rect">
-            <a:avLst/>
-          </a:prstGeom>
-          <a:noFill/>
-          <a:ln/>
-        </p:spPr>
-        <p:txBody>
-          <a:bodyPr wrap="square" lIns="0" tIns="0" rIns="0" bIns="0" rtlCol="0" anchor="ctr">
-            <a:normAutofit/>
-          </a:bodyPr>
-          <a:lstStyle/>
-          <a:p>
-            <a:pPr indent="0" marL="0">
-              <a:buNone/>
-            </a:pPr>
-            <a:r>
-              <a:rPr lang="en-US" sz="1050" b="1" dirty="0">
-                <a:solidFill>
-                  <a:srgbClr val="FFFFFF"/>
-                </a:solidFill>
-                <a:latin typeface="Nanum Gothic" pitchFamily="34" charset="0"/>
-                <a:ea typeface="Nanum Gothic" pitchFamily="34" charset="-122"/>
-                <a:cs typeface="Nanum Gothic" pitchFamily="34" charset="-120"/>
-              </a:rPr>
-              <a:t>한국철도공사</a:t>
-            </a:r>
-            <a:endParaRPr lang="en-US" sz="1050" dirty="0"/>
-          </a:p>
-        </p:txBody>
-      </p:sp>
-      <p:sp>
-        <p:nvSpPr>
-          <p:cNvPr id="14" name="Text 12"/>
-          <p:cNvSpPr/>
-          <p:nvPr/>
-        </p:nvSpPr>
-        <p:spPr>
-          <a:xfrm>
-            <a:off x="2962656" y="5010912"/>
-            <a:ext cx="438912" cy="182880"/>
-          </a:xfrm>
-          <a:prstGeom prst="rect">
-            <a:avLst/>
-          </a:prstGeom>
-          <a:noFill/>
-          <a:ln/>
-        </p:spPr>
-        <p:txBody>
-          <a:bodyPr wrap="square" lIns="0" tIns="0" rIns="0" bIns="0" rtlCol="0" anchor="ctr">
-            <a:normAutofit/>
-          </a:bodyPr>
-          <a:lstStyle/>
-          <a:p>
-            <a:pPr indent="0" marL="0">
-              <a:buNone/>
-            </a:pPr>
-            <a:r>
-              <a:rPr lang="en-US" sz="840" b="1" dirty="0">
-                <a:solidFill>
-                  <a:srgbClr val="86B7FF"/>
-                </a:solidFill>
-                <a:latin typeface="Nanum Gothic" pitchFamily="34" charset="0"/>
-                <a:ea typeface="Nanum Gothic" pitchFamily="34" charset="-122"/>
-                <a:cs typeface="Nanum Gothic" pitchFamily="34" charset="-120"/>
-              </a:rPr>
-              <a:t>팀명</a:t>
-            </a:r>
-            <a:endParaRPr lang="en-US" sz="840" dirty="0"/>
-          </a:p>
-        </p:txBody>
-      </p:sp>
-      <p:sp>
-        <p:nvSpPr>
-          <p:cNvPr id="15" name="Text 13"/>
-          <p:cNvSpPr/>
-          <p:nvPr/>
-        </p:nvSpPr>
-        <p:spPr>
-          <a:xfrm>
-            <a:off x="3456432" y="4983480"/>
-            <a:ext cx="1371600" cy="228600"/>
-          </a:xfrm>
-          <a:prstGeom prst="rect">
-            <a:avLst/>
-          </a:prstGeom>
-          <a:noFill/>
-          <a:ln/>
-        </p:spPr>
-        <p:txBody>
-          <a:bodyPr wrap="square" lIns="0" tIns="0" rIns="0" bIns="0" rtlCol="0" anchor="ctr">
-            <a:normAutofit/>
-          </a:bodyPr>
-          <a:lstStyle/>
-          <a:p>
-            <a:pPr indent="0" marL="0">
-              <a:buNone/>
-            </a:pPr>
-            <a:r>
-              <a:rPr lang="en-US" sz="1010" b="1" dirty="0">
-                <a:solidFill>
-                  <a:srgbClr val="FFFFFF"/>
-                </a:solidFill>
-                <a:latin typeface="Nanum Gothic" pitchFamily="34" charset="0"/>
-                <a:ea typeface="Nanum Gothic" pitchFamily="34" charset="-122"/>
-                <a:cs typeface="Nanum Gothic" pitchFamily="34" charset="-120"/>
-              </a:rPr>
-              <a:t>Galaxy Express 99</a:t>
-            </a:r>
-            <a:endParaRPr lang="en-US" sz="1010" dirty="0"/>
-          </a:p>
-        </p:txBody>
-      </p:sp>
-      <p:sp>
-        <p:nvSpPr>
-          <p:cNvPr id="16" name="Text 14"/>
-          <p:cNvSpPr/>
-          <p:nvPr/>
-        </p:nvSpPr>
-        <p:spPr>
-          <a:xfrm>
-            <a:off x="749808" y="5413248"/>
-            <a:ext cx="731520" cy="182880"/>
-          </a:xfrm>
-          <a:prstGeom prst="rect">
-            <a:avLst/>
-          </a:prstGeom>
-          <a:noFill/>
-          <a:ln/>
-        </p:spPr>
-        <p:txBody>
-          <a:bodyPr wrap="square" lIns="0" tIns="0" rIns="0" bIns="0" rtlCol="0" anchor="ctr">
-            <a:normAutofit/>
-          </a:bodyPr>
-          <a:lstStyle/>
-          <a:p>
-            <a:pPr indent="0" marL="0">
-              <a:buNone/>
-            </a:pPr>
-            <a:r>
-              <a:rPr lang="en-US" sz="840" b="1" dirty="0">
-                <a:solidFill>
-                  <a:srgbClr val="86B7FF"/>
-                </a:solidFill>
-                <a:latin typeface="Nanum Gothic" pitchFamily="34" charset="0"/>
-                <a:ea typeface="Nanum Gothic" pitchFamily="34" charset="-122"/>
-                <a:cs typeface="Nanum Gothic" pitchFamily="34" charset="-120"/>
-              </a:rPr>
-              <a:t>팀원·역할</a:t>
-            </a:r>
-            <a:endParaRPr lang="en-US" sz="840" dirty="0"/>
-          </a:p>
-        </p:txBody>
-      </p:sp>
-      <p:sp>
-        <p:nvSpPr>
-          <p:cNvPr id="17" name="Text 15"/>
-          <p:cNvSpPr/>
-          <p:nvPr/>
-        </p:nvSpPr>
-        <p:spPr>
-          <a:xfrm>
-            <a:off x="1572768" y="5385816"/>
-            <a:ext cx="3273552" cy="237744"/>
-          </a:xfrm>
-          <a:prstGeom prst="rect">
-            <a:avLst/>
-          </a:prstGeom>
-          <a:noFill/>
-          <a:ln/>
-        </p:spPr>
-        <p:txBody>
-          <a:bodyPr wrap="square" lIns="0" tIns="0" rIns="0" bIns="0" rtlCol="0" anchor="ctr">
-            <a:normAutofit/>
-          </a:bodyPr>
-          <a:lstStyle/>
-          <a:p>
-            <a:pPr indent="0" marL="0">
-              <a:buNone/>
-            </a:pPr>
-            <a:r>
-              <a:rPr lang="en-US" sz="880" dirty="0">
-                <a:solidFill>
-                  <a:srgbClr val="FFFFFF"/>
-                </a:solidFill>
-                <a:latin typeface="Nanum Gothic" pitchFamily="34" charset="0"/>
-                <a:ea typeface="Nanum Gothic" pitchFamily="34" charset="-122"/>
-                <a:cs typeface="Nanum Gothic" pitchFamily="34" charset="-120"/>
-              </a:rPr>
-              <a:t>프로젝트팀 · 서비스 기획/UX · AI/Backend · Frontend/QA</a:t>
-            </a:r>
-            <a:endParaRPr lang="en-US" sz="880" dirty="0"/>
-          </a:p>
-        </p:txBody>
-      </p:sp>
-      <p:sp>
-        <p:nvSpPr>
-          <p:cNvPr id="18" name="Text 16"/>
-          <p:cNvSpPr/>
-          <p:nvPr/>
-        </p:nvSpPr>
-        <p:spPr>
-          <a:xfrm>
-            <a:off x="749808" y="5788152"/>
-            <a:ext cx="731520" cy="164592"/>
-          </a:xfrm>
-          <a:prstGeom prst="rect">
-            <a:avLst/>
-          </a:prstGeom>
-          <a:noFill/>
-          <a:ln/>
-        </p:spPr>
-        <p:txBody>
-          <a:bodyPr wrap="square" lIns="0" tIns="0" rIns="0" bIns="0" rtlCol="0" anchor="ctr">
-            <a:normAutofit/>
-          </a:bodyPr>
-          <a:lstStyle/>
-          <a:p>
-            <a:pPr indent="0" marL="0">
-              <a:buNone/>
-            </a:pPr>
-            <a:r>
-              <a:rPr lang="en-US" sz="840" b="1" dirty="0">
-                <a:solidFill>
-                  <a:srgbClr val="86B7FF"/>
-                </a:solidFill>
-                <a:latin typeface="Nanum Gothic" pitchFamily="34" charset="0"/>
-                <a:ea typeface="Nanum Gothic" pitchFamily="34" charset="-122"/>
-                <a:cs typeface="Nanum Gothic" pitchFamily="34" charset="-120"/>
-              </a:rPr>
-              <a:t>작성일</a:t>
-            </a:r>
-            <a:endParaRPr lang="en-US" sz="840" dirty="0"/>
-          </a:p>
-        </p:txBody>
-      </p:sp>
-      <p:sp>
-        <p:nvSpPr>
-          <p:cNvPr id="19" name="Text 17"/>
-          <p:cNvSpPr/>
-          <p:nvPr/>
-        </p:nvSpPr>
-        <p:spPr>
-          <a:xfrm>
-            <a:off x="1572768" y="5751576"/>
-            <a:ext cx="1097280" cy="219456"/>
-          </a:xfrm>
-          <a:prstGeom prst="rect">
-            <a:avLst/>
-          </a:prstGeom>
-          <a:noFill/>
-          <a:ln/>
-        </p:spPr>
-        <p:txBody>
-          <a:bodyPr wrap="square" lIns="0" tIns="0" rIns="0" bIns="0" rtlCol="0" anchor="ctr">
-            <a:normAutofit/>
-          </a:bodyPr>
-          <a:lstStyle/>
-          <a:p>
-            <a:pPr indent="0" marL="0">
-              <a:buNone/>
-            </a:pPr>
-            <a:r>
-              <a:rPr lang="en-US" sz="950" dirty="0">
-                <a:solidFill>
-                  <a:srgbClr val="FFFFFF"/>
-                </a:solidFill>
-                <a:latin typeface="Nanum Gothic" pitchFamily="34" charset="0"/>
-                <a:ea typeface="Nanum Gothic" pitchFamily="34" charset="-122"/>
-                <a:cs typeface="Nanum Gothic" pitchFamily="34" charset="-120"/>
-              </a:rPr>
-              <a:t>2026. 08. 13</a:t>
-            </a:r>
-            <a:endParaRPr lang="en-US" sz="950" dirty="0"/>
-          </a:p>
-        </p:txBody>
-      </p:sp>
-      <p:sp>
-        <p:nvSpPr>
-          <p:cNvPr id="20" name="Text 18"/>
-          <p:cNvSpPr/>
-          <p:nvPr/>
-        </p:nvSpPr>
-        <p:spPr>
-          <a:xfrm>
-            <a:off x="3236976" y="5751576"/>
-            <a:ext cx="1572768" cy="219456"/>
-          </a:xfrm>
-          <a:prstGeom prst="rect">
-            <a:avLst/>
-          </a:prstGeom>
-          <a:noFill/>
-          <a:ln/>
-        </p:spPr>
-        <p:txBody>
-          <a:bodyPr wrap="square" lIns="0" tIns="0" rIns="0" bIns="0" rtlCol="0" anchor="ctr">
-            <a:normAutofit/>
-          </a:bodyPr>
-          <a:lstStyle/>
-          <a:p>
-            <a:pPr algn="r" indent="0" marL="0">
-              <a:buNone/>
-            </a:pPr>
-            <a:r>
-              <a:rPr lang="en-US" sz="950" b="1" dirty="0">
-                <a:solidFill>
-                  <a:srgbClr val="C8D7EA"/>
-                </a:solidFill>
-                <a:latin typeface="Nanum Gothic" pitchFamily="34" charset="0"/>
-                <a:ea typeface="Nanum Gothic" pitchFamily="34" charset="-122"/>
-                <a:cs typeface="Nanum Gothic" pitchFamily="34" charset="-120"/>
-              </a:rPr>
-              <a:t>본선 제출용 결과보고서</a:t>
-            </a:r>
-            <a:endParaRPr lang="en-US" sz="950" dirty="0"/>
           </a:p>
         </p:txBody>
       </p:sp>
@@ -2582,6 +2182,10 @@
             </a:outerShdw>
           </a:effectLst>
         </p:spPr>
+        <p:txBody>
+          <a:bodyPr/>
+          <a:p/>
+        </p:txBody>
       </p:sp>
       <p:pic>
         <p:nvPicPr>
@@ -2642,7 +2246,7 @@
                 <a:ea typeface="Nanum Gothic" pitchFamily="34" charset="-122"/>
                 <a:cs typeface="Nanum Gothic" pitchFamily="34" charset="-120"/>
               </a:rPr>
-              <a:t>LIVE PROTOTYPE</a:t>
+              <a:t>통합 물류 서비스</a:t>
             </a:r>
             <a:endParaRPr lang="en-US" sz="820" dirty="0"/>
           </a:p>
@@ -7318,6 +6922,10 @@
             <a:prstDash val="solid"/>
           </a:ln>
         </p:spPr>
+        <p:txBody>
+          <a:bodyPr/>
+          <a:p/>
+        </p:txBody>
       </p:sp>
       <p:sp>
         <p:nvSpPr>
@@ -7436,7 +7044,7 @@
                 <a:ea typeface="Nanum Gothic" pitchFamily="34" charset="-122"/>
                 <a:cs typeface="Nanum Gothic" pitchFamily="34" charset="-120"/>
               </a:rPr>
-              <a:t>화주가 원하는 것은 철도 정보가 아니라, 요청한 화물이 실제로 갈 수 있는지에 대한 답입니다.</a:t>
+              <a:t>화주는 문전 운송부터 도착 마감까지, 실제 실행 가능한 하나의 답을 원합니다.</a:t>
             </a:r>
             <a:endParaRPr lang="en-US" sz="950" dirty="0"/>
           </a:p>
@@ -7464,6 +7072,10 @@
             <a:prstDash val="solid"/>
           </a:ln>
         </p:spPr>
+        <p:txBody>
+          <a:bodyPr/>
+          <a:p/>
+        </p:txBody>
       </p:sp>
       <p:sp>
         <p:nvSpPr>
@@ -7491,6 +7103,10 @@
             <a:prstDash val="solid"/>
           </a:ln>
         </p:spPr>
+        <p:txBody>
+          <a:bodyPr/>
+          <a:p/>
+        </p:txBody>
       </p:sp>
       <p:sp>
         <p:nvSpPr>
@@ -7527,7 +7143,7 @@
                 <a:ea typeface="Nanum Gothic" pitchFamily="34" charset="-122"/>
                 <a:cs typeface="Nanum Gothic" pitchFamily="34" charset="-120"/>
               </a:rPr>
-              <a:t>“화물이 없는 것이 아니라, 실제 수송이 성립하는 조건을 찾기 어렵습니다.”</a:t>
+              <a:t>“이용 의향은 있어도 누구에게 무엇을 묻고, 어떤 조건을 바꿔야 하는지 알기 어렵습니다.”</a:t>
             </a:r>
             <a:endParaRPr lang="en-US" sz="1700" dirty="0"/>
           </a:p>
@@ -7566,6 +7182,10 @@
             </a:outerShdw>
           </a:effectLst>
         </p:spPr>
+        <p:txBody>
+          <a:bodyPr/>
+          <a:p/>
+        </p:txBody>
       </p:sp>
       <p:sp>
         <p:nvSpPr>
@@ -7593,6 +7213,10 @@
             <a:prstDash val="solid"/>
           </a:ln>
         </p:spPr>
+        <p:txBody>
+          <a:bodyPr/>
+          <a:p/>
+        </p:txBody>
       </p:sp>
       <p:sp>
         <p:nvSpPr>
@@ -7750,6 +7374,10 @@
             </a:outerShdw>
           </a:effectLst>
         </p:spPr>
+        <p:txBody>
+          <a:bodyPr/>
+          <a:p/>
+        </p:txBody>
       </p:sp>
       <p:sp>
         <p:nvSpPr>
@@ -7777,6 +7405,10 @@
             <a:prstDash val="solid"/>
           </a:ln>
         </p:spPr>
+        <p:txBody>
+          <a:bodyPr/>
+          <a:p/>
+        </p:txBody>
       </p:sp>
       <p:sp>
         <p:nvSpPr>
@@ -7934,6 +7566,10 @@
             </a:outerShdw>
           </a:effectLst>
         </p:spPr>
+        <p:txBody>
+          <a:bodyPr/>
+          <a:p/>
+        </p:txBody>
       </p:sp>
       <p:sp>
         <p:nvSpPr>
@@ -7961,6 +7597,10 @@
             <a:prstDash val="solid"/>
           </a:ln>
         </p:spPr>
+        <p:txBody>
+          <a:bodyPr/>
+          <a:p/>
+        </p:txBody>
       </p:sp>
       <p:sp>
         <p:nvSpPr>
@@ -8150,6 +7790,10 @@
             <a:prstDash val="solid"/>
           </a:ln>
         </p:spPr>
+        <p:txBody>
+          <a:bodyPr/>
+          <a:p/>
+        </p:txBody>
       </p:sp>
       <p:sp>
         <p:nvSpPr>
@@ -8298,6 +7942,10 @@
             <a:prstDash val="solid"/>
           </a:ln>
         </p:spPr>
+        <p:txBody>
+          <a:bodyPr/>
+          <a:p/>
+        </p:txBody>
       </p:sp>
       <p:sp>
         <p:nvSpPr>
@@ -8446,6 +8094,10 @@
             <a:prstDash val="solid"/>
           </a:ln>
         </p:spPr>
+        <p:txBody>
+          <a:bodyPr/>
+          <a:p/>
+        </p:txBody>
       </p:sp>
       <p:sp>
         <p:nvSpPr>
@@ -8594,6 +8246,10 @@
             <a:prstDash val="solid"/>
           </a:ln>
         </p:spPr>
+        <p:txBody>
+          <a:bodyPr/>
+          <a:p/>
+        </p:txBody>
       </p:sp>
       <p:sp>
         <p:nvSpPr>
@@ -8742,6 +8398,10 @@
             <a:prstDash val="solid"/>
           </a:ln>
         </p:spPr>
+        <p:txBody>
+          <a:bodyPr/>
+          <a:p/>
+        </p:txBody>
       </p:sp>
       <p:sp>
         <p:nvSpPr>
@@ -8848,6 +8508,10 @@
             <a:tailEnd type="triangle"/>
           </a:ln>
         </p:spPr>
+        <p:txBody>
+          <a:bodyPr/>
+          <a:p/>
+        </p:txBody>
       </p:sp>
       <p:sp>
         <p:nvSpPr>
@@ -8875,6 +8539,10 @@
             <a:prstDash val="solid"/>
           </a:ln>
         </p:spPr>
+        <p:txBody>
+          <a:bodyPr/>
+          <a:p/>
+        </p:txBody>
       </p:sp>
       <p:sp>
         <p:nvSpPr>
@@ -9025,6 +8693,10 @@
             <a:prstDash val="solid"/>
           </a:ln>
         </p:spPr>
+        <p:txBody>
+          <a:bodyPr/>
+          <a:p/>
+        </p:txBody>
       </p:sp>
       <p:sp>
         <p:nvSpPr>
@@ -9130,6 +8802,10 @@
             <a:prstDash val="solid"/>
           </a:ln>
         </p:spPr>
+        <p:txBody>
+          <a:bodyPr/>
+          <a:p/>
+        </p:txBody>
       </p:sp>
       <p:sp>
         <p:nvSpPr>
@@ -9264,6 +8940,10 @@
             <a:prstDash val="solid"/>
           </a:ln>
         </p:spPr>
+        <p:txBody>
+          <a:bodyPr/>
+          <a:p/>
+        </p:txBody>
       </p:sp>
       <p:sp>
         <p:nvSpPr>
@@ -9341,7 +9021,7 @@
                 <a:ea typeface="Nanum Gothic" pitchFamily="34" charset="-122"/>
                 <a:cs typeface="Nanum Gothic" pitchFamily="34" charset="-120"/>
               </a:rPr>
-              <a:t>아이템 개요</a:t>
+              <a:t>해결책 · 코레일 플러스 물류</a:t>
             </a:r>
             <a:endParaRPr lang="en-US" sz="2400" dirty="0"/>
           </a:p>
@@ -9382,7 +9062,7 @@
                 <a:ea typeface="Nanum Gothic" pitchFamily="34" charset="-122"/>
                 <a:cs typeface="Nanum Gothic" pitchFamily="34" charset="-120"/>
               </a:rPr>
-              <a:t>철도를 안내하는 앱이 아니라, 화주 조건을 실행 가능한 검토안으로 바꾸는 의사결정 서비스입니다.</a:t>
+              <a:t>탐색·비교·공동수송·검토 요청을 하나로 잇는 화주 중심 통합 서비스입니다.</a:t>
             </a:r>
             <a:endParaRPr lang="en-US" sz="950" dirty="0"/>
           </a:p>
@@ -9410,6 +9090,10 @@
             <a:prstDash val="solid"/>
           </a:ln>
         </p:spPr>
+        <p:txBody>
+          <a:bodyPr/>
+          <a:p/>
+        </p:txBody>
       </p:sp>
       <p:sp>
         <p:nvSpPr>
@@ -9437,6 +9121,10 @@
             <a:prstDash val="solid"/>
           </a:ln>
         </p:spPr>
+        <p:txBody>
+          <a:bodyPr/>
+          <a:p/>
+        </p:txBody>
       </p:sp>
       <p:sp>
         <p:nvSpPr>
@@ -9473,7 +9161,8 @@
                 <a:ea typeface="Nanum Gothic" pitchFamily="34" charset="-122"/>
                 <a:cs typeface="Nanum Gothic" pitchFamily="34" charset="-120"/>
               </a:rPr>
-              <a:t>철도로 갈 수 있는 조건을 먼저 만들고,</a:t>
+              <a:t>화주가 찾아오는 물류가 아니라,
+코레일이 가능한 조건을 만들어 먼저 제안하는 통합 서비스</a:t>
             </a:r>
             <a:endParaRPr lang="en-US" sz="1520" dirty="0"/>
           </a:p>
@@ -9481,17 +9170,6 @@
             <a:pPr indent="0" marL="0">
               <a:buNone/>
             </a:pPr>
-            <a:r>
-              <a:rPr lang="en-US" sz="1520" b="1" dirty="0">
-                <a:solidFill>
-                  <a:srgbClr val="FFFFFF"/>
-                </a:solidFill>
-                <a:latin typeface="Nanum Gothic" pitchFamily="34" charset="0"/>
-                <a:ea typeface="Nanum Gothic" pitchFamily="34" charset="-122"/>
-                <a:cs typeface="Nanum Gothic" pitchFamily="34" charset="-120"/>
-              </a:rPr>
-              <a:t>사용자와 코레일이 함께 확정하는 화물 운송 설계 서비스</a:t>
-            </a:r>
             <a:endParaRPr lang="en-US" sz="1520" dirty="0"/>
           </a:p>
         </p:txBody>
@@ -9522,6 +9200,10 @@
             <a:prstDash val="solid"/>
           </a:ln>
         </p:spPr>
+        <p:txBody>
+          <a:bodyPr/>
+          <a:p/>
+        </p:txBody>
       </p:sp>
       <p:sp>
         <p:nvSpPr>
@@ -9648,6 +9330,10 @@
             <a:prstDash val="solid"/>
           </a:ln>
         </p:spPr>
+        <p:txBody>
+          <a:bodyPr/>
+          <a:p/>
+        </p:txBody>
       </p:sp>
       <p:sp>
         <p:nvSpPr>
@@ -9774,6 +9460,10 @@
             <a:prstDash val="solid"/>
           </a:ln>
         </p:spPr>
+        <p:txBody>
+          <a:bodyPr/>
+          <a:p/>
+        </p:txBody>
       </p:sp>
       <p:sp>
         <p:nvSpPr>
@@ -9941,6 +9631,10 @@
             <a:prstDash val="solid"/>
           </a:ln>
         </p:spPr>
+        <p:txBody>
+          <a:bodyPr/>
+          <a:p/>
+        </p:txBody>
       </p:sp>
       <p:sp>
         <p:nvSpPr>
@@ -10047,6 +9741,10 @@
             <a:tailEnd type="triangle"/>
           </a:ln>
         </p:spPr>
+        <p:txBody>
+          <a:bodyPr/>
+          <a:p/>
+        </p:txBody>
       </p:sp>
       <p:sp>
         <p:nvSpPr>
@@ -10074,6 +9772,10 @@
             <a:prstDash val="solid"/>
           </a:ln>
         </p:spPr>
+        <p:txBody>
+          <a:bodyPr/>
+          <a:p/>
+        </p:txBody>
       </p:sp>
       <p:sp>
         <p:nvSpPr>
@@ -10180,6 +9882,10 @@
             <a:tailEnd type="triangle"/>
           </a:ln>
         </p:spPr>
+        <p:txBody>
+          <a:bodyPr/>
+          <a:p/>
+        </p:txBody>
       </p:sp>
       <p:sp>
         <p:nvSpPr>
@@ -10207,6 +9913,10 @@
             <a:prstDash val="solid"/>
           </a:ln>
         </p:spPr>
+        <p:txBody>
+          <a:bodyPr/>
+          <a:p/>
+        </p:txBody>
       </p:sp>
       <p:sp>
         <p:nvSpPr>
@@ -10316,6 +10026,10 @@
             <a:prstDash val="solid"/>
           </a:ln>
         </p:spPr>
+        <p:txBody>
+          <a:bodyPr/>
+          <a:p/>
+        </p:txBody>
       </p:sp>
       <p:sp>
         <p:nvSpPr>
@@ -10422,6 +10136,10 @@
             <a:tailEnd type="triangle"/>
           </a:ln>
         </p:spPr>
+        <p:txBody>
+          <a:bodyPr/>
+          <a:p/>
+        </p:txBody>
       </p:sp>
       <p:sp>
         <p:nvSpPr>
@@ -10449,6 +10167,10 @@
             <a:prstDash val="solid"/>
           </a:ln>
         </p:spPr>
+        <p:txBody>
+          <a:bodyPr/>
+          <a:p/>
+        </p:txBody>
       </p:sp>
       <p:sp>
         <p:nvSpPr>
@@ -10555,6 +10277,10 @@
             <a:tailEnd type="triangle"/>
           </a:ln>
         </p:spPr>
+        <p:txBody>
+          <a:bodyPr/>
+          <a:p/>
+        </p:txBody>
       </p:sp>
       <p:sp>
         <p:nvSpPr>
@@ -10582,6 +10308,10 @@
             <a:prstDash val="solid"/>
           </a:ln>
         </p:spPr>
+        <p:txBody>
+          <a:bodyPr/>
+          <a:p/>
+        </p:txBody>
       </p:sp>
       <p:sp>
         <p:nvSpPr>
@@ -10691,6 +10421,10 @@
             <a:prstDash val="solid"/>
           </a:ln>
         </p:spPr>
+        <p:txBody>
+          <a:bodyPr/>
+          <a:p/>
+        </p:txBody>
       </p:sp>
       <p:sp>
         <p:nvSpPr>
@@ -10766,6 +10500,10 @@
             </a:outerShdw>
           </a:effectLst>
         </p:spPr>
+        <p:txBody>
+          <a:bodyPr/>
+          <a:p/>
+        </p:txBody>
       </p:sp>
       <p:pic>
         <p:nvPicPr>
@@ -10817,6 +10555,10 @@
             <a:prstDash val="solid"/>
           </a:ln>
         </p:spPr>
+        <p:txBody>
+          <a:bodyPr/>
+          <a:p/>
+        </p:txBody>
       </p:sp>
       <p:sp>
         <p:nvSpPr>
@@ -10881,6 +10623,10 @@
             <a:prstDash val="solid"/>
           </a:ln>
         </p:spPr>
+        <p:txBody>
+          <a:bodyPr/>
+          <a:p/>
+        </p:txBody>
       </p:sp>
       <p:sp>
         <p:nvSpPr>

--- a/RAILPOOL_AI_최종결과보고서_RailFit내용반영본_편집본.pptx
+++ b/RAILPOOL_AI_최종결과보고서_RailFit내용반영본_편집본.pptx
@@ -2303,6 +2303,10 @@
             <a:prstDash val="solid"/>
           </a:ln>
         </p:spPr>
+        <p:txBody>
+          <a:bodyPr/>
+          <a:p/>
+        </p:txBody>
       </p:sp>
       <p:sp>
         <p:nvSpPr>
@@ -2449,6 +2453,10 @@
             <a:prstDash val="solid"/>
           </a:ln>
         </p:spPr>
+        <p:txBody>
+          <a:bodyPr/>
+          <a:p/>
+        </p:txBody>
       </p:sp>
       <p:sp>
         <p:nvSpPr>
@@ -2476,6 +2484,10 @@
             <a:prstDash val="solid"/>
           </a:ln>
         </p:spPr>
+        <p:txBody>
+          <a:bodyPr/>
+          <a:p/>
+        </p:txBody>
       </p:sp>
       <p:sp>
         <p:nvSpPr>
@@ -2585,6 +2597,10 @@
             <a:prstDash val="solid"/>
           </a:ln>
         </p:spPr>
+        <p:txBody>
+          <a:bodyPr/>
+          <a:p/>
+        </p:txBody>
       </p:sp>
       <p:sp>
         <p:nvSpPr>
@@ -2735,6 +2751,10 @@
             <a:prstDash val="solid"/>
           </a:ln>
         </p:spPr>
+        <p:txBody>
+          <a:bodyPr/>
+          <a:p/>
+        </p:txBody>
       </p:sp>
       <p:sp>
         <p:nvSpPr>
@@ -2885,6 +2905,10 @@
             <a:prstDash val="solid"/>
           </a:ln>
         </p:spPr>
+        <p:txBody>
+          <a:bodyPr/>
+          <a:p/>
+        </p:txBody>
       </p:sp>
       <p:sp>
         <p:nvSpPr>
@@ -3035,6 +3059,10 @@
             <a:prstDash val="solid"/>
           </a:ln>
         </p:spPr>
+        <p:txBody>
+          <a:bodyPr/>
+          <a:p/>
+        </p:txBody>
       </p:sp>
       <p:sp>
         <p:nvSpPr>
@@ -3185,6 +3213,10 @@
             <a:prstDash val="solid"/>
           </a:ln>
         </p:spPr>
+        <p:txBody>
+          <a:bodyPr/>
+          <a:p/>
+        </p:txBody>
       </p:sp>
       <p:sp>
         <p:nvSpPr>
@@ -3335,6 +3367,10 @@
             <a:prstDash val="solid"/>
           </a:ln>
         </p:spPr>
+        <p:txBody>
+          <a:bodyPr/>
+          <a:p/>
+        </p:txBody>
       </p:sp>
       <p:sp>
         <p:nvSpPr>
@@ -3403,6 +3439,10 @@
             <a:prstDash val="solid"/>
           </a:ln>
         </p:spPr>
+        <p:txBody>
+          <a:bodyPr/>
+          <a:p/>
+        </p:txBody>
       </p:sp>
       <p:sp>
         <p:nvSpPr>
@@ -3471,6 +3511,10 @@
             <a:prstDash val="solid"/>
           </a:ln>
         </p:spPr>
+        <p:txBody>
+          <a:bodyPr/>
+          <a:p/>
+        </p:txBody>
       </p:sp>
       <p:sp>
         <p:nvSpPr>
@@ -3580,6 +3624,10 @@
             <a:prstDash val="solid"/>
           </a:ln>
         </p:spPr>
+        <p:txBody>
+          <a:bodyPr/>
+          <a:p/>
+        </p:txBody>
       </p:sp>
       <p:sp>
         <p:nvSpPr>
@@ -3689,6 +3737,10 @@
             <a:prstDash val="solid"/>
           </a:ln>
         </p:spPr>
+        <p:txBody>
+          <a:bodyPr/>
+          <a:p/>
+        </p:txBody>
       </p:sp>
       <p:sp>
         <p:nvSpPr>
@@ -3798,6 +3850,10 @@
             <a:prstDash val="solid"/>
           </a:ln>
         </p:spPr>
+        <p:txBody>
+          <a:bodyPr/>
+          <a:p/>
+        </p:txBody>
       </p:sp>
       <p:sp>
         <p:nvSpPr>
@@ -3907,6 +3963,10 @@
             <a:prstDash val="solid"/>
           </a:ln>
         </p:spPr>
+        <p:txBody>
+          <a:bodyPr/>
+          <a:p/>
+        </p:txBody>
       </p:sp>
       <p:sp>
         <p:nvSpPr>
@@ -3975,6 +4035,10 @@
             <a:prstDash val="solid"/>
           </a:ln>
         </p:spPr>
+        <p:txBody>
+          <a:bodyPr/>
+          <a:p/>
+        </p:txBody>
       </p:sp>
       <p:sp>
         <p:nvSpPr>
@@ -4125,6 +4189,10 @@
             <a:prstDash val="solid"/>
           </a:ln>
         </p:spPr>
+        <p:txBody>
+          <a:bodyPr/>
+          <a:p/>
+        </p:txBody>
       </p:sp>
       <p:sp>
         <p:nvSpPr>
@@ -4275,6 +4343,10 @@
             <a:prstDash val="solid"/>
           </a:ln>
         </p:spPr>
+        <p:txBody>
+          <a:bodyPr/>
+          <a:p/>
+        </p:txBody>
       </p:sp>
       <p:sp>
         <p:nvSpPr>
@@ -4425,6 +4497,10 @@
             <a:prstDash val="solid"/>
           </a:ln>
         </p:spPr>
+        <p:txBody>
+          <a:bodyPr/>
+          <a:p/>
+        </p:txBody>
       </p:sp>
       <p:sp>
         <p:nvSpPr>
@@ -4530,6 +4606,10 @@
             <a:prstDash val="solid"/>
           </a:ln>
         </p:spPr>
+        <p:txBody>
+          <a:bodyPr/>
+          <a:p/>
+        </p:txBody>
       </p:sp>
       <p:sp>
         <p:nvSpPr>
@@ -4566,7 +4646,7 @@
                 <a:ea typeface="Nanum Gothic" pitchFamily="34" charset="-122"/>
                 <a:cs typeface="Nanum Gothic" pitchFamily="34" charset="-120"/>
               </a:rPr>
-              <a:t>MOVE AI CHALLENGE 2026 · RAILPOOL AI</a:t>
+              <a:t>MOVE AI CHALLENGE 2026 · 레일 물류</a:t>
             </a:r>
             <a:endParaRPr lang="en-US" sz="750" dirty="0"/>
           </a:p>
@@ -4664,6 +4744,10 @@
             <a:prstDash val="solid"/>
           </a:ln>
         </p:spPr>
+        <p:txBody>
+          <a:bodyPr/>
+          <a:p/>
+        </p:txBody>
       </p:sp>
       <p:sp>
         <p:nvSpPr>
@@ -4810,6 +4894,10 @@
             <a:prstDash val="solid"/>
           </a:ln>
         </p:spPr>
+        <p:txBody>
+          <a:bodyPr/>
+          <a:p/>
+        </p:txBody>
       </p:sp>
       <p:sp>
         <p:nvSpPr>
@@ -4874,6 +4962,10 @@
             <a:prstDash val="solid"/>
           </a:ln>
         </p:spPr>
+        <p:txBody>
+          <a:bodyPr/>
+          <a:p/>
+        </p:txBody>
       </p:sp>
       <p:sp>
         <p:nvSpPr>
@@ -4899,6 +4991,10 @@
             <a:prstDash val="solid"/>
           </a:ln>
         </p:spPr>
+        <p:txBody>
+          <a:bodyPr/>
+          <a:p/>
+        </p:txBody>
       </p:sp>
       <p:sp>
         <p:nvSpPr>
@@ -5047,6 +5143,10 @@
             <a:prstDash val="solid"/>
           </a:ln>
         </p:spPr>
+        <p:txBody>
+          <a:bodyPr/>
+          <a:p/>
+        </p:txBody>
       </p:sp>
       <p:sp>
         <p:nvSpPr>
@@ -5195,6 +5295,10 @@
             <a:prstDash val="solid"/>
           </a:ln>
         </p:spPr>
+        <p:txBody>
+          <a:bodyPr/>
+          <a:p/>
+        </p:txBody>
       </p:sp>
       <p:sp>
         <p:nvSpPr>
@@ -5343,6 +5447,10 @@
             <a:prstDash val="solid"/>
           </a:ln>
         </p:spPr>
+        <p:txBody>
+          <a:bodyPr/>
+          <a:p/>
+        </p:txBody>
       </p:sp>
       <p:sp>
         <p:nvSpPr>
@@ -5491,6 +5599,10 @@
             <a:prstDash val="solid"/>
           </a:ln>
         </p:spPr>
+        <p:txBody>
+          <a:bodyPr/>
+          <a:p/>
+        </p:txBody>
       </p:sp>
       <p:sp>
         <p:nvSpPr>
@@ -5639,6 +5751,10 @@
             <a:prstDash val="solid"/>
           </a:ln>
         </p:spPr>
+        <p:txBody>
+          <a:bodyPr/>
+          <a:p/>
+        </p:txBody>
       </p:sp>
       <p:sp>
         <p:nvSpPr>
@@ -5787,6 +5903,10 @@
             <a:prstDash val="solid"/>
           </a:ln>
         </p:spPr>
+        <p:txBody>
+          <a:bodyPr/>
+          <a:p/>
+        </p:txBody>
       </p:sp>
       <p:sp>
         <p:nvSpPr>
@@ -5937,6 +6057,10 @@
             <a:prstDash val="solid"/>
           </a:ln>
         </p:spPr>
+        <p:txBody>
+          <a:bodyPr/>
+          <a:p/>
+        </p:txBody>
       </p:sp>
       <p:sp>
         <p:nvSpPr>
@@ -6003,6 +6127,10 @@
             <a:prstDash val="solid"/>
           </a:ln>
         </p:spPr>
+        <p:txBody>
+          <a:bodyPr/>
+          <a:p/>
+        </p:txBody>
       </p:sp>
       <p:sp>
         <p:nvSpPr>
@@ -6110,6 +6238,10 @@
             <a:prstDash val="solid"/>
           </a:ln>
         </p:spPr>
+        <p:txBody>
+          <a:bodyPr/>
+          <a:p/>
+        </p:txBody>
       </p:sp>
       <p:sp>
         <p:nvSpPr>
@@ -6217,6 +6349,10 @@
             <a:prstDash val="solid"/>
           </a:ln>
         </p:spPr>
+        <p:txBody>
+          <a:bodyPr/>
+          <a:p/>
+        </p:txBody>
       </p:sp>
       <p:sp>
         <p:nvSpPr>
@@ -6324,6 +6460,10 @@
             <a:prstDash val="solid"/>
           </a:ln>
         </p:spPr>
+        <p:txBody>
+          <a:bodyPr/>
+          <a:p/>
+        </p:txBody>
       </p:sp>
       <p:sp>
         <p:nvSpPr>
@@ -6433,6 +6573,10 @@
             <a:prstDash val="solid"/>
           </a:ln>
         </p:spPr>
+        <p:txBody>
+          <a:bodyPr/>
+          <a:p/>
+        </p:txBody>
       </p:sp>
       <p:sp>
         <p:nvSpPr>
@@ -6724,6 +6868,10 @@
             <a:prstDash val="solid"/>
           </a:ln>
         </p:spPr>
+        <p:txBody>
+          <a:bodyPr/>
+          <a:p/>
+        </p:txBody>
       </p:sp>
       <p:sp>
         <p:nvSpPr>
@@ -6788,6 +6936,10 @@
             <a:prstDash val="solid"/>
           </a:ln>
         </p:spPr>
+        <p:txBody>
+          <a:bodyPr/>
+          <a:p/>
+        </p:txBody>
       </p:sp>
       <p:sp>
         <p:nvSpPr>
@@ -6824,7 +6976,7 @@
                 <a:ea typeface="Nanum Gothic" pitchFamily="34" charset="-122"/>
                 <a:cs typeface="Nanum Gothic" pitchFamily="34" charset="-120"/>
               </a:rPr>
-              <a:t>MOVE AI CHALLENGE 2026 · RAILPOOL AI</a:t>
+              <a:t>MOVE AI CHALLENGE 2026 · 레일 물류</a:t>
             </a:r>
             <a:endParaRPr lang="en-US" sz="750" dirty="0"/>
           </a:p>
@@ -8842,7 +8994,7 @@
                 <a:ea typeface="Nanum Gothic" pitchFamily="34" charset="-122"/>
                 <a:cs typeface="Nanum Gothic" pitchFamily="34" charset="-120"/>
               </a:rPr>
-              <a:t>MOVE AI CHALLENGE 2026 · RAILPOOL AI</a:t>
+              <a:t>MOVE AI CHALLENGE 2026 · 레일 물류</a:t>
             </a:r>
             <a:endParaRPr lang="en-US" sz="750" dirty="0"/>
           </a:p>
@@ -10663,7 +10815,7 @@
                 <a:ea typeface="Nanum Gothic" pitchFamily="34" charset="-122"/>
                 <a:cs typeface="Nanum Gothic" pitchFamily="34" charset="-120"/>
               </a:rPr>
-              <a:t>MOVE AI CHALLENGE 2026 · RAILPOOL AI</a:t>
+              <a:t>MOVE AI CHALLENGE 2026 · 레일 물류</a:t>
             </a:r>
             <a:endParaRPr lang="en-US" sz="750" dirty="0"/>
           </a:p>
@@ -10761,6 +10913,10 @@
             <a:prstDash val="solid"/>
           </a:ln>
         </p:spPr>
+        <p:txBody>
+          <a:bodyPr/>
+          <a:p/>
+        </p:txBody>
       </p:sp>
       <p:sp>
         <p:nvSpPr>
@@ -10907,6 +11063,10 @@
             <a:prstDash val="solid"/>
           </a:ln>
         </p:spPr>
+        <p:txBody>
+          <a:bodyPr/>
+          <a:p/>
+        </p:txBody>
       </p:sp>
       <p:sp>
         <p:nvSpPr>
@@ -10934,6 +11094,10 @@
             <a:prstDash val="solid"/>
           </a:ln>
         </p:spPr>
+        <p:txBody>
+          <a:bodyPr/>
+          <a:p/>
+        </p:txBody>
       </p:sp>
       <p:sp>
         <p:nvSpPr>
@@ -11057,6 +11221,10 @@
             <a:tailEnd type="triangle"/>
           </a:ln>
         </p:spPr>
+        <p:txBody>
+          <a:bodyPr/>
+          <a:p/>
+        </p:txBody>
       </p:sp>
       <p:sp>
         <p:nvSpPr>
@@ -11091,6 +11259,10 @@
             </a:outerShdw>
           </a:effectLst>
         </p:spPr>
+        <p:txBody>
+          <a:bodyPr/>
+          <a:p/>
+        </p:txBody>
       </p:sp>
       <p:sp>
         <p:nvSpPr>
@@ -11214,6 +11386,10 @@
             <a:tailEnd type="triangle"/>
           </a:ln>
         </p:spPr>
+        <p:txBody>
+          <a:bodyPr/>
+          <a:p/>
+        </p:txBody>
       </p:sp>
       <p:sp>
         <p:nvSpPr>
@@ -11241,6 +11417,10 @@
             <a:prstDash val="solid"/>
           </a:ln>
         </p:spPr>
+        <p:txBody>
+          <a:bodyPr/>
+          <a:p/>
+        </p:txBody>
       </p:sp>
       <p:sp>
         <p:nvSpPr>
@@ -11364,6 +11544,10 @@
             <a:tailEnd type="triangle"/>
           </a:ln>
         </p:spPr>
+        <p:txBody>
+          <a:bodyPr/>
+          <a:p/>
+        </p:txBody>
       </p:sp>
       <p:sp>
         <p:nvSpPr>
@@ -11391,6 +11575,10 @@
             <a:prstDash val="solid"/>
           </a:ln>
         </p:spPr>
+        <p:txBody>
+          <a:bodyPr/>
+          <a:p/>
+        </p:txBody>
       </p:sp>
       <p:sp>
         <p:nvSpPr>
@@ -11514,6 +11702,10 @@
             <a:tailEnd type="triangle"/>
           </a:ln>
         </p:spPr>
+        <p:txBody>
+          <a:bodyPr/>
+          <a:p/>
+        </p:txBody>
       </p:sp>
       <p:sp>
         <p:nvSpPr>
@@ -11541,6 +11733,10 @@
             <a:prstDash val="solid"/>
           </a:ln>
         </p:spPr>
+        <p:txBody>
+          <a:bodyPr/>
+          <a:p/>
+        </p:txBody>
       </p:sp>
       <p:sp>
         <p:nvSpPr>
@@ -11667,6 +11863,10 @@
             <a:prstDash val="solid"/>
           </a:ln>
         </p:spPr>
+        <p:txBody>
+          <a:bodyPr/>
+          <a:p/>
+        </p:txBody>
       </p:sp>
       <p:sp>
         <p:nvSpPr>
@@ -11793,6 +11993,10 @@
             <a:prstDash val="solid"/>
           </a:ln>
         </p:spPr>
+        <p:txBody>
+          <a:bodyPr/>
+          <a:p/>
+        </p:txBody>
       </p:sp>
       <p:sp>
         <p:nvSpPr>
@@ -11919,6 +12123,10 @@
             <a:prstDash val="solid"/>
           </a:ln>
         </p:spPr>
+        <p:txBody>
+          <a:bodyPr/>
+          <a:p/>
+        </p:txBody>
       </p:sp>
       <p:sp>
         <p:nvSpPr>
@@ -11987,6 +12195,10 @@
             <a:prstDash val="solid"/>
           </a:ln>
         </p:spPr>
+        <p:txBody>
+          <a:bodyPr/>
+          <a:p/>
+        </p:txBody>
       </p:sp>
       <p:sp>
         <p:nvSpPr>
@@ -12093,6 +12305,10 @@
             <a:tailEnd type="triangle"/>
           </a:ln>
         </p:spPr>
+        <p:txBody>
+          <a:bodyPr/>
+          <a:p/>
+        </p:txBody>
       </p:sp>
       <p:sp>
         <p:nvSpPr>
@@ -12117,6 +12333,10 @@
             <a:tailEnd type="triangle"/>
           </a:ln>
         </p:spPr>
+        <p:txBody>
+          <a:bodyPr/>
+          <a:p/>
+        </p:txBody>
       </p:sp>
       <p:sp>
         <p:nvSpPr>
@@ -12141,6 +12361,10 @@
             <a:tailEnd type="triangle"/>
           </a:ln>
         </p:spPr>
+        <p:txBody>
+          <a:bodyPr/>
+          <a:p/>
+        </p:txBody>
       </p:sp>
       <p:sp>
         <p:nvSpPr>
@@ -12168,6 +12392,10 @@
             <a:prstDash val="solid"/>
           </a:ln>
         </p:spPr>
+        <p:txBody>
+          <a:bodyPr/>
+          <a:p/>
+        </p:txBody>
       </p:sp>
       <p:sp>
         <p:nvSpPr>
@@ -12318,6 +12546,10 @@
             <a:prstDash val="solid"/>
           </a:ln>
         </p:spPr>
+        <p:txBody>
+          <a:bodyPr/>
+          <a:p/>
+        </p:txBody>
       </p:sp>
       <p:sp>
         <p:nvSpPr>
@@ -12427,6 +12659,10 @@
             <a:prstDash val="solid"/>
           </a:ln>
         </p:spPr>
+        <p:txBody>
+          <a:bodyPr/>
+          <a:p/>
+        </p:txBody>
       </p:sp>
       <p:sp>
         <p:nvSpPr>
@@ -12536,6 +12772,10 @@
             <a:prstDash val="solid"/>
           </a:ln>
         </p:spPr>
+        <p:txBody>
+          <a:bodyPr/>
+          <a:p/>
+        </p:txBody>
       </p:sp>
       <p:sp>
         <p:nvSpPr>
@@ -12645,6 +12885,10 @@
             <a:prstDash val="solid"/>
           </a:ln>
         </p:spPr>
+        <p:txBody>
+          <a:bodyPr/>
+          <a:p/>
+        </p:txBody>
       </p:sp>
       <p:sp>
         <p:nvSpPr>
@@ -12754,6 +12998,10 @@
             <a:prstDash val="solid"/>
           </a:ln>
         </p:spPr>
+        <p:txBody>
+          <a:bodyPr/>
+          <a:p/>
+        </p:txBody>
       </p:sp>
       <p:sp>
         <p:nvSpPr>
@@ -12900,6 +13148,10 @@
             <a:prstDash val="solid"/>
           </a:ln>
         </p:spPr>
+        <p:txBody>
+          <a:bodyPr/>
+          <a:p/>
+        </p:txBody>
       </p:sp>
       <p:sp>
         <p:nvSpPr>
@@ -12936,7 +13188,7 @@
                 <a:ea typeface="Nanum Gothic" pitchFamily="34" charset="-122"/>
                 <a:cs typeface="Nanum Gothic" pitchFamily="34" charset="-120"/>
               </a:rPr>
-              <a:t>MOVE AI CHALLENGE 2026 · RAILPOOL AI</a:t>
+              <a:t>MOVE AI CHALLENGE 2026 · 레일 물류</a:t>
             </a:r>
             <a:endParaRPr lang="en-US" sz="750" dirty="0"/>
           </a:p>
@@ -13034,6 +13286,10 @@
             <a:prstDash val="solid"/>
           </a:ln>
         </p:spPr>
+        <p:txBody>
+          <a:bodyPr/>
+          <a:p/>
+        </p:txBody>
       </p:sp>
       <p:sp>
         <p:nvSpPr>
@@ -13180,6 +13436,10 @@
             <a:prstDash val="solid"/>
           </a:ln>
         </p:spPr>
+        <p:txBody>
+          <a:bodyPr/>
+          <a:p/>
+        </p:txBody>
       </p:sp>
       <p:sp>
         <p:nvSpPr>
@@ -13214,6 +13474,10 @@
             </a:outerShdw>
           </a:effectLst>
         </p:spPr>
+        <p:txBody>
+          <a:bodyPr/>
+          <a:p/>
+        </p:txBody>
       </p:sp>
       <p:pic>
         <p:nvPicPr>
@@ -13265,6 +13529,10 @@
             <a:prstDash val="solid"/>
           </a:ln>
         </p:spPr>
+        <p:txBody>
+          <a:bodyPr/>
+          <a:p/>
+        </p:txBody>
       </p:sp>
       <p:sp>
         <p:nvSpPr>
@@ -13412,6 +13680,10 @@
             <a:tailEnd type="triangle"/>
           </a:ln>
         </p:spPr>
+        <p:txBody>
+          <a:bodyPr/>
+          <a:p/>
+        </p:txBody>
       </p:sp>
       <p:sp>
         <p:nvSpPr>
@@ -13446,6 +13718,10 @@
             </a:outerShdw>
           </a:effectLst>
         </p:spPr>
+        <p:txBody>
+          <a:bodyPr/>
+          <a:p/>
+        </p:txBody>
       </p:sp>
       <p:pic>
         <p:nvPicPr>
@@ -13497,6 +13773,10 @@
             <a:prstDash val="solid"/>
           </a:ln>
         </p:spPr>
+        <p:txBody>
+          <a:bodyPr/>
+          <a:p/>
+        </p:txBody>
       </p:sp>
       <p:sp>
         <p:nvSpPr>
@@ -13644,6 +13924,10 @@
             <a:tailEnd type="triangle"/>
           </a:ln>
         </p:spPr>
+        <p:txBody>
+          <a:bodyPr/>
+          <a:p/>
+        </p:txBody>
       </p:sp>
       <p:sp>
         <p:nvSpPr>
@@ -13678,6 +13962,10 @@
             </a:outerShdw>
           </a:effectLst>
         </p:spPr>
+        <p:txBody>
+          <a:bodyPr/>
+          <a:p/>
+        </p:txBody>
       </p:sp>
       <p:pic>
         <p:nvPicPr>
@@ -13729,6 +14017,10 @@
             <a:prstDash val="solid"/>
           </a:ln>
         </p:spPr>
+        <p:txBody>
+          <a:bodyPr/>
+          <a:p/>
+        </p:txBody>
       </p:sp>
       <p:sp>
         <p:nvSpPr>
@@ -13876,6 +14168,10 @@
             <a:tailEnd type="triangle"/>
           </a:ln>
         </p:spPr>
+        <p:txBody>
+          <a:bodyPr/>
+          <a:p/>
+        </p:txBody>
       </p:sp>
       <p:sp>
         <p:nvSpPr>
@@ -13910,6 +14206,10 @@
             </a:outerShdw>
           </a:effectLst>
         </p:spPr>
+        <p:txBody>
+          <a:bodyPr/>
+          <a:p/>
+        </p:txBody>
       </p:sp>
       <p:pic>
         <p:nvPicPr>
@@ -13961,6 +14261,10 @@
             <a:prstDash val="solid"/>
           </a:ln>
         </p:spPr>
+        <p:txBody>
+          <a:bodyPr/>
+          <a:p/>
+        </p:txBody>
       </p:sp>
       <p:sp>
         <p:nvSpPr>
@@ -14111,6 +14415,10 @@
             <a:prstDash val="solid"/>
           </a:ln>
         </p:spPr>
+        <p:txBody>
+          <a:bodyPr/>
+          <a:p/>
+        </p:txBody>
       </p:sp>
       <p:sp>
         <p:nvSpPr>
@@ -14175,6 +14483,10 @@
             <a:prstDash val="solid"/>
           </a:ln>
         </p:spPr>
+        <p:txBody>
+          <a:bodyPr/>
+          <a:p/>
+        </p:txBody>
       </p:sp>
       <p:sp>
         <p:nvSpPr>
@@ -14211,7 +14523,7 @@
                 <a:ea typeface="Nanum Gothic" pitchFamily="34" charset="-122"/>
                 <a:cs typeface="Nanum Gothic" pitchFamily="34" charset="-120"/>
               </a:rPr>
-              <a:t>MOVE AI CHALLENGE 2026 · RAILPOOL AI</a:t>
+              <a:t>MOVE AI CHALLENGE 2026 · 레일 물류</a:t>
             </a:r>
             <a:endParaRPr lang="en-US" sz="750" dirty="0"/>
           </a:p>
@@ -14309,6 +14621,10 @@
             <a:prstDash val="solid"/>
           </a:ln>
         </p:spPr>
+        <p:txBody>
+          <a:bodyPr/>
+          <a:p/>
+        </p:txBody>
       </p:sp>
       <p:sp>
         <p:nvSpPr>
@@ -14455,6 +14771,10 @@
             <a:prstDash val="solid"/>
           </a:ln>
         </p:spPr>
+        <p:txBody>
+          <a:bodyPr/>
+          <a:p/>
+        </p:txBody>
       </p:sp>
       <p:sp>
         <p:nvSpPr>
@@ -14489,6 +14809,10 @@
             </a:outerShdw>
           </a:effectLst>
         </p:spPr>
+        <p:txBody>
+          <a:bodyPr/>
+          <a:p/>
+        </p:txBody>
       </p:sp>
       <p:pic>
         <p:nvPicPr>
@@ -14540,6 +14864,10 @@
             <a:prstDash val="solid"/>
           </a:ln>
         </p:spPr>
+        <p:txBody>
+          <a:bodyPr/>
+          <a:p/>
+        </p:txBody>
       </p:sp>
       <p:sp>
         <p:nvSpPr>
@@ -14687,6 +15015,10 @@
             <a:tailEnd type="triangle"/>
           </a:ln>
         </p:spPr>
+        <p:txBody>
+          <a:bodyPr/>
+          <a:p/>
+        </p:txBody>
       </p:sp>
       <p:sp>
         <p:nvSpPr>
@@ -14721,6 +15053,10 @@
             </a:outerShdw>
           </a:effectLst>
         </p:spPr>
+        <p:txBody>
+          <a:bodyPr/>
+          <a:p/>
+        </p:txBody>
       </p:sp>
       <p:pic>
         <p:nvPicPr>
@@ -14772,6 +15108,10 @@
             <a:prstDash val="solid"/>
           </a:ln>
         </p:spPr>
+        <p:txBody>
+          <a:bodyPr/>
+          <a:p/>
+        </p:txBody>
       </p:sp>
       <p:sp>
         <p:nvSpPr>
@@ -14919,6 +15259,10 @@
             <a:tailEnd type="triangle"/>
           </a:ln>
         </p:spPr>
+        <p:txBody>
+          <a:bodyPr/>
+          <a:p/>
+        </p:txBody>
       </p:sp>
       <p:sp>
         <p:nvSpPr>
@@ -14953,6 +15297,10 @@
             </a:outerShdw>
           </a:effectLst>
         </p:spPr>
+        <p:txBody>
+          <a:bodyPr/>
+          <a:p/>
+        </p:txBody>
       </p:sp>
       <p:pic>
         <p:nvPicPr>
@@ -15004,6 +15352,10 @@
             <a:prstDash val="solid"/>
           </a:ln>
         </p:spPr>
+        <p:txBody>
+          <a:bodyPr/>
+          <a:p/>
+        </p:txBody>
       </p:sp>
       <p:sp>
         <p:nvSpPr>
@@ -15154,6 +15506,10 @@
             <a:prstDash val="solid"/>
           </a:ln>
         </p:spPr>
+        <p:txBody>
+          <a:bodyPr/>
+          <a:p/>
+        </p:txBody>
       </p:sp>
       <p:sp>
         <p:nvSpPr>
@@ -15259,6 +15615,10 @@
             <a:prstDash val="solid"/>
           </a:ln>
         </p:spPr>
+        <p:txBody>
+          <a:bodyPr/>
+          <a:p/>
+        </p:txBody>
       </p:sp>
       <p:sp>
         <p:nvSpPr>
@@ -15295,7 +15655,7 @@
                 <a:ea typeface="Nanum Gothic" pitchFamily="34" charset="-122"/>
                 <a:cs typeface="Nanum Gothic" pitchFamily="34" charset="-120"/>
               </a:rPr>
-              <a:t>MOVE AI CHALLENGE 2026 · RAILPOOL AI</a:t>
+              <a:t>MOVE AI CHALLENGE 2026 · 레일 물류</a:t>
             </a:r>
             <a:endParaRPr lang="en-US" sz="750" dirty="0"/>
           </a:p>
@@ -15393,6 +15753,10 @@
             <a:prstDash val="solid"/>
           </a:ln>
         </p:spPr>
+        <p:txBody>
+          <a:bodyPr/>
+          <a:p/>
+        </p:txBody>
       </p:sp>
       <p:sp>
         <p:nvSpPr>
@@ -15539,6 +15903,10 @@
             <a:prstDash val="solid"/>
           </a:ln>
         </p:spPr>
+        <p:txBody>
+          <a:bodyPr/>
+          <a:p/>
+        </p:txBody>
       </p:sp>
       <p:sp>
         <p:nvSpPr>
@@ -15566,6 +15934,10 @@
             <a:prstDash val="solid"/>
           </a:ln>
         </p:spPr>
+        <p:txBody>
+          <a:bodyPr/>
+          <a:p/>
+        </p:txBody>
       </p:sp>
       <p:sp>
         <p:nvSpPr>
@@ -15716,6 +16088,10 @@
             <a:prstDash val="solid"/>
           </a:ln>
         </p:spPr>
+        <p:txBody>
+          <a:bodyPr/>
+          <a:p/>
+        </p:txBody>
       </p:sp>
       <p:sp>
         <p:nvSpPr>
@@ -15883,6 +16259,10 @@
             <a:prstDash val="solid"/>
           </a:ln>
         </p:spPr>
+        <p:txBody>
+          <a:bodyPr/>
+          <a:p/>
+        </p:txBody>
       </p:sp>
       <p:sp>
         <p:nvSpPr>
@@ -16050,6 +16430,10 @@
             <a:prstDash val="solid"/>
           </a:ln>
         </p:spPr>
+        <p:txBody>
+          <a:bodyPr/>
+          <a:p/>
+        </p:txBody>
       </p:sp>
       <p:sp>
         <p:nvSpPr>
@@ -16217,6 +16601,10 @@
             <a:prstDash val="solid"/>
           </a:ln>
         </p:spPr>
+        <p:txBody>
+          <a:bodyPr/>
+          <a:p/>
+        </p:txBody>
       </p:sp>
       <p:sp>
         <p:nvSpPr>
@@ -16384,6 +16772,10 @@
             <a:prstDash val="solid"/>
           </a:ln>
         </p:spPr>
+        <p:txBody>
+          <a:bodyPr/>
+          <a:p/>
+        </p:txBody>
       </p:sp>
       <p:sp>
         <p:nvSpPr>
@@ -16551,6 +16943,10 @@
             <a:prstDash val="solid"/>
           </a:ln>
         </p:spPr>
+        <p:txBody>
+          <a:bodyPr/>
+          <a:p/>
+        </p:txBody>
       </p:sp>
       <p:sp>
         <p:nvSpPr>
@@ -16615,6 +17011,10 @@
             <a:prstDash val="solid"/>
           </a:ln>
         </p:spPr>
+        <p:txBody>
+          <a:bodyPr/>
+          <a:p/>
+        </p:txBody>
       </p:sp>
       <p:sp>
         <p:nvSpPr>
@@ -16651,7 +17051,7 @@
                 <a:ea typeface="Nanum Gothic" pitchFamily="34" charset="-122"/>
                 <a:cs typeface="Nanum Gothic" pitchFamily="34" charset="-120"/>
               </a:rPr>
-              <a:t>MOVE AI CHALLENGE 2026 · RAILPOOL AI</a:t>
+              <a:t>MOVE AI CHALLENGE 2026 · 레일 물류</a:t>
             </a:r>
             <a:endParaRPr lang="en-US" sz="750" dirty="0"/>
           </a:p>
@@ -16749,6 +17149,10 @@
             <a:prstDash val="solid"/>
           </a:ln>
         </p:spPr>
+        <p:txBody>
+          <a:bodyPr/>
+          <a:p/>
+        </p:txBody>
       </p:sp>
       <p:sp>
         <p:nvSpPr>
@@ -16895,6 +17299,10 @@
             <a:prstDash val="solid"/>
           </a:ln>
         </p:spPr>
+        <p:txBody>
+          <a:bodyPr/>
+          <a:p/>
+        </p:txBody>
       </p:sp>
       <p:sp>
         <p:nvSpPr>
@@ -16922,6 +17330,10 @@
             <a:prstDash val="solid"/>
           </a:ln>
         </p:spPr>
+        <p:txBody>
+          <a:bodyPr/>
+          <a:p/>
+        </p:txBody>
       </p:sp>
       <p:sp>
         <p:nvSpPr>
@@ -17072,6 +17484,10 @@
             <a:prstDash val="solid"/>
           </a:ln>
         </p:spPr>
+        <p:txBody>
+          <a:bodyPr/>
+          <a:p/>
+        </p:txBody>
       </p:sp>
       <p:sp>
         <p:nvSpPr>
@@ -17314,6 +17730,10 @@
             <a:prstDash val="solid"/>
           </a:ln>
         </p:spPr>
+        <p:txBody>
+          <a:bodyPr/>
+          <a:p/>
+        </p:txBody>
       </p:sp>
       <p:sp>
         <p:nvSpPr>
@@ -17339,6 +17759,10 @@
             <a:prstDash val="solid"/>
           </a:ln>
         </p:spPr>
+        <p:txBody>
+          <a:bodyPr/>
+          <a:p/>
+        </p:txBody>
       </p:sp>
       <p:sp>
         <p:nvSpPr>
@@ -17486,6 +17910,10 @@
             <a:tailEnd type="triangle"/>
           </a:ln>
         </p:spPr>
+        <p:txBody>
+          <a:bodyPr/>
+          <a:p/>
+        </p:txBody>
       </p:sp>
       <p:sp>
         <p:nvSpPr>
@@ -17513,6 +17941,10 @@
             <a:prstDash val="solid"/>
           </a:ln>
         </p:spPr>
+        <p:txBody>
+          <a:bodyPr/>
+          <a:p/>
+        </p:txBody>
       </p:sp>
       <p:sp>
         <p:nvSpPr>
@@ -17538,6 +17970,10 @@
             <a:prstDash val="solid"/>
           </a:ln>
         </p:spPr>
+        <p:txBody>
+          <a:bodyPr/>
+          <a:p/>
+        </p:txBody>
       </p:sp>
       <p:sp>
         <p:nvSpPr>
@@ -17685,6 +18121,10 @@
             <a:tailEnd type="triangle"/>
           </a:ln>
         </p:spPr>
+        <p:txBody>
+          <a:bodyPr/>
+          <a:p/>
+        </p:txBody>
       </p:sp>
       <p:sp>
         <p:nvSpPr>
@@ -17712,6 +18152,10 @@
             <a:prstDash val="solid"/>
           </a:ln>
         </p:spPr>
+        <p:txBody>
+          <a:bodyPr/>
+          <a:p/>
+        </p:txBody>
       </p:sp>
       <p:sp>
         <p:nvSpPr>
@@ -17737,6 +18181,10 @@
             <a:prstDash val="solid"/>
           </a:ln>
         </p:spPr>
+        <p:txBody>
+          <a:bodyPr/>
+          <a:p/>
+        </p:txBody>
       </p:sp>
       <p:sp>
         <p:nvSpPr>
@@ -17884,6 +18332,10 @@
             <a:tailEnd type="triangle"/>
           </a:ln>
         </p:spPr>
+        <p:txBody>
+          <a:bodyPr/>
+          <a:p/>
+        </p:txBody>
       </p:sp>
       <p:sp>
         <p:nvSpPr>
@@ -17911,6 +18363,10 @@
             <a:prstDash val="solid"/>
           </a:ln>
         </p:spPr>
+        <p:txBody>
+          <a:bodyPr/>
+          <a:p/>
+        </p:txBody>
       </p:sp>
       <p:sp>
         <p:nvSpPr>
@@ -17936,6 +18392,10 @@
             <a:prstDash val="solid"/>
           </a:ln>
         </p:spPr>
+        <p:txBody>
+          <a:bodyPr/>
+          <a:p/>
+        </p:txBody>
       </p:sp>
       <p:sp>
         <p:nvSpPr>
@@ -18083,6 +18543,10 @@
             <a:tailEnd type="triangle"/>
           </a:ln>
         </p:spPr>
+        <p:txBody>
+          <a:bodyPr/>
+          <a:p/>
+        </p:txBody>
       </p:sp>
       <p:sp>
         <p:nvSpPr>
@@ -18110,6 +18574,10 @@
             <a:prstDash val="solid"/>
           </a:ln>
         </p:spPr>
+        <p:txBody>
+          <a:bodyPr/>
+          <a:p/>
+        </p:txBody>
       </p:sp>
       <p:sp>
         <p:nvSpPr>
@@ -18135,6 +18603,10 @@
             <a:prstDash val="solid"/>
           </a:ln>
         </p:spPr>
+        <p:txBody>
+          <a:bodyPr/>
+          <a:p/>
+        </p:txBody>
       </p:sp>
       <p:sp>
         <p:nvSpPr>
@@ -18326,6 +18798,10 @@
             <a:prstDash val="solid"/>
           </a:ln>
         </p:spPr>
+        <p:txBody>
+          <a:bodyPr/>
+          <a:p/>
+        </p:txBody>
       </p:sp>
       <p:sp>
         <p:nvSpPr>
@@ -18394,6 +18870,10 @@
             <a:prstDash val="solid"/>
           </a:ln>
         </p:spPr>
+        <p:txBody>
+          <a:bodyPr/>
+          <a:p/>
+        </p:txBody>
       </p:sp>
       <p:sp>
         <p:nvSpPr>
@@ -18462,6 +18942,10 @@
             <a:prstDash val="solid"/>
           </a:ln>
         </p:spPr>
+        <p:txBody>
+          <a:bodyPr/>
+          <a:p/>
+        </p:txBody>
       </p:sp>
       <p:sp>
         <p:nvSpPr>
@@ -18530,6 +19014,10 @@
             <a:prstDash val="solid"/>
           </a:ln>
         </p:spPr>
+        <p:txBody>
+          <a:bodyPr/>
+          <a:p/>
+        </p:txBody>
       </p:sp>
       <p:sp>
         <p:nvSpPr>
@@ -18598,6 +19086,10 @@
             <a:prstDash val="solid"/>
           </a:ln>
         </p:spPr>
+        <p:txBody>
+          <a:bodyPr/>
+          <a:p/>
+        </p:txBody>
       </p:sp>
       <p:sp>
         <p:nvSpPr>
@@ -18703,6 +19195,10 @@
             <a:prstDash val="solid"/>
           </a:ln>
         </p:spPr>
+        <p:txBody>
+          <a:bodyPr/>
+          <a:p/>
+        </p:txBody>
       </p:sp>
       <p:sp>
         <p:nvSpPr>
@@ -18739,7 +19235,7 @@
                 <a:ea typeface="Nanum Gothic" pitchFamily="34" charset="-122"/>
                 <a:cs typeface="Nanum Gothic" pitchFamily="34" charset="-120"/>
               </a:rPr>
-              <a:t>MOVE AI CHALLENGE 2026 · RAILPOOL AI</a:t>
+              <a:t>MOVE AI CHALLENGE 2026 · 레일 물류</a:t>
             </a:r>
             <a:endParaRPr lang="en-US" sz="750" dirty="0"/>
           </a:p>
@@ -18837,6 +19333,10 @@
             <a:prstDash val="solid"/>
           </a:ln>
         </p:spPr>
+        <p:txBody>
+          <a:bodyPr/>
+          <a:p/>
+        </p:txBody>
       </p:sp>
       <p:sp>
         <p:nvSpPr>
@@ -18983,6 +19483,10 @@
             <a:prstDash val="solid"/>
           </a:ln>
         </p:spPr>
+        <p:txBody>
+          <a:bodyPr/>
+          <a:p/>
+        </p:txBody>
       </p:sp>
       <p:sp>
         <p:nvSpPr>
@@ -19010,6 +19514,10 @@
             <a:prstDash val="solid"/>
           </a:ln>
         </p:spPr>
+        <p:txBody>
+          <a:bodyPr/>
+          <a:p/>
+        </p:txBody>
       </p:sp>
       <p:sp>
         <p:nvSpPr>
@@ -19119,6 +19627,10 @@
             <a:prstDash val="solid"/>
           </a:ln>
         </p:spPr>
+        <p:txBody>
+          <a:bodyPr/>
+          <a:p/>
+        </p:txBody>
       </p:sp>
       <p:sp>
         <p:nvSpPr>
@@ -19228,6 +19740,10 @@
             <a:prstDash val="solid"/>
           </a:ln>
         </p:spPr>
+        <p:txBody>
+          <a:bodyPr/>
+          <a:p/>
+        </p:txBody>
       </p:sp>
       <p:sp>
         <p:nvSpPr>
@@ -19337,6 +19853,10 @@
             <a:prstDash val="solid"/>
           </a:ln>
         </p:spPr>
+        <p:txBody>
+          <a:bodyPr/>
+          <a:p/>
+        </p:txBody>
       </p:sp>
       <p:sp>
         <p:nvSpPr>
@@ -19446,6 +19966,10 @@
             <a:prstDash val="solid"/>
           </a:ln>
         </p:spPr>
+        <p:txBody>
+          <a:bodyPr/>
+          <a:p/>
+        </p:txBody>
       </p:sp>
       <p:sp>
         <p:nvSpPr>
@@ -19592,6 +20116,10 @@
             <a:prstDash val="solid"/>
           </a:ln>
         </p:spPr>
+        <p:txBody>
+          <a:bodyPr/>
+          <a:p/>
+        </p:txBody>
       </p:sp>
       <p:sp>
         <p:nvSpPr>
@@ -19701,6 +20229,10 @@
             <a:prstDash val="solid"/>
           </a:ln>
         </p:spPr>
+        <p:txBody>
+          <a:bodyPr/>
+          <a:p/>
+        </p:txBody>
       </p:sp>
       <p:sp>
         <p:nvSpPr>
@@ -19767,6 +20299,10 @@
             <a:prstDash val="solid"/>
           </a:ln>
         </p:spPr>
+        <p:txBody>
+          <a:bodyPr/>
+          <a:p/>
+        </p:txBody>
       </p:sp>
       <p:sp>
         <p:nvSpPr>
@@ -19876,6 +20412,10 @@
             <a:prstDash val="solid"/>
           </a:ln>
         </p:spPr>
+        <p:txBody>
+          <a:bodyPr/>
+          <a:p/>
+        </p:txBody>
       </p:sp>
       <p:sp>
         <p:nvSpPr>
@@ -20026,6 +20566,10 @@
             <a:prstDash val="solid"/>
           </a:ln>
         </p:spPr>
+        <p:txBody>
+          <a:bodyPr/>
+          <a:p/>
+        </p:txBody>
       </p:sp>
       <p:sp>
         <p:nvSpPr>
@@ -20092,6 +20636,10 @@
             <a:prstDash val="solid"/>
           </a:ln>
         </p:spPr>
+        <p:txBody>
+          <a:bodyPr/>
+          <a:p/>
+        </p:txBody>
       </p:sp>
       <p:sp>
         <p:nvSpPr>
@@ -20201,6 +20749,10 @@
             <a:prstDash val="solid"/>
           </a:ln>
         </p:spPr>
+        <p:txBody>
+          <a:bodyPr/>
+          <a:p/>
+        </p:txBody>
       </p:sp>
       <p:sp>
         <p:nvSpPr>
@@ -20351,6 +20903,10 @@
             <a:prstDash val="solid"/>
           </a:ln>
         </p:spPr>
+        <p:txBody>
+          <a:bodyPr/>
+          <a:p/>
+        </p:txBody>
       </p:sp>
       <p:sp>
         <p:nvSpPr>
@@ -20417,6 +20973,10 @@
             <a:prstDash val="solid"/>
           </a:ln>
         </p:spPr>
+        <p:txBody>
+          <a:bodyPr/>
+          <a:p/>
+        </p:txBody>
       </p:sp>
       <p:sp>
         <p:nvSpPr>
@@ -20526,6 +21086,10 @@
             <a:prstDash val="solid"/>
           </a:ln>
         </p:spPr>
+        <p:txBody>
+          <a:bodyPr/>
+          <a:p/>
+        </p:txBody>
       </p:sp>
       <p:sp>
         <p:nvSpPr>
@@ -20594,6 +21158,10 @@
             <a:prstDash val="solid"/>
           </a:ln>
         </p:spPr>
+        <p:txBody>
+          <a:bodyPr/>
+          <a:p/>
+        </p:txBody>
       </p:sp>
       <p:sp>
         <p:nvSpPr>
@@ -20669,6 +21237,10 @@
             </a:outerShdw>
           </a:effectLst>
         </p:spPr>
+        <p:txBody>
+          <a:bodyPr/>
+          <a:p/>
+        </p:txBody>
       </p:sp>
       <p:pic>
         <p:nvPicPr>
@@ -20720,6 +21292,10 @@
             <a:prstDash val="solid"/>
           </a:ln>
         </p:spPr>
+        <p:txBody>
+          <a:bodyPr/>
+          <a:p/>
+        </p:txBody>
       </p:sp>
       <p:sp>
         <p:nvSpPr>
@@ -20883,6 +21459,10 @@
             <a:prstDash val="solid"/>
           </a:ln>
         </p:spPr>
+        <p:txBody>
+          <a:bodyPr/>
+          <a:p/>
+        </p:txBody>
       </p:sp>
       <p:sp>
         <p:nvSpPr>
@@ -20919,7 +21499,7 @@
                 <a:ea typeface="Nanum Gothic" pitchFamily="34" charset="-122"/>
                 <a:cs typeface="Nanum Gothic" pitchFamily="34" charset="-120"/>
               </a:rPr>
-              <a:t>MOVE AI CHALLENGE 2026 · RAILPOOL AI</a:t>
+              <a:t>MOVE AI CHALLENGE 2026 · 레일 물류</a:t>
             </a:r>
             <a:endParaRPr lang="en-US" sz="750" dirty="0"/>
           </a:p>

--- a/RAILPOOL_AI_최종결과보고서_RailFit내용반영본_편집본.pptx
+++ b/RAILPOOL_AI_최종결과보고서_RailFit내용반영본_편집본.pptx
@@ -17096,19 +17096,26 @@
           </a:bodyPr>
           <a:lstStyle/>
           <a:p>
-            <a:pPr indent="0" marL="0">
-              <a:buNone/>
-            </a:pPr>
-            <a:r>
-              <a:rPr lang="en-US" sz="850" b="1" spc="100" kern="0" dirty="0">
-                <a:solidFill>
-                  <a:srgbClr val="86B7FF"/>
-                </a:solidFill>
-                <a:latin typeface="Nanum Gothic" pitchFamily="34" charset="0"/>
-                <a:ea typeface="Nanum Gothic" pitchFamily="34" charset="-122"/>
-                <a:cs typeface="Nanum Gothic" pitchFamily="34" charset="-120"/>
-              </a:rPr>
-              <a:t>SYSTEM PROMPT · 핵심</a:t>
+            <a:pPr indent="0" marL="0" algn="l">
+              <a:lnSpc>
+                <a:spcPct val="105000"/>
+              </a:lnSpc>
+              <a:spcBef>
+                <a:spcPts val="0"/>
+              </a:spcBef>
+              <a:spcAft>
+                <a:spcPts val="0"/>
+              </a:spcAft>
+              <a:buNone/>
+            </a:pPr>
+            <a:r>
+              <a:rPr sz="850" b="1">
+                <a:solidFill>
+                  <a:srgbClr val="8BB9FF"/>
+                </a:solidFill>
+                <a:latin typeface="Nanum Gothic"/>
+              </a:rPr>
+              <a:t>실제 SYSTEM PROMPT · 원문</a:t>
             </a:r>
             <a:endParaRPr lang="en-US" sz="850" dirty="0"/>
           </a:p>
@@ -17132,43 +17139,121 @@
           <a:ln/>
         </p:spPr>
         <p:txBody>
-          <a:bodyPr wrap="square" lIns="0" tIns="0" rIns="0" bIns="0" rtlCol="0" anchor="t">
-            <a:normAutofit/>
-          </a:bodyPr>
-          <a:lstStyle/>
-          <a:p>
-            <a:pPr indent="0" marL="0">
-              <a:buNone/>
-            </a:pPr>
-            <a:r>
-              <a:rPr lang="en-US" sz="1300" b="1" dirty="0">
+          <a:bodyPr wrap="square" lIns="0" tIns="0" rIns="0" bIns="0" rtlCol="0" anchor="ctr">
+            <a:normAutofit/>
+          </a:bodyPr>
+          <a:lstStyle/>
+          <a:p>
+            <a:pPr indent="0" marL="0" algn="l">
+              <a:lnSpc>
+                <a:spcPct val="100000"/>
+              </a:lnSpc>
+              <a:spcBef>
+                <a:spcPts val="0"/>
+              </a:spcBef>
+              <a:spcAft>
+                <a:spcPts val="0"/>
+              </a:spcAft>
+              <a:buNone/>
+            </a:pPr>
+            <a:r>
+              <a:rPr sz="800" b="1">
                 <a:solidFill>
                   <a:srgbClr val="FFFFFF"/>
                 </a:solidFill>
-                <a:latin typeface="Nanum Gothic" pitchFamily="34" charset="0"/>
-                <a:ea typeface="Nanum Gothic" pitchFamily="34" charset="-122"/>
-                <a:cs typeface="Nanum Gothic" pitchFamily="34" charset="-120"/>
-              </a:rPr>
-              <a:t>“화물 운송 메일에서 원문에 있는 값만</a:t>
+                <a:latin typeface="Nanum Gothic"/>
+              </a:rPr>
+              <a:t>“화물 운송 메일에서 원문에 있는 값만 JSON으로 추출하세요.</a:t>
             </a:r>
             <a:endParaRPr lang="en-US" sz="1300" dirty="0"/>
           </a:p>
           <a:p>
-            <a:pPr indent="0" marL="0">
-              <a:buNone/>
-            </a:pPr>
-            <a:r>
-              <a:rPr lang="en-US" sz="1300" b="1" dirty="0">
+            <a:pPr algn="l">
+              <a:lnSpc>
+                <a:spcPct val="100000"/>
+              </a:lnSpc>
+              <a:spcBef>
+                <a:spcPts val="0"/>
+              </a:spcBef>
+              <a:spcAft>
+                <a:spcPts val="0"/>
+              </a:spcAft>
+            </a:pPr>
+            <a:r>
+              <a:rPr sz="800" b="1">
                 <a:solidFill>
                   <a:srgbClr val="FFFFFF"/>
                 </a:solidFill>
-                <a:latin typeface="Nanum Gothic" pitchFamily="34" charset="0"/>
-                <a:ea typeface="Nanum Gothic" pitchFamily="34" charset="-122"/>
-                <a:cs typeface="Nanum Gothic" pitchFamily="34" charset="-120"/>
-              </a:rPr>
-              <a:t>JSON으로 추출하세요. 없는 값은 null로 두세요.”</a:t>
-            </a:r>
-            <a:endParaRPr lang="en-US" sz="1300" dirty="0"/>
+                <a:latin typeface="Nanum Gothic"/>
+              </a:rPr>
+              <a:t>없는 값은 null로 두세요.</a:t>
+            </a:r>
+          </a:p>
+          <a:p>
+            <a:pPr algn="l">
+              <a:lnSpc>
+                <a:spcPct val="100000"/>
+              </a:lnSpc>
+              <a:spcBef>
+                <a:spcPts val="0"/>
+              </a:spcBef>
+              <a:spcAft>
+                <a:spcPts val="0"/>
+              </a:spcAft>
+            </a:pPr>
+            <a:r>
+              <a:rPr sz="800" b="1">
+                <a:solidFill>
+                  <a:srgbClr val="FFFFFF"/>
+                </a:solidFill>
+                <a:latin typeface="Nanum Gothic"/>
+              </a:rPr>
+              <a:t>키: origin, destination, containerSize, containerCount,</a:t>
+            </a:r>
+          </a:p>
+          <a:p>
+            <a:pPr algn="l">
+              <a:lnSpc>
+                <a:spcPct val="100000"/>
+              </a:lnSpc>
+              <a:spcBef>
+                <a:spcPts val="0"/>
+              </a:spcBef>
+              <a:spcAft>
+                <a:spcPts val="0"/>
+              </a:spcAft>
+            </a:pPr>
+            <a:r>
+              <a:rPr sz="800" b="1">
+                <a:solidFill>
+                  <a:srgbClr val="FFFFFF"/>
+                </a:solidFill>
+                <a:latin typeface="Nanum Gothic"/>
+              </a:rPr>
+              <a:t>departureDate, deadline, hazardous, roadCost,</a:t>
+            </a:r>
+          </a:p>
+          <a:p>
+            <a:pPr algn="l">
+              <a:lnSpc>
+                <a:spcPct val="100000"/>
+              </a:lnSpc>
+              <a:spcBef>
+                <a:spcPts val="0"/>
+              </a:spcBef>
+              <a:spcAft>
+                <a:spcPts val="0"/>
+              </a:spcAft>
+            </a:pPr>
+            <a:r>
+              <a:rPr sz="800" b="1">
+                <a:solidFill>
+                  <a:srgbClr val="FFFFFF"/>
+                </a:solidFill>
+                <a:latin typeface="Nanum Gothic"/>
+              </a:rPr>
+              <a:t>cargo, weightTons.”</a:t>
+            </a:r>
           </a:p>
         </p:txBody>
       </p:sp>
@@ -17190,60 +17275,55 @@
           <a:ln/>
         </p:spPr>
         <p:txBody>
-          <a:bodyPr wrap="square" lIns="0" tIns="0" rIns="0" bIns="0" rtlCol="0" anchor="t">
-            <a:normAutofit/>
-          </a:bodyPr>
-          <a:lstStyle/>
-          <a:p>
-            <a:pPr indent="0" marL="0">
-              <a:buNone/>
-            </a:pPr>
-            <a:r>
-              <a:rPr lang="en-US" sz="810" dirty="0">
-                <a:solidFill>
-                  <a:srgbClr val="C8D7EA"/>
-                </a:solidFill>
-                <a:latin typeface="Nanum Gothic" pitchFamily="34" charset="0"/>
-                <a:ea typeface="Nanum Gothic" pitchFamily="34" charset="-122"/>
-                <a:cs typeface="Nanum Gothic" pitchFamily="34" charset="-120"/>
-              </a:rPr>
-              <a:t>origin · destination · containerSize · containerCount</a:t>
+          <a:bodyPr wrap="square" lIns="0" tIns="0" rIns="0" bIns="0" rtlCol="0" anchor="ctr">
+            <a:normAutofit/>
+          </a:bodyPr>
+          <a:lstStyle/>
+          <a:p>
+            <a:pPr indent="0" marL="0" algn="l">
+              <a:lnSpc>
+                <a:spcPct val="100000"/>
+              </a:lnSpc>
+              <a:spcBef>
+                <a:spcPts val="0"/>
+              </a:spcBef>
+              <a:spcAft>
+                <a:spcPts val="0"/>
+              </a:spcAft>
+              <a:buNone/>
+            </a:pPr>
+            <a:r>
+              <a:rPr sz="740" b="0">
+                <a:solidFill>
+                  <a:srgbClr val="C7D5E7"/>
+                </a:solidFill>
+                <a:latin typeface="Nanum Gothic"/>
+              </a:rPr>
+              <a:t>후처리 규칙  |  허용 키 외 제거 · 20/40ft · 숫자 범위 정규화</a:t>
             </a:r>
             <a:endParaRPr lang="en-US" sz="810" dirty="0"/>
           </a:p>
           <a:p>
-            <a:pPr indent="0" marL="0">
-              <a:buNone/>
-            </a:pPr>
-            <a:r>
-              <a:rPr lang="en-US" sz="810" dirty="0">
-                <a:solidFill>
-                  <a:srgbClr val="C8D7EA"/>
-                </a:solidFill>
-                <a:latin typeface="Nanum Gothic" pitchFamily="34" charset="0"/>
-                <a:ea typeface="Nanum Gothic" pitchFamily="34" charset="-122"/>
-                <a:cs typeface="Nanum Gothic" pitchFamily="34" charset="-120"/>
-              </a:rPr>
-              <a:t>departureDate · deadline · hazardous · roadCost</a:t>
-            </a:r>
-            <a:endParaRPr lang="en-US" sz="810" dirty="0"/>
-          </a:p>
-          <a:p>
-            <a:pPr indent="0" marL="0">
-              <a:buNone/>
-            </a:pPr>
-            <a:r>
-              <a:rPr lang="en-US" sz="810" dirty="0">
-                <a:solidFill>
-                  <a:srgbClr val="C8D7EA"/>
-                </a:solidFill>
-                <a:latin typeface="Nanum Gothic" pitchFamily="34" charset="0"/>
-                <a:ea typeface="Nanum Gothic" pitchFamily="34" charset="-122"/>
-                <a:cs typeface="Nanum Gothic" pitchFamily="34" charset="-120"/>
-              </a:rPr>
-              <a:t>cargo · weightTons</a:t>
-            </a:r>
-            <a:endParaRPr lang="en-US" sz="810" dirty="0"/>
+            <a:pPr algn="l">
+              <a:lnSpc>
+                <a:spcPct val="100000"/>
+              </a:lnSpc>
+              <a:spcBef>
+                <a:spcPts val="0"/>
+              </a:spcBef>
+              <a:spcAft>
+                <a:spcPts val="0"/>
+              </a:spcAft>
+            </a:pPr>
+            <a:r>
+              <a:rPr sz="740" b="0">
+                <a:solidFill>
+                  <a:srgbClr val="C7D5E7"/>
+                </a:solidFill>
+                <a:latin typeface="Nanum Gothic"/>
+              </a:rPr>
+              <a:t>위험물 yes/no 표준화 · JSON 실패·12초 초과 시 규칙 기반 추출</a:t>
+            </a:r>
           </a:p>
         </p:txBody>
       </p:sp>
